--- a/deck/display/Advertiser-Experience-Strategy.pptx
+++ b/deck/display/Advertiser-Experience-Strategy.pptx
@@ -22,9 +22,10 @@
     <p:sldId id="270" r:id="rId16"/>
     <p:sldId id="271" r:id="rId17"/>
     <p:sldId id="272" r:id="rId18"/>
+    <p:sldId id="273" r:id="rId19"/>
   </p:sldIdLst>
   <p:notesMasterIdLst>
-    <p:notesMasterId r:id="rId19"/>
+    <p:notesMasterId r:id="rId20"/>
   </p:notesMasterIdLst>
   <p:sldSz cx="12192000" cy="6858000"/>
   <p:notesSz cx="6858000" cy="12192000"/>
@@ -1134,7 +1135,7 @@
           <a:p>
             <a:r>
               <a:rPr lang="en-US" dirty="0"/>
-              <a:t>Read the columns, not the rows: every pain point has more than one initiative against it. Say the caveat — dots are intent, not impact.</a:t>
+              <a:t>Read the columns, not the rows. The bottom row counts initiatives, not impact. Fragmented is the thinnest column at three — that is the pain point to watch, and it is why the shared capabilities matter. Say the caveat: dots are intent, not impact, so two rows with five dots do not mean those two solve everything.</a:t>
             </a:r>
             <a:endParaRPr lang="en-US" dirty="0"/>
           </a:p>
@@ -1222,7 +1223,7 @@
           <a:p>
             <a:r>
               <a:rPr lang="en-US" dirty="0"/>
-              <a:t>End on the operating philosophy and the accountability model, not a feature list. Read the closing line and stop.</a:t>
+              <a:t>The operating philosophy and the accountability model, not a feature list. Five steps, matching the title. Read the closing line, then move to the ask.</a:t>
             </a:r>
             <a:endParaRPr lang="en-US" dirty="0"/>
           </a:p>
@@ -1246,6 +1247,94 @@
             <a:fld id="{F7021451-1387-4CA6-816F-3879F97B5CBC}" type="slidenum">
               <a:rPr lang="en-US"/>
               <a:t>17</a:t>
+            </a:fld>
+            <a:endParaRPr lang="en-US"/>
+          </a:p>
+        </p:txBody>
+      </p:sp>
+    </p:spTree>
+    <p:extLst>
+      <p:ext uri="{BB962C8B-B14F-4D97-AF65-F5344CB8AC3E}">
+        <p14:creationId xmlns:p14="http://schemas.microsoft.com/office/powerpoint/2010/main" val="1024086991"/>
+      </p:ext>
+    </p:extLst>
+  </p:cSld>
+  <p:clrMapOvr>
+    <a:masterClrMapping/>
+  </p:clrMapOvr>
+</p:notes>
+</file>
+
+<file path=ppt/notesSlides/notesSlide18.xml><?xml version="1.0" encoding="utf-8"?>
+<p:notes xmlns:a="http://schemas.openxmlformats.org/drawingml/2006/main" xmlns:r="http://schemas.openxmlformats.org/officeDocument/2006/relationships" xmlns:p="http://schemas.openxmlformats.org/presentationml/2006/main">
+  <p:cSld>
+    <p:spTree>
+      <p:nvGrpSpPr>
+        <p:cNvPr id="1" name=""/>
+        <p:cNvGrpSpPr/>
+        <p:nvPr/>
+      </p:nvGrpSpPr>
+      <p:grpSpPr>
+        <a:xfrm>
+          <a:off x="0" y="0"/>
+          <a:ext cx="0" cy="0"/>
+          <a:chOff x="0" y="0"/>
+          <a:chExt cx="0" cy="0"/>
+        </a:xfrm>
+      </p:grpSpPr>
+      <p:sp>
+        <p:nvSpPr>
+          <p:cNvPr id="2" name="Slide Image Placeholder 1"/>
+          <p:cNvSpPr>
+            <a:spLocks noGrp="1" noRot="1" noChangeAspect="1"/>
+          </p:cNvSpPr>
+          <p:nvPr>
+            <p:ph type="sldImg"/>
+          </p:nvPr>
+        </p:nvSpPr>
+        <p:spPr/>
+      </p:sp>
+      <p:sp>
+        <p:nvSpPr>
+          <p:cNvPr id="3" name="Notes Placeholder 2"/>
+          <p:cNvSpPr>
+            <a:spLocks noGrp="1"/>
+          </p:cNvSpPr>
+          <p:nvPr>
+            <p:ph type="body" idx="1"/>
+          </p:nvPr>
+        </p:nvSpPr>
+        <p:spPr/>
+        <p:txBody>
+          <a:bodyPr/>
+          <a:lstStyle/>
+          <a:p>
+            <a:r>
+              <a:rPr lang="en-US" dirty="0"/>
+              <a:t>These are proposals, not decisions already taken. Align is about the approach; Staff is about who does the diagnosis; Measure is about how we will know. If only one lands today, make it Align.</a:t>
+            </a:r>
+            <a:endParaRPr lang="en-US" dirty="0"/>
+          </a:p>
+        </p:txBody>
+      </p:sp>
+      <p:sp>
+        <p:nvSpPr>
+          <p:cNvPr id="4" name="Slide Number Placeholder 3"/>
+          <p:cNvSpPr>
+            <a:spLocks noGrp="1"/>
+          </p:cNvSpPr>
+          <p:nvPr>
+            <p:ph type="sldNum" sz="quarter" idx="10"/>
+          </p:nvPr>
+        </p:nvSpPr>
+        <p:spPr/>
+        <p:txBody>
+          <a:bodyPr/>
+          <a:lstStyle/>
+          <a:p>
+            <a:fld id="{F7021451-1387-4CA6-816F-3879F97B5CBC}" type="slidenum">
+              <a:rPr lang="en-US"/>
+              <a:t>18</a:t>
             </a:fld>
             <a:endParaRPr lang="en-US"/>
           </a:p>
@@ -1840,7 +1929,7 @@
           <a:p>
             <a:r>
               <a:rPr lang="en-US" dirty="0"/>
-              <a:t>This is where the deck returns decisively from Display to the broader strategy. Read it top to bottom: the jobs are the same, so the capabilities should be too. Channels adapt only where the media genuinely differs.</a:t>
+              <a:t>This is where the deck returns decisively from Display to the broader strategy. The top row is the same six-step journey from the opening slide. Read it top to bottom: the jobs are the same, so the capabilities should be too. Channels adapt only where the media genuinely differs.</a:t>
             </a:r>
             <a:endParaRPr lang="en-US" dirty="0"/>
           </a:p>
@@ -3365,7 +3454,7 @@
                 <a:ea typeface="Everyday Sans Mono" pitchFamily="34" charset="-122"/>
                 <a:cs typeface="Everyday Sans Mono" pitchFamily="34" charset="-120"/>
               </a:rPr>
-              <a:t>01 / 17</a:t>
+              <a:t>01 / 18</a:t>
             </a:r>
             <a:endParaRPr lang="en-US" sz="650" dirty="0"/>
           </a:p>
@@ -4660,7 +4749,7 @@
                 <a:ea typeface="Everyday Sans Mono" pitchFamily="34" charset="-122"/>
                 <a:cs typeface="Everyday Sans Mono" pitchFamily="34" charset="-120"/>
               </a:rPr>
-              <a:t>10 / 17</a:t>
+              <a:t>10 / 18</a:t>
             </a:r>
             <a:endParaRPr lang="en-US" sz="650" dirty="0"/>
           </a:p>
@@ -6070,7 +6159,7 @@
                 <a:ea typeface="Everyday Sans Mono" pitchFamily="34" charset="-122"/>
                 <a:cs typeface="Everyday Sans Mono" pitchFamily="34" charset="-120"/>
               </a:rPr>
-              <a:t>11 / 17</a:t>
+              <a:t>11 / 18</a:t>
             </a:r>
             <a:endParaRPr lang="en-US" sz="650" dirty="0"/>
           </a:p>
@@ -7740,7 +7829,7 @@
                 <a:ea typeface="Everyday Sans Mono" pitchFamily="34" charset="-122"/>
                 <a:cs typeface="Everyday Sans Mono" pitchFamily="34" charset="-120"/>
               </a:rPr>
-              <a:t>12 / 17</a:t>
+              <a:t>12 / 18</a:t>
             </a:r>
             <a:endParaRPr lang="en-US" sz="650" dirty="0"/>
           </a:p>
@@ -9166,7 +9255,7 @@
                 <a:ea typeface="Everyday Sans Mono" pitchFamily="34" charset="-122"/>
                 <a:cs typeface="Everyday Sans Mono" pitchFamily="34" charset="-120"/>
               </a:rPr>
-              <a:t>13 / 17</a:t>
+              <a:t>13 / 18</a:t>
             </a:r>
             <a:endParaRPr lang="en-US" sz="650" dirty="0"/>
           </a:p>
@@ -10602,7 +10691,7 @@
                 <a:ea typeface="Everyday Sans Mono" pitchFamily="34" charset="-122"/>
                 <a:cs typeface="Everyday Sans Mono" pitchFamily="34" charset="-120"/>
               </a:rPr>
-              <a:t>14 / 17</a:t>
+              <a:t>14 / 18</a:t>
             </a:r>
             <a:endParaRPr lang="en-US" sz="650" dirty="0"/>
           </a:p>
@@ -12063,7 +12152,7 @@
                 <a:ea typeface="Everyday Sans Mono" pitchFamily="34" charset="-122"/>
                 <a:cs typeface="Everyday Sans Mono" pitchFamily="34" charset="-120"/>
               </a:rPr>
-              <a:t>15 / 17</a:t>
+              <a:t>15 / 18</a:t>
             </a:r>
             <a:endParaRPr lang="en-US" sz="650" dirty="0"/>
           </a:p>
@@ -12131,7 +12220,7 @@
         </p:nvSpPr>
         <p:spPr>
           <a:xfrm>
-            <a:off x="508000" y="2633861"/>
+            <a:off x="508000" y="2567583"/>
             <a:ext cx="3911699" cy="0"/>
           </a:xfrm>
           <a:prstGeom prst="line">
@@ -12154,7 +12243,7 @@
         </p:nvSpPr>
         <p:spPr>
           <a:xfrm>
-            <a:off x="4419699" y="2633861"/>
+            <a:off x="4419699" y="2567583"/>
             <a:ext cx="1452860" cy="0"/>
           </a:xfrm>
           <a:prstGeom prst="line">
@@ -12177,7 +12266,7 @@
         </p:nvSpPr>
         <p:spPr>
           <a:xfrm>
-            <a:off x="5872559" y="2633861"/>
+            <a:off x="5872559" y="2567583"/>
             <a:ext cx="1452860" cy="0"/>
           </a:xfrm>
           <a:prstGeom prst="line">
@@ -12200,7 +12289,7 @@
         </p:nvSpPr>
         <p:spPr>
           <a:xfrm>
-            <a:off x="7325420" y="2633861"/>
+            <a:off x="7325420" y="2567583"/>
             <a:ext cx="1452860" cy="0"/>
           </a:xfrm>
           <a:prstGeom prst="line">
@@ -12223,7 +12312,7 @@
         </p:nvSpPr>
         <p:spPr>
           <a:xfrm>
-            <a:off x="8778280" y="2633861"/>
+            <a:off x="8778280" y="2567583"/>
             <a:ext cx="1452860" cy="0"/>
           </a:xfrm>
           <a:prstGeom prst="line">
@@ -12246,7 +12335,7 @@
         </p:nvSpPr>
         <p:spPr>
           <a:xfrm>
-            <a:off x="10231140" y="2633861"/>
+            <a:off x="10231140" y="2567583"/>
             <a:ext cx="1452860" cy="0"/>
           </a:xfrm>
           <a:prstGeom prst="line">
@@ -12269,7 +12358,7 @@
         </p:nvSpPr>
         <p:spPr>
           <a:xfrm>
-            <a:off x="508000" y="2921496"/>
+            <a:off x="508000" y="2829818"/>
             <a:ext cx="3911699" cy="0"/>
           </a:xfrm>
           <a:prstGeom prst="line">
@@ -12292,7 +12381,7 @@
         </p:nvSpPr>
         <p:spPr>
           <a:xfrm>
-            <a:off x="4419699" y="2921496"/>
+            <a:off x="4419699" y="2829818"/>
             <a:ext cx="1452860" cy="0"/>
           </a:xfrm>
           <a:prstGeom prst="line">
@@ -12315,7 +12404,7 @@
         </p:nvSpPr>
         <p:spPr>
           <a:xfrm>
-            <a:off x="5872559" y="2921496"/>
+            <a:off x="5872559" y="2829818"/>
             <a:ext cx="1452860" cy="0"/>
           </a:xfrm>
           <a:prstGeom prst="line">
@@ -12338,7 +12427,7 @@
         </p:nvSpPr>
         <p:spPr>
           <a:xfrm>
-            <a:off x="7325420" y="2921496"/>
+            <a:off x="7325420" y="2829818"/>
             <a:ext cx="1452860" cy="0"/>
           </a:xfrm>
           <a:prstGeom prst="line">
@@ -12361,7 +12450,7 @@
         </p:nvSpPr>
         <p:spPr>
           <a:xfrm>
-            <a:off x="8778280" y="2921496"/>
+            <a:off x="8778280" y="2829818"/>
             <a:ext cx="1452860" cy="0"/>
           </a:xfrm>
           <a:prstGeom prst="line">
@@ -12384,7 +12473,7 @@
         </p:nvSpPr>
         <p:spPr>
           <a:xfrm>
-            <a:off x="10231140" y="2921496"/>
+            <a:off x="10231140" y="2829818"/>
             <a:ext cx="1452860" cy="0"/>
           </a:xfrm>
           <a:prstGeom prst="line">
@@ -12407,7 +12496,7 @@
         </p:nvSpPr>
         <p:spPr>
           <a:xfrm>
-            <a:off x="508000" y="3209131"/>
+            <a:off x="508000" y="3092053"/>
             <a:ext cx="3911699" cy="0"/>
           </a:xfrm>
           <a:prstGeom prst="line">
@@ -12430,7 +12519,7 @@
         </p:nvSpPr>
         <p:spPr>
           <a:xfrm>
-            <a:off x="4419699" y="3209131"/>
+            <a:off x="4419699" y="3092053"/>
             <a:ext cx="1452860" cy="0"/>
           </a:xfrm>
           <a:prstGeom prst="line">
@@ -12453,7 +12542,7 @@
         </p:nvSpPr>
         <p:spPr>
           <a:xfrm>
-            <a:off x="5872559" y="3209131"/>
+            <a:off x="5872559" y="3092053"/>
             <a:ext cx="1452860" cy="0"/>
           </a:xfrm>
           <a:prstGeom prst="line">
@@ -12476,7 +12565,7 @@
         </p:nvSpPr>
         <p:spPr>
           <a:xfrm>
-            <a:off x="7325420" y="3209131"/>
+            <a:off x="7325420" y="3092053"/>
             <a:ext cx="1452860" cy="0"/>
           </a:xfrm>
           <a:prstGeom prst="line">
@@ -12499,7 +12588,7 @@
         </p:nvSpPr>
         <p:spPr>
           <a:xfrm>
-            <a:off x="8778280" y="3209131"/>
+            <a:off x="8778280" y="3092053"/>
             <a:ext cx="1452860" cy="0"/>
           </a:xfrm>
           <a:prstGeom prst="line">
@@ -12522,7 +12611,7 @@
         </p:nvSpPr>
         <p:spPr>
           <a:xfrm>
-            <a:off x="10231140" y="3209131"/>
+            <a:off x="10231140" y="3092053"/>
             <a:ext cx="1452860" cy="0"/>
           </a:xfrm>
           <a:prstGeom prst="line">
@@ -12545,7 +12634,7 @@
         </p:nvSpPr>
         <p:spPr>
           <a:xfrm>
-            <a:off x="508000" y="3496766"/>
+            <a:off x="508000" y="3354288"/>
             <a:ext cx="3911699" cy="0"/>
           </a:xfrm>
           <a:prstGeom prst="line">
@@ -12568,7 +12657,7 @@
         </p:nvSpPr>
         <p:spPr>
           <a:xfrm>
-            <a:off x="4419699" y="3496766"/>
+            <a:off x="4419699" y="3354288"/>
             <a:ext cx="1452860" cy="0"/>
           </a:xfrm>
           <a:prstGeom prst="line">
@@ -12591,7 +12680,7 @@
         </p:nvSpPr>
         <p:spPr>
           <a:xfrm>
-            <a:off x="5872559" y="3496766"/>
+            <a:off x="5872559" y="3354288"/>
             <a:ext cx="1452860" cy="0"/>
           </a:xfrm>
           <a:prstGeom prst="line">
@@ -12614,7 +12703,7 @@
         </p:nvSpPr>
         <p:spPr>
           <a:xfrm>
-            <a:off x="7325420" y="3496766"/>
+            <a:off x="7325420" y="3354288"/>
             <a:ext cx="1452860" cy="0"/>
           </a:xfrm>
           <a:prstGeom prst="line">
@@ -12637,7 +12726,7 @@
         </p:nvSpPr>
         <p:spPr>
           <a:xfrm>
-            <a:off x="8778280" y="3496766"/>
+            <a:off x="8778280" y="3354288"/>
             <a:ext cx="1452860" cy="0"/>
           </a:xfrm>
           <a:prstGeom prst="line">
@@ -12660,7 +12749,7 @@
         </p:nvSpPr>
         <p:spPr>
           <a:xfrm>
-            <a:off x="10231140" y="3496766"/>
+            <a:off x="10231140" y="3354288"/>
             <a:ext cx="1452860" cy="0"/>
           </a:xfrm>
           <a:prstGeom prst="line">
@@ -12683,7 +12772,7 @@
         </p:nvSpPr>
         <p:spPr>
           <a:xfrm>
-            <a:off x="508000" y="3784402"/>
+            <a:off x="508000" y="3616523"/>
             <a:ext cx="3911699" cy="0"/>
           </a:xfrm>
           <a:prstGeom prst="line">
@@ -12706,7 +12795,7 @@
         </p:nvSpPr>
         <p:spPr>
           <a:xfrm>
-            <a:off x="4419699" y="3784402"/>
+            <a:off x="4419699" y="3616523"/>
             <a:ext cx="1452860" cy="0"/>
           </a:xfrm>
           <a:prstGeom prst="line">
@@ -12729,7 +12818,7 @@
         </p:nvSpPr>
         <p:spPr>
           <a:xfrm>
-            <a:off x="5872559" y="3784402"/>
+            <a:off x="5872559" y="3616523"/>
             <a:ext cx="1452860" cy="0"/>
           </a:xfrm>
           <a:prstGeom prst="line">
@@ -12752,7 +12841,7 @@
         </p:nvSpPr>
         <p:spPr>
           <a:xfrm>
-            <a:off x="7325420" y="3784402"/>
+            <a:off x="7325420" y="3616523"/>
             <a:ext cx="1452860" cy="0"/>
           </a:xfrm>
           <a:prstGeom prst="line">
@@ -12775,7 +12864,7 @@
         </p:nvSpPr>
         <p:spPr>
           <a:xfrm>
-            <a:off x="8778280" y="3784402"/>
+            <a:off x="8778280" y="3616523"/>
             <a:ext cx="1452860" cy="0"/>
           </a:xfrm>
           <a:prstGeom prst="line">
@@ -12798,7 +12887,7 @@
         </p:nvSpPr>
         <p:spPr>
           <a:xfrm>
-            <a:off x="10231140" y="3784402"/>
+            <a:off x="10231140" y="3616523"/>
             <a:ext cx="1452860" cy="0"/>
           </a:xfrm>
           <a:prstGeom prst="line">
@@ -12821,7 +12910,7 @@
         </p:nvSpPr>
         <p:spPr>
           <a:xfrm>
-            <a:off x="508000" y="4072037"/>
+            <a:off x="508000" y="3878759"/>
             <a:ext cx="3911699" cy="0"/>
           </a:xfrm>
           <a:prstGeom prst="line">
@@ -12844,7 +12933,7 @@
         </p:nvSpPr>
         <p:spPr>
           <a:xfrm>
-            <a:off x="4419699" y="4072037"/>
+            <a:off x="4419699" y="3878759"/>
             <a:ext cx="1452860" cy="0"/>
           </a:xfrm>
           <a:prstGeom prst="line">
@@ -12867,7 +12956,7 @@
         </p:nvSpPr>
         <p:spPr>
           <a:xfrm>
-            <a:off x="5872559" y="4072037"/>
+            <a:off x="5872559" y="3878759"/>
             <a:ext cx="1452860" cy="0"/>
           </a:xfrm>
           <a:prstGeom prst="line">
@@ -12890,7 +12979,7 @@
         </p:nvSpPr>
         <p:spPr>
           <a:xfrm>
-            <a:off x="7325420" y="4072037"/>
+            <a:off x="7325420" y="3878759"/>
             <a:ext cx="1452860" cy="0"/>
           </a:xfrm>
           <a:prstGeom prst="line">
@@ -12913,7 +13002,7 @@
         </p:nvSpPr>
         <p:spPr>
           <a:xfrm>
-            <a:off x="8778280" y="4072037"/>
+            <a:off x="8778280" y="3878759"/>
             <a:ext cx="1452860" cy="0"/>
           </a:xfrm>
           <a:prstGeom prst="line">
@@ -12936,7 +13025,7 @@
         </p:nvSpPr>
         <p:spPr>
           <a:xfrm>
-            <a:off x="10231140" y="4072037"/>
+            <a:off x="10231140" y="3878759"/>
             <a:ext cx="1452860" cy="0"/>
           </a:xfrm>
           <a:prstGeom prst="line">
@@ -12959,7 +13048,7 @@
         </p:nvSpPr>
         <p:spPr>
           <a:xfrm>
-            <a:off x="508000" y="4359672"/>
+            <a:off x="508000" y="4140994"/>
             <a:ext cx="3911699" cy="0"/>
           </a:xfrm>
           <a:prstGeom prst="line">
@@ -12982,7 +13071,7 @@
         </p:nvSpPr>
         <p:spPr>
           <a:xfrm>
-            <a:off x="4419699" y="4359672"/>
+            <a:off x="4419699" y="4140994"/>
             <a:ext cx="1452860" cy="0"/>
           </a:xfrm>
           <a:prstGeom prst="line">
@@ -13005,7 +13094,7 @@
         </p:nvSpPr>
         <p:spPr>
           <a:xfrm>
-            <a:off x="5872559" y="4359672"/>
+            <a:off x="5872559" y="4140994"/>
             <a:ext cx="1452860" cy="0"/>
           </a:xfrm>
           <a:prstGeom prst="line">
@@ -13028,7 +13117,7 @@
         </p:nvSpPr>
         <p:spPr>
           <a:xfrm>
-            <a:off x="7325420" y="4359672"/>
+            <a:off x="7325420" y="4140994"/>
             <a:ext cx="1452860" cy="0"/>
           </a:xfrm>
           <a:prstGeom prst="line">
@@ -13051,7 +13140,7 @@
         </p:nvSpPr>
         <p:spPr>
           <a:xfrm>
-            <a:off x="8778280" y="4359672"/>
+            <a:off x="8778280" y="4140994"/>
             <a:ext cx="1452860" cy="0"/>
           </a:xfrm>
           <a:prstGeom prst="line">
@@ -13074,7 +13163,7 @@
         </p:nvSpPr>
         <p:spPr>
           <a:xfrm>
-            <a:off x="10231140" y="4359672"/>
+            <a:off x="10231140" y="4140994"/>
             <a:ext cx="1452860" cy="0"/>
           </a:xfrm>
           <a:prstGeom prst="line">
@@ -13097,7 +13186,7 @@
         </p:nvSpPr>
         <p:spPr>
           <a:xfrm>
-            <a:off x="508000" y="4647307"/>
+            <a:off x="508000" y="4403229"/>
             <a:ext cx="3911699" cy="0"/>
           </a:xfrm>
           <a:prstGeom prst="line">
@@ -13120,7 +13209,7 @@
         </p:nvSpPr>
         <p:spPr>
           <a:xfrm>
-            <a:off x="4419699" y="4647307"/>
+            <a:off x="4419699" y="4403229"/>
             <a:ext cx="1452860" cy="0"/>
           </a:xfrm>
           <a:prstGeom prst="line">
@@ -13143,7 +13232,7 @@
         </p:nvSpPr>
         <p:spPr>
           <a:xfrm>
-            <a:off x="5872559" y="4647307"/>
+            <a:off x="5872559" y="4403229"/>
             <a:ext cx="1452860" cy="0"/>
           </a:xfrm>
           <a:prstGeom prst="line">
@@ -13166,7 +13255,7 @@
         </p:nvSpPr>
         <p:spPr>
           <a:xfrm>
-            <a:off x="7325420" y="4647307"/>
+            <a:off x="7325420" y="4403229"/>
             <a:ext cx="1452860" cy="0"/>
           </a:xfrm>
           <a:prstGeom prst="line">
@@ -13189,7 +13278,7 @@
         </p:nvSpPr>
         <p:spPr>
           <a:xfrm>
-            <a:off x="8778280" y="4647307"/>
+            <a:off x="8778280" y="4403229"/>
             <a:ext cx="1452860" cy="0"/>
           </a:xfrm>
           <a:prstGeom prst="line">
@@ -13212,7 +13301,7 @@
         </p:nvSpPr>
         <p:spPr>
           <a:xfrm>
-            <a:off x="10231140" y="4647307"/>
+            <a:off x="10231140" y="4403229"/>
             <a:ext cx="1452860" cy="0"/>
           </a:xfrm>
           <a:prstGeom prst="line">
@@ -13235,7 +13324,7 @@
         </p:nvSpPr>
         <p:spPr>
           <a:xfrm>
-            <a:off x="508000" y="4934942"/>
+            <a:off x="508000" y="4665464"/>
             <a:ext cx="3911699" cy="0"/>
           </a:xfrm>
           <a:prstGeom prst="line">
@@ -13258,7 +13347,7 @@
         </p:nvSpPr>
         <p:spPr>
           <a:xfrm>
-            <a:off x="4419699" y="4934942"/>
+            <a:off x="4419699" y="4665464"/>
             <a:ext cx="1452860" cy="0"/>
           </a:xfrm>
           <a:prstGeom prst="line">
@@ -13281,7 +13370,7 @@
         </p:nvSpPr>
         <p:spPr>
           <a:xfrm>
-            <a:off x="5872559" y="4934942"/>
+            <a:off x="5872559" y="4665464"/>
             <a:ext cx="1452860" cy="0"/>
           </a:xfrm>
           <a:prstGeom prst="line">
@@ -13304,7 +13393,7 @@
         </p:nvSpPr>
         <p:spPr>
           <a:xfrm>
-            <a:off x="7325420" y="4934942"/>
+            <a:off x="7325420" y="4665464"/>
             <a:ext cx="1452860" cy="0"/>
           </a:xfrm>
           <a:prstGeom prst="line">
@@ -13327,7 +13416,7 @@
         </p:nvSpPr>
         <p:spPr>
           <a:xfrm>
-            <a:off x="8778280" y="4934942"/>
+            <a:off x="8778280" y="4665464"/>
             <a:ext cx="1452860" cy="0"/>
           </a:xfrm>
           <a:prstGeom prst="line">
@@ -13350,7 +13439,7 @@
         </p:nvSpPr>
         <p:spPr>
           <a:xfrm>
-            <a:off x="10231140" y="4934942"/>
+            <a:off x="10231140" y="4665464"/>
             <a:ext cx="1452860" cy="0"/>
           </a:xfrm>
           <a:prstGeom prst="line">
@@ -13373,8 +13462,8 @@
         </p:nvSpPr>
         <p:spPr>
           <a:xfrm>
-            <a:off x="508000" y="5623917"/>
-            <a:ext cx="11176000" cy="0"/>
+            <a:off x="508000" y="4671814"/>
+            <a:ext cx="3911699" cy="0"/>
           </a:xfrm>
           <a:prstGeom prst="line">
             <a:avLst/>
@@ -13390,7 +13479,283 @@
       </p:sp>
       <p:sp>
         <p:nvSpPr>
-          <p:cNvPr id="58" name="Text 56"/>
+          <p:cNvPr id="58" name="Shape 56"/>
+          <p:cNvSpPr/>
+          <p:nvPr/>
+        </p:nvSpPr>
+        <p:spPr>
+          <a:xfrm>
+            <a:off x="508000" y="4996259"/>
+            <a:ext cx="3911699" cy="0"/>
+          </a:xfrm>
+          <a:prstGeom prst="line">
+            <a:avLst/>
+          </a:prstGeom>
+          <a:noFill/>
+          <a:ln w="6350">
+            <a:solidFill>
+              <a:srgbClr val="E4E8EF"/>
+            </a:solidFill>
+            <a:prstDash val="solid"/>
+          </a:ln>
+        </p:spPr>
+      </p:sp>
+      <p:sp>
+        <p:nvSpPr>
+          <p:cNvPr id="59" name="Shape 57"/>
+          <p:cNvSpPr/>
+          <p:nvPr/>
+        </p:nvSpPr>
+        <p:spPr>
+          <a:xfrm>
+            <a:off x="4419699" y="4671814"/>
+            <a:ext cx="1452860" cy="0"/>
+          </a:xfrm>
+          <a:prstGeom prst="line">
+            <a:avLst/>
+          </a:prstGeom>
+          <a:noFill/>
+          <a:ln w="6350">
+            <a:solidFill>
+              <a:srgbClr val="0053E2"/>
+            </a:solidFill>
+            <a:prstDash val="solid"/>
+          </a:ln>
+        </p:spPr>
+      </p:sp>
+      <p:sp>
+        <p:nvSpPr>
+          <p:cNvPr id="60" name="Shape 58"/>
+          <p:cNvSpPr/>
+          <p:nvPr/>
+        </p:nvSpPr>
+        <p:spPr>
+          <a:xfrm>
+            <a:off x="4419699" y="4996259"/>
+            <a:ext cx="1452860" cy="0"/>
+          </a:xfrm>
+          <a:prstGeom prst="line">
+            <a:avLst/>
+          </a:prstGeom>
+          <a:noFill/>
+          <a:ln w="6350">
+            <a:solidFill>
+              <a:srgbClr val="E4E8EF"/>
+            </a:solidFill>
+            <a:prstDash val="solid"/>
+          </a:ln>
+        </p:spPr>
+      </p:sp>
+      <p:sp>
+        <p:nvSpPr>
+          <p:cNvPr id="61" name="Shape 59"/>
+          <p:cNvSpPr/>
+          <p:nvPr/>
+        </p:nvSpPr>
+        <p:spPr>
+          <a:xfrm>
+            <a:off x="5872559" y="4671814"/>
+            <a:ext cx="1452860" cy="0"/>
+          </a:xfrm>
+          <a:prstGeom prst="line">
+            <a:avLst/>
+          </a:prstGeom>
+          <a:noFill/>
+          <a:ln w="6350">
+            <a:solidFill>
+              <a:srgbClr val="0053E2"/>
+            </a:solidFill>
+            <a:prstDash val="solid"/>
+          </a:ln>
+        </p:spPr>
+      </p:sp>
+      <p:sp>
+        <p:nvSpPr>
+          <p:cNvPr id="62" name="Shape 60"/>
+          <p:cNvSpPr/>
+          <p:nvPr/>
+        </p:nvSpPr>
+        <p:spPr>
+          <a:xfrm>
+            <a:off x="5872559" y="4996259"/>
+            <a:ext cx="1452860" cy="0"/>
+          </a:xfrm>
+          <a:prstGeom prst="line">
+            <a:avLst/>
+          </a:prstGeom>
+          <a:noFill/>
+          <a:ln w="6350">
+            <a:solidFill>
+              <a:srgbClr val="E4E8EF"/>
+            </a:solidFill>
+            <a:prstDash val="solid"/>
+          </a:ln>
+        </p:spPr>
+      </p:sp>
+      <p:sp>
+        <p:nvSpPr>
+          <p:cNvPr id="63" name="Shape 61"/>
+          <p:cNvSpPr/>
+          <p:nvPr/>
+        </p:nvSpPr>
+        <p:spPr>
+          <a:xfrm>
+            <a:off x="7325420" y="4671814"/>
+            <a:ext cx="1452860" cy="0"/>
+          </a:xfrm>
+          <a:prstGeom prst="line">
+            <a:avLst/>
+          </a:prstGeom>
+          <a:noFill/>
+          <a:ln w="6350">
+            <a:solidFill>
+              <a:srgbClr val="0053E2"/>
+            </a:solidFill>
+            <a:prstDash val="solid"/>
+          </a:ln>
+        </p:spPr>
+      </p:sp>
+      <p:sp>
+        <p:nvSpPr>
+          <p:cNvPr id="64" name="Shape 62"/>
+          <p:cNvSpPr/>
+          <p:nvPr/>
+        </p:nvSpPr>
+        <p:spPr>
+          <a:xfrm>
+            <a:off x="7325420" y="4996259"/>
+            <a:ext cx="1452860" cy="0"/>
+          </a:xfrm>
+          <a:prstGeom prst="line">
+            <a:avLst/>
+          </a:prstGeom>
+          <a:noFill/>
+          <a:ln w="6350">
+            <a:solidFill>
+              <a:srgbClr val="E4E8EF"/>
+            </a:solidFill>
+            <a:prstDash val="solid"/>
+          </a:ln>
+        </p:spPr>
+      </p:sp>
+      <p:sp>
+        <p:nvSpPr>
+          <p:cNvPr id="65" name="Shape 63"/>
+          <p:cNvSpPr/>
+          <p:nvPr/>
+        </p:nvSpPr>
+        <p:spPr>
+          <a:xfrm>
+            <a:off x="8778280" y="4671814"/>
+            <a:ext cx="1452860" cy="0"/>
+          </a:xfrm>
+          <a:prstGeom prst="line">
+            <a:avLst/>
+          </a:prstGeom>
+          <a:noFill/>
+          <a:ln w="6350">
+            <a:solidFill>
+              <a:srgbClr val="0053E2"/>
+            </a:solidFill>
+            <a:prstDash val="solid"/>
+          </a:ln>
+        </p:spPr>
+      </p:sp>
+      <p:sp>
+        <p:nvSpPr>
+          <p:cNvPr id="66" name="Shape 64"/>
+          <p:cNvSpPr/>
+          <p:nvPr/>
+        </p:nvSpPr>
+        <p:spPr>
+          <a:xfrm>
+            <a:off x="8778280" y="4996259"/>
+            <a:ext cx="1452860" cy="0"/>
+          </a:xfrm>
+          <a:prstGeom prst="line">
+            <a:avLst/>
+          </a:prstGeom>
+          <a:noFill/>
+          <a:ln w="6350">
+            <a:solidFill>
+              <a:srgbClr val="E4E8EF"/>
+            </a:solidFill>
+            <a:prstDash val="solid"/>
+          </a:ln>
+        </p:spPr>
+      </p:sp>
+      <p:sp>
+        <p:nvSpPr>
+          <p:cNvPr id="67" name="Shape 65"/>
+          <p:cNvSpPr/>
+          <p:nvPr/>
+        </p:nvSpPr>
+        <p:spPr>
+          <a:xfrm>
+            <a:off x="10231140" y="4671814"/>
+            <a:ext cx="1452860" cy="0"/>
+          </a:xfrm>
+          <a:prstGeom prst="line">
+            <a:avLst/>
+          </a:prstGeom>
+          <a:noFill/>
+          <a:ln w="6350">
+            <a:solidFill>
+              <a:srgbClr val="0053E2"/>
+            </a:solidFill>
+            <a:prstDash val="solid"/>
+          </a:ln>
+        </p:spPr>
+      </p:sp>
+      <p:sp>
+        <p:nvSpPr>
+          <p:cNvPr id="68" name="Shape 66"/>
+          <p:cNvSpPr/>
+          <p:nvPr/>
+        </p:nvSpPr>
+        <p:spPr>
+          <a:xfrm>
+            <a:off x="10231140" y="4996259"/>
+            <a:ext cx="1452860" cy="0"/>
+          </a:xfrm>
+          <a:prstGeom prst="line">
+            <a:avLst/>
+          </a:prstGeom>
+          <a:noFill/>
+          <a:ln w="6350">
+            <a:solidFill>
+              <a:srgbClr val="E4E8EF"/>
+            </a:solidFill>
+            <a:prstDash val="solid"/>
+          </a:ln>
+        </p:spPr>
+      </p:sp>
+      <p:sp>
+        <p:nvSpPr>
+          <p:cNvPr id="69" name="Shape 67"/>
+          <p:cNvSpPr/>
+          <p:nvPr/>
+        </p:nvSpPr>
+        <p:spPr>
+          <a:xfrm>
+            <a:off x="508000" y="5685234"/>
+            <a:ext cx="11176000" cy="0"/>
+          </a:xfrm>
+          <a:prstGeom prst="line">
+            <a:avLst/>
+          </a:prstGeom>
+          <a:noFill/>
+          <a:ln w="6350">
+            <a:solidFill>
+              <a:srgbClr val="0053E2"/>
+            </a:solidFill>
+            <a:prstDash val="solid"/>
+          </a:ln>
+        </p:spPr>
+      </p:sp>
+      <p:sp>
+        <p:nvSpPr>
+          <p:cNvPr id="70" name="Text 68"/>
           <p:cNvSpPr txBox="1"/>
           <p:nvPr/>
         </p:nvSpPr>
@@ -13432,7 +13797,7 @@
       </p:sp>
       <p:sp>
         <p:nvSpPr>
-          <p:cNvPr id="59" name="Text 57"/>
+          <p:cNvPr id="71" name="Text 69"/>
           <p:cNvSpPr txBox="1"/>
           <p:nvPr/>
         </p:nvSpPr>
@@ -13508,7 +13873,7 @@
       </p:sp>
       <p:sp>
         <p:nvSpPr>
-          <p:cNvPr id="60" name="Text 58"/>
+          <p:cNvPr id="72" name="Text 70"/>
           <p:cNvSpPr txBox="1"/>
           <p:nvPr/>
         </p:nvSpPr>
@@ -13550,13 +13915,13 @@
       </p:sp>
       <p:sp>
         <p:nvSpPr>
-          <p:cNvPr id="61" name="Text 59"/>
-          <p:cNvSpPr txBox="1"/>
-          <p:nvPr/>
-        </p:nvSpPr>
-        <p:spPr>
-          <a:xfrm>
-            <a:off x="508000" y="2481461"/>
+          <p:cNvPr id="73" name="Text 71"/>
+          <p:cNvSpPr txBox="1"/>
+          <p:nvPr/>
+        </p:nvSpPr>
+        <p:spPr>
+          <a:xfrm>
+            <a:off x="508000" y="2427883"/>
             <a:ext cx="4128623" cy="85725"/>
           </a:xfrm>
           <a:prstGeom prst="rect">
@@ -13592,13 +13957,13 @@
       </p:sp>
       <p:sp>
         <p:nvSpPr>
-          <p:cNvPr id="62" name="Text 60"/>
-          <p:cNvSpPr txBox="1"/>
-          <p:nvPr/>
-        </p:nvSpPr>
-        <p:spPr>
-          <a:xfrm>
-            <a:off x="4343499" y="2481461"/>
+          <p:cNvPr id="74" name="Text 72"/>
+          <p:cNvSpPr txBox="1"/>
+          <p:nvPr/>
+        </p:nvSpPr>
+        <p:spPr>
+          <a:xfrm>
+            <a:off x="4343499" y="2427883"/>
             <a:ext cx="1516360" cy="85725"/>
           </a:xfrm>
           <a:prstGeom prst="rect">
@@ -13634,13 +13999,13 @@
       </p:sp>
       <p:sp>
         <p:nvSpPr>
-          <p:cNvPr id="63" name="Text 61"/>
-          <p:cNvSpPr txBox="1"/>
-          <p:nvPr/>
-        </p:nvSpPr>
-        <p:spPr>
-          <a:xfrm>
-            <a:off x="5796359" y="2481461"/>
+          <p:cNvPr id="75" name="Text 73"/>
+          <p:cNvSpPr txBox="1"/>
+          <p:nvPr/>
+        </p:nvSpPr>
+        <p:spPr>
+          <a:xfrm>
+            <a:off x="5796359" y="2427883"/>
             <a:ext cx="1516360" cy="85725"/>
           </a:xfrm>
           <a:prstGeom prst="rect">
@@ -13676,13 +14041,13 @@
       </p:sp>
       <p:sp>
         <p:nvSpPr>
-          <p:cNvPr id="64" name="Text 62"/>
-          <p:cNvSpPr txBox="1"/>
-          <p:nvPr/>
-        </p:nvSpPr>
-        <p:spPr>
-          <a:xfrm>
-            <a:off x="7249220" y="2481461"/>
+          <p:cNvPr id="76" name="Text 74"/>
+          <p:cNvSpPr txBox="1"/>
+          <p:nvPr/>
+        </p:nvSpPr>
+        <p:spPr>
+          <a:xfrm>
+            <a:off x="7249220" y="2427883"/>
             <a:ext cx="1516360" cy="85725"/>
           </a:xfrm>
           <a:prstGeom prst="rect">
@@ -13718,13 +14083,13 @@
       </p:sp>
       <p:sp>
         <p:nvSpPr>
-          <p:cNvPr id="65" name="Text 63"/>
-          <p:cNvSpPr txBox="1"/>
-          <p:nvPr/>
-        </p:nvSpPr>
-        <p:spPr>
-          <a:xfrm>
-            <a:off x="8702080" y="2481461"/>
+          <p:cNvPr id="77" name="Text 75"/>
+          <p:cNvSpPr txBox="1"/>
+          <p:nvPr/>
+        </p:nvSpPr>
+        <p:spPr>
+          <a:xfrm>
+            <a:off x="8702080" y="2427883"/>
             <a:ext cx="1516360" cy="85725"/>
           </a:xfrm>
           <a:prstGeom prst="rect">
@@ -13760,13 +14125,13 @@
       </p:sp>
       <p:sp>
         <p:nvSpPr>
-          <p:cNvPr id="66" name="Text 64"/>
-          <p:cNvSpPr txBox="1"/>
-          <p:nvPr/>
-        </p:nvSpPr>
-        <p:spPr>
-          <a:xfrm>
-            <a:off x="10154940" y="2481461"/>
+          <p:cNvPr id="78" name="Text 76"/>
+          <p:cNvSpPr txBox="1"/>
+          <p:nvPr/>
+        </p:nvSpPr>
+        <p:spPr>
+          <a:xfrm>
+            <a:off x="10154940" y="2427883"/>
             <a:ext cx="1516360" cy="85725"/>
           </a:xfrm>
           <a:prstGeom prst="rect">
@@ -13802,13 +14167,13 @@
       </p:sp>
       <p:sp>
         <p:nvSpPr>
-          <p:cNvPr id="67" name="Text 65"/>
-          <p:cNvSpPr txBox="1"/>
-          <p:nvPr/>
-        </p:nvSpPr>
-        <p:spPr>
-          <a:xfrm>
-            <a:off x="508000" y="2700536"/>
+          <p:cNvPr id="79" name="Text 77"/>
+          <p:cNvSpPr txBox="1"/>
+          <p:nvPr/>
+        </p:nvSpPr>
+        <p:spPr>
+          <a:xfrm>
+            <a:off x="508000" y="2621558"/>
             <a:ext cx="4128623" cy="154285"/>
           </a:xfrm>
           <a:prstGeom prst="rect">
@@ -13844,13 +14209,13 @@
       </p:sp>
       <p:sp>
         <p:nvSpPr>
-          <p:cNvPr id="68" name="Text 66"/>
-          <p:cNvSpPr txBox="1"/>
-          <p:nvPr/>
-        </p:nvSpPr>
-        <p:spPr>
-          <a:xfrm>
-            <a:off x="4343499" y="2700536"/>
+          <p:cNvPr id="80" name="Text 78"/>
+          <p:cNvSpPr txBox="1"/>
+          <p:nvPr/>
+        </p:nvSpPr>
+        <p:spPr>
+          <a:xfrm>
+            <a:off x="4343499" y="2621558"/>
             <a:ext cx="1516360" cy="154305"/>
           </a:xfrm>
           <a:prstGeom prst="rect">
@@ -13886,13 +14251,13 @@
       </p:sp>
       <p:sp>
         <p:nvSpPr>
-          <p:cNvPr id="69" name="Text 67"/>
-          <p:cNvSpPr txBox="1"/>
-          <p:nvPr/>
-        </p:nvSpPr>
-        <p:spPr>
-          <a:xfrm>
-            <a:off x="5796359" y="2700536"/>
+          <p:cNvPr id="81" name="Text 79"/>
+          <p:cNvSpPr txBox="1"/>
+          <p:nvPr/>
+        </p:nvSpPr>
+        <p:spPr>
+          <a:xfrm>
+            <a:off x="5796359" y="2621558"/>
             <a:ext cx="1516360" cy="154305"/>
           </a:xfrm>
           <a:prstGeom prst="rect">
@@ -13928,13 +14293,13 @@
       </p:sp>
       <p:sp>
         <p:nvSpPr>
-          <p:cNvPr id="70" name="Text 68"/>
-          <p:cNvSpPr txBox="1"/>
-          <p:nvPr/>
-        </p:nvSpPr>
-        <p:spPr>
-          <a:xfrm>
-            <a:off x="8702080" y="2700536"/>
+          <p:cNvPr id="82" name="Text 80"/>
+          <p:cNvSpPr txBox="1"/>
+          <p:nvPr/>
+        </p:nvSpPr>
+        <p:spPr>
+          <a:xfrm>
+            <a:off x="8702080" y="2621558"/>
             <a:ext cx="1516360" cy="154305"/>
           </a:xfrm>
           <a:prstGeom prst="rect">
@@ -13970,13 +14335,13 @@
       </p:sp>
       <p:sp>
         <p:nvSpPr>
-          <p:cNvPr id="71" name="Text 69"/>
-          <p:cNvSpPr txBox="1"/>
-          <p:nvPr/>
-        </p:nvSpPr>
-        <p:spPr>
-          <a:xfrm>
-            <a:off x="10154940" y="2700536"/>
+          <p:cNvPr id="83" name="Text 81"/>
+          <p:cNvSpPr txBox="1"/>
+          <p:nvPr/>
+        </p:nvSpPr>
+        <p:spPr>
+          <a:xfrm>
+            <a:off x="10154940" y="2621558"/>
             <a:ext cx="1516360" cy="154305"/>
           </a:xfrm>
           <a:prstGeom prst="rect">
@@ -14012,13 +14377,13 @@
       </p:sp>
       <p:sp>
         <p:nvSpPr>
-          <p:cNvPr id="72" name="Text 70"/>
-          <p:cNvSpPr txBox="1"/>
-          <p:nvPr/>
-        </p:nvSpPr>
-        <p:spPr>
-          <a:xfrm>
-            <a:off x="508000" y="2988171"/>
+          <p:cNvPr id="84" name="Text 82"/>
+          <p:cNvSpPr txBox="1"/>
+          <p:nvPr/>
+        </p:nvSpPr>
+        <p:spPr>
+          <a:xfrm>
+            <a:off x="508000" y="2883793"/>
             <a:ext cx="4128623" cy="154285"/>
           </a:xfrm>
           <a:prstGeom prst="rect">
@@ -14054,13 +14419,13 @@
       </p:sp>
       <p:sp>
         <p:nvSpPr>
-          <p:cNvPr id="73" name="Text 71"/>
-          <p:cNvSpPr txBox="1"/>
-          <p:nvPr/>
-        </p:nvSpPr>
-        <p:spPr>
-          <a:xfrm>
-            <a:off x="4343499" y="2988171"/>
+          <p:cNvPr id="85" name="Text 83"/>
+          <p:cNvSpPr txBox="1"/>
+          <p:nvPr/>
+        </p:nvSpPr>
+        <p:spPr>
+          <a:xfrm>
+            <a:off x="4343499" y="2883793"/>
             <a:ext cx="1516360" cy="154305"/>
           </a:xfrm>
           <a:prstGeom prst="rect">
@@ -14096,13 +14461,13 @@
       </p:sp>
       <p:sp>
         <p:nvSpPr>
-          <p:cNvPr id="74" name="Text 72"/>
-          <p:cNvSpPr txBox="1"/>
-          <p:nvPr/>
-        </p:nvSpPr>
-        <p:spPr>
-          <a:xfrm>
-            <a:off x="5796359" y="2988171"/>
+          <p:cNvPr id="86" name="Text 84"/>
+          <p:cNvSpPr txBox="1"/>
+          <p:nvPr/>
+        </p:nvSpPr>
+        <p:spPr>
+          <a:xfrm>
+            <a:off x="5796359" y="2883793"/>
             <a:ext cx="1516360" cy="154305"/>
           </a:xfrm>
           <a:prstGeom prst="rect">
@@ -14138,13 +14503,13 @@
       </p:sp>
       <p:sp>
         <p:nvSpPr>
-          <p:cNvPr id="75" name="Text 73"/>
-          <p:cNvSpPr txBox="1"/>
-          <p:nvPr/>
-        </p:nvSpPr>
-        <p:spPr>
-          <a:xfrm>
-            <a:off x="7249220" y="2988171"/>
+          <p:cNvPr id="87" name="Text 85"/>
+          <p:cNvSpPr txBox="1"/>
+          <p:nvPr/>
+        </p:nvSpPr>
+        <p:spPr>
+          <a:xfrm>
+            <a:off x="7249220" y="2883793"/>
             <a:ext cx="1516360" cy="154305"/>
           </a:xfrm>
           <a:prstGeom prst="rect">
@@ -14180,13 +14545,13 @@
       </p:sp>
       <p:sp>
         <p:nvSpPr>
-          <p:cNvPr id="76" name="Text 74"/>
-          <p:cNvSpPr txBox="1"/>
-          <p:nvPr/>
-        </p:nvSpPr>
-        <p:spPr>
-          <a:xfrm>
-            <a:off x="8702080" y="2988171"/>
+          <p:cNvPr id="88" name="Text 86"/>
+          <p:cNvSpPr txBox="1"/>
+          <p:nvPr/>
+        </p:nvSpPr>
+        <p:spPr>
+          <a:xfrm>
+            <a:off x="8702080" y="2883793"/>
             <a:ext cx="1516360" cy="154305"/>
           </a:xfrm>
           <a:prstGeom prst="rect">
@@ -14222,13 +14587,13 @@
       </p:sp>
       <p:sp>
         <p:nvSpPr>
-          <p:cNvPr id="77" name="Text 75"/>
-          <p:cNvSpPr txBox="1"/>
-          <p:nvPr/>
-        </p:nvSpPr>
-        <p:spPr>
-          <a:xfrm>
-            <a:off x="10154940" y="2988171"/>
+          <p:cNvPr id="89" name="Text 87"/>
+          <p:cNvSpPr txBox="1"/>
+          <p:nvPr/>
+        </p:nvSpPr>
+        <p:spPr>
+          <a:xfrm>
+            <a:off x="10154940" y="2883793"/>
             <a:ext cx="1516360" cy="154305"/>
           </a:xfrm>
           <a:prstGeom prst="rect">
@@ -14264,13 +14629,13 @@
       </p:sp>
       <p:sp>
         <p:nvSpPr>
-          <p:cNvPr id="78" name="Text 76"/>
-          <p:cNvSpPr txBox="1"/>
-          <p:nvPr/>
-        </p:nvSpPr>
-        <p:spPr>
-          <a:xfrm>
-            <a:off x="508000" y="3275806"/>
+          <p:cNvPr id="90" name="Text 88"/>
+          <p:cNvSpPr txBox="1"/>
+          <p:nvPr/>
+        </p:nvSpPr>
+        <p:spPr>
+          <a:xfrm>
+            <a:off x="508000" y="3146028"/>
             <a:ext cx="4128623" cy="154285"/>
           </a:xfrm>
           <a:prstGeom prst="rect">
@@ -14306,13 +14671,13 @@
       </p:sp>
       <p:sp>
         <p:nvSpPr>
-          <p:cNvPr id="79" name="Text 77"/>
-          <p:cNvSpPr txBox="1"/>
-          <p:nvPr/>
-        </p:nvSpPr>
-        <p:spPr>
-          <a:xfrm>
-            <a:off x="4343499" y="3275806"/>
+          <p:cNvPr id="91" name="Text 89"/>
+          <p:cNvSpPr txBox="1"/>
+          <p:nvPr/>
+        </p:nvSpPr>
+        <p:spPr>
+          <a:xfrm>
+            <a:off x="4343499" y="3146028"/>
             <a:ext cx="1516360" cy="154305"/>
           </a:xfrm>
           <a:prstGeom prst="rect">
@@ -14348,13 +14713,13 @@
       </p:sp>
       <p:sp>
         <p:nvSpPr>
-          <p:cNvPr id="80" name="Text 78"/>
-          <p:cNvSpPr txBox="1"/>
-          <p:nvPr/>
-        </p:nvSpPr>
-        <p:spPr>
-          <a:xfrm>
-            <a:off x="5796359" y="3275806"/>
+          <p:cNvPr id="92" name="Text 90"/>
+          <p:cNvSpPr txBox="1"/>
+          <p:nvPr/>
+        </p:nvSpPr>
+        <p:spPr>
+          <a:xfrm>
+            <a:off x="5796359" y="3146028"/>
             <a:ext cx="1516360" cy="154305"/>
           </a:xfrm>
           <a:prstGeom prst="rect">
@@ -14390,13 +14755,13 @@
       </p:sp>
       <p:sp>
         <p:nvSpPr>
-          <p:cNvPr id="81" name="Text 79"/>
-          <p:cNvSpPr txBox="1"/>
-          <p:nvPr/>
-        </p:nvSpPr>
-        <p:spPr>
-          <a:xfrm>
-            <a:off x="7249220" y="3275806"/>
+          <p:cNvPr id="93" name="Text 91"/>
+          <p:cNvSpPr txBox="1"/>
+          <p:nvPr/>
+        </p:nvSpPr>
+        <p:spPr>
+          <a:xfrm>
+            <a:off x="7249220" y="3146028"/>
             <a:ext cx="1516360" cy="154305"/>
           </a:xfrm>
           <a:prstGeom prst="rect">
@@ -14432,13 +14797,13 @@
       </p:sp>
       <p:sp>
         <p:nvSpPr>
-          <p:cNvPr id="82" name="Text 80"/>
-          <p:cNvSpPr txBox="1"/>
-          <p:nvPr/>
-        </p:nvSpPr>
-        <p:spPr>
-          <a:xfrm>
-            <a:off x="8702080" y="3275806"/>
+          <p:cNvPr id="94" name="Text 92"/>
+          <p:cNvSpPr txBox="1"/>
+          <p:nvPr/>
+        </p:nvSpPr>
+        <p:spPr>
+          <a:xfrm>
+            <a:off x="8702080" y="3146028"/>
             <a:ext cx="1516360" cy="154305"/>
           </a:xfrm>
           <a:prstGeom prst="rect">
@@ -14474,13 +14839,13 @@
       </p:sp>
       <p:sp>
         <p:nvSpPr>
-          <p:cNvPr id="83" name="Text 81"/>
-          <p:cNvSpPr txBox="1"/>
-          <p:nvPr/>
-        </p:nvSpPr>
-        <p:spPr>
-          <a:xfrm>
-            <a:off x="10154940" y="3275806"/>
+          <p:cNvPr id="95" name="Text 93"/>
+          <p:cNvSpPr txBox="1"/>
+          <p:nvPr/>
+        </p:nvSpPr>
+        <p:spPr>
+          <a:xfrm>
+            <a:off x="10154940" y="3146028"/>
             <a:ext cx="1516360" cy="154305"/>
           </a:xfrm>
           <a:prstGeom prst="rect">
@@ -14516,13 +14881,13 @@
       </p:sp>
       <p:sp>
         <p:nvSpPr>
-          <p:cNvPr id="84" name="Text 82"/>
-          <p:cNvSpPr txBox="1"/>
-          <p:nvPr/>
-        </p:nvSpPr>
-        <p:spPr>
-          <a:xfrm>
-            <a:off x="508000" y="3563441"/>
+          <p:cNvPr id="96" name="Text 94"/>
+          <p:cNvSpPr txBox="1"/>
+          <p:nvPr/>
+        </p:nvSpPr>
+        <p:spPr>
+          <a:xfrm>
+            <a:off x="508000" y="3408263"/>
             <a:ext cx="4128623" cy="154285"/>
           </a:xfrm>
           <a:prstGeom prst="rect">
@@ -14558,13 +14923,13 @@
       </p:sp>
       <p:sp>
         <p:nvSpPr>
-          <p:cNvPr id="85" name="Text 83"/>
-          <p:cNvSpPr txBox="1"/>
-          <p:nvPr/>
-        </p:nvSpPr>
-        <p:spPr>
-          <a:xfrm>
-            <a:off x="4343499" y="3563441"/>
+          <p:cNvPr id="97" name="Text 95"/>
+          <p:cNvSpPr txBox="1"/>
+          <p:nvPr/>
+        </p:nvSpPr>
+        <p:spPr>
+          <a:xfrm>
+            <a:off x="4343499" y="3408263"/>
             <a:ext cx="1516360" cy="154305"/>
           </a:xfrm>
           <a:prstGeom prst="rect">
@@ -14600,13 +14965,13 @@
       </p:sp>
       <p:sp>
         <p:nvSpPr>
-          <p:cNvPr id="86" name="Text 84"/>
-          <p:cNvSpPr txBox="1"/>
-          <p:nvPr/>
-        </p:nvSpPr>
-        <p:spPr>
-          <a:xfrm>
-            <a:off x="7249220" y="3563441"/>
+          <p:cNvPr id="98" name="Text 96"/>
+          <p:cNvSpPr txBox="1"/>
+          <p:nvPr/>
+        </p:nvSpPr>
+        <p:spPr>
+          <a:xfrm>
+            <a:off x="7249220" y="3408263"/>
             <a:ext cx="1516360" cy="154305"/>
           </a:xfrm>
           <a:prstGeom prst="rect">
@@ -14642,13 +15007,13 @@
       </p:sp>
       <p:sp>
         <p:nvSpPr>
-          <p:cNvPr id="87" name="Text 85"/>
-          <p:cNvSpPr txBox="1"/>
-          <p:nvPr/>
-        </p:nvSpPr>
-        <p:spPr>
-          <a:xfrm>
-            <a:off x="8702080" y="3563441"/>
+          <p:cNvPr id="99" name="Text 97"/>
+          <p:cNvSpPr txBox="1"/>
+          <p:nvPr/>
+        </p:nvSpPr>
+        <p:spPr>
+          <a:xfrm>
+            <a:off x="8702080" y="3408263"/>
             <a:ext cx="1516360" cy="154305"/>
           </a:xfrm>
           <a:prstGeom prst="rect">
@@ -14684,13 +15049,13 @@
       </p:sp>
       <p:sp>
         <p:nvSpPr>
-          <p:cNvPr id="88" name="Text 86"/>
-          <p:cNvSpPr txBox="1"/>
-          <p:nvPr/>
-        </p:nvSpPr>
-        <p:spPr>
-          <a:xfrm>
-            <a:off x="10154940" y="3563441"/>
+          <p:cNvPr id="100" name="Text 98"/>
+          <p:cNvSpPr txBox="1"/>
+          <p:nvPr/>
+        </p:nvSpPr>
+        <p:spPr>
+          <a:xfrm>
+            <a:off x="10154940" y="3408263"/>
             <a:ext cx="1516360" cy="154305"/>
           </a:xfrm>
           <a:prstGeom prst="rect">
@@ -14726,13 +15091,13 @@
       </p:sp>
       <p:sp>
         <p:nvSpPr>
-          <p:cNvPr id="89" name="Text 87"/>
-          <p:cNvSpPr txBox="1"/>
-          <p:nvPr/>
-        </p:nvSpPr>
-        <p:spPr>
-          <a:xfrm>
-            <a:off x="508000" y="3851077"/>
+          <p:cNvPr id="101" name="Text 99"/>
+          <p:cNvSpPr txBox="1"/>
+          <p:nvPr/>
+        </p:nvSpPr>
+        <p:spPr>
+          <a:xfrm>
+            <a:off x="508000" y="3670498"/>
             <a:ext cx="4128623" cy="154285"/>
           </a:xfrm>
           <a:prstGeom prst="rect">
@@ -14768,13 +15133,13 @@
       </p:sp>
       <p:sp>
         <p:nvSpPr>
-          <p:cNvPr id="90" name="Text 88"/>
-          <p:cNvSpPr txBox="1"/>
-          <p:nvPr/>
-        </p:nvSpPr>
-        <p:spPr>
-          <a:xfrm>
-            <a:off x="4343499" y="3851077"/>
+          <p:cNvPr id="102" name="Text 100"/>
+          <p:cNvSpPr txBox="1"/>
+          <p:nvPr/>
+        </p:nvSpPr>
+        <p:spPr>
+          <a:xfrm>
+            <a:off x="4343499" y="3670498"/>
             <a:ext cx="1516360" cy="154305"/>
           </a:xfrm>
           <a:prstGeom prst="rect">
@@ -14810,13 +15175,13 @@
       </p:sp>
       <p:sp>
         <p:nvSpPr>
-          <p:cNvPr id="91" name="Text 89"/>
-          <p:cNvSpPr txBox="1"/>
-          <p:nvPr/>
-        </p:nvSpPr>
-        <p:spPr>
-          <a:xfrm>
-            <a:off x="7249220" y="3851077"/>
+          <p:cNvPr id="103" name="Text 101"/>
+          <p:cNvSpPr txBox="1"/>
+          <p:nvPr/>
+        </p:nvSpPr>
+        <p:spPr>
+          <a:xfrm>
+            <a:off x="7249220" y="3670498"/>
             <a:ext cx="1516360" cy="154305"/>
           </a:xfrm>
           <a:prstGeom prst="rect">
@@ -14852,13 +15217,13 @@
       </p:sp>
       <p:sp>
         <p:nvSpPr>
-          <p:cNvPr id="92" name="Text 90"/>
-          <p:cNvSpPr txBox="1"/>
-          <p:nvPr/>
-        </p:nvSpPr>
-        <p:spPr>
-          <a:xfrm>
-            <a:off x="8702080" y="3851077"/>
+          <p:cNvPr id="104" name="Text 102"/>
+          <p:cNvSpPr txBox="1"/>
+          <p:nvPr/>
+        </p:nvSpPr>
+        <p:spPr>
+          <a:xfrm>
+            <a:off x="8702080" y="3670498"/>
             <a:ext cx="1516360" cy="154305"/>
           </a:xfrm>
           <a:prstGeom prst="rect">
@@ -14894,13 +15259,13 @@
       </p:sp>
       <p:sp>
         <p:nvSpPr>
-          <p:cNvPr id="93" name="Text 91"/>
-          <p:cNvSpPr txBox="1"/>
-          <p:nvPr/>
-        </p:nvSpPr>
-        <p:spPr>
-          <a:xfrm>
-            <a:off x="10154940" y="3851077"/>
+          <p:cNvPr id="105" name="Text 103"/>
+          <p:cNvSpPr txBox="1"/>
+          <p:nvPr/>
+        </p:nvSpPr>
+        <p:spPr>
+          <a:xfrm>
+            <a:off x="10154940" y="3670498"/>
             <a:ext cx="1516360" cy="154305"/>
           </a:xfrm>
           <a:prstGeom prst="rect">
@@ -14936,13 +15301,13 @@
       </p:sp>
       <p:sp>
         <p:nvSpPr>
-          <p:cNvPr id="94" name="Text 92"/>
-          <p:cNvSpPr txBox="1"/>
-          <p:nvPr/>
-        </p:nvSpPr>
-        <p:spPr>
-          <a:xfrm>
-            <a:off x="508000" y="4138712"/>
+          <p:cNvPr id="106" name="Text 104"/>
+          <p:cNvSpPr txBox="1"/>
+          <p:nvPr/>
+        </p:nvSpPr>
+        <p:spPr>
+          <a:xfrm>
+            <a:off x="508000" y="3932734"/>
             <a:ext cx="4128623" cy="154285"/>
           </a:xfrm>
           <a:prstGeom prst="rect">
@@ -14978,13 +15343,13 @@
       </p:sp>
       <p:sp>
         <p:nvSpPr>
-          <p:cNvPr id="95" name="Text 93"/>
-          <p:cNvSpPr txBox="1"/>
-          <p:nvPr/>
-        </p:nvSpPr>
-        <p:spPr>
-          <a:xfrm>
-            <a:off x="4343499" y="4138712"/>
+          <p:cNvPr id="107" name="Text 105"/>
+          <p:cNvSpPr txBox="1"/>
+          <p:nvPr/>
+        </p:nvSpPr>
+        <p:spPr>
+          <a:xfrm>
+            <a:off x="4343499" y="3932734"/>
             <a:ext cx="1516360" cy="154305"/>
           </a:xfrm>
           <a:prstGeom prst="rect">
@@ -15020,13 +15385,13 @@
       </p:sp>
       <p:sp>
         <p:nvSpPr>
-          <p:cNvPr id="96" name="Text 94"/>
-          <p:cNvSpPr txBox="1"/>
-          <p:nvPr/>
-        </p:nvSpPr>
-        <p:spPr>
-          <a:xfrm>
-            <a:off x="8702080" y="4138712"/>
+          <p:cNvPr id="108" name="Text 106"/>
+          <p:cNvSpPr txBox="1"/>
+          <p:nvPr/>
+        </p:nvSpPr>
+        <p:spPr>
+          <a:xfrm>
+            <a:off x="8702080" y="3932734"/>
             <a:ext cx="1516360" cy="154305"/>
           </a:xfrm>
           <a:prstGeom prst="rect">
@@ -15062,13 +15427,13 @@
       </p:sp>
       <p:sp>
         <p:nvSpPr>
-          <p:cNvPr id="97" name="Text 95"/>
-          <p:cNvSpPr txBox="1"/>
-          <p:nvPr/>
-        </p:nvSpPr>
-        <p:spPr>
-          <a:xfrm>
-            <a:off x="10154940" y="4138712"/>
+          <p:cNvPr id="109" name="Text 107"/>
+          <p:cNvSpPr txBox="1"/>
+          <p:nvPr/>
+        </p:nvSpPr>
+        <p:spPr>
+          <a:xfrm>
+            <a:off x="10154940" y="3932734"/>
             <a:ext cx="1516360" cy="154305"/>
           </a:xfrm>
           <a:prstGeom prst="rect">
@@ -15104,13 +15469,13 @@
       </p:sp>
       <p:sp>
         <p:nvSpPr>
-          <p:cNvPr id="98" name="Text 96"/>
-          <p:cNvSpPr txBox="1"/>
-          <p:nvPr/>
-        </p:nvSpPr>
-        <p:spPr>
-          <a:xfrm>
-            <a:off x="508000" y="4426347"/>
+          <p:cNvPr id="110" name="Text 108"/>
+          <p:cNvSpPr txBox="1"/>
+          <p:nvPr/>
+        </p:nvSpPr>
+        <p:spPr>
+          <a:xfrm>
+            <a:off x="508000" y="4194969"/>
             <a:ext cx="4128623" cy="154285"/>
           </a:xfrm>
           <a:prstGeom prst="rect">
@@ -15146,13 +15511,13 @@
       </p:sp>
       <p:sp>
         <p:nvSpPr>
-          <p:cNvPr id="99" name="Text 97"/>
-          <p:cNvSpPr txBox="1"/>
-          <p:nvPr/>
-        </p:nvSpPr>
-        <p:spPr>
-          <a:xfrm>
-            <a:off x="4343499" y="4426347"/>
+          <p:cNvPr id="111" name="Text 109"/>
+          <p:cNvSpPr txBox="1"/>
+          <p:nvPr/>
+        </p:nvSpPr>
+        <p:spPr>
+          <a:xfrm>
+            <a:off x="4343499" y="4194969"/>
             <a:ext cx="1516360" cy="154305"/>
           </a:xfrm>
           <a:prstGeom prst="rect">
@@ -15188,13 +15553,13 @@
       </p:sp>
       <p:sp>
         <p:nvSpPr>
-          <p:cNvPr id="100" name="Text 98"/>
-          <p:cNvSpPr txBox="1"/>
-          <p:nvPr/>
-        </p:nvSpPr>
-        <p:spPr>
-          <a:xfrm>
-            <a:off x="7249220" y="4426347"/>
+          <p:cNvPr id="112" name="Text 110"/>
+          <p:cNvSpPr txBox="1"/>
+          <p:nvPr/>
+        </p:nvSpPr>
+        <p:spPr>
+          <a:xfrm>
+            <a:off x="7249220" y="4194969"/>
             <a:ext cx="1516360" cy="154305"/>
           </a:xfrm>
           <a:prstGeom prst="rect">
@@ -15230,13 +15595,13 @@
       </p:sp>
       <p:sp>
         <p:nvSpPr>
-          <p:cNvPr id="101" name="Text 99"/>
-          <p:cNvSpPr txBox="1"/>
-          <p:nvPr/>
-        </p:nvSpPr>
-        <p:spPr>
-          <a:xfrm>
-            <a:off x="8702080" y="4426347"/>
+          <p:cNvPr id="113" name="Text 111"/>
+          <p:cNvSpPr txBox="1"/>
+          <p:nvPr/>
+        </p:nvSpPr>
+        <p:spPr>
+          <a:xfrm>
+            <a:off x="8702080" y="4194969"/>
             <a:ext cx="1516360" cy="154305"/>
           </a:xfrm>
           <a:prstGeom prst="rect">
@@ -15272,13 +15637,13 @@
       </p:sp>
       <p:sp>
         <p:nvSpPr>
-          <p:cNvPr id="102" name="Text 100"/>
-          <p:cNvSpPr txBox="1"/>
-          <p:nvPr/>
-        </p:nvSpPr>
-        <p:spPr>
-          <a:xfrm>
-            <a:off x="10154940" y="4426347"/>
+          <p:cNvPr id="114" name="Text 112"/>
+          <p:cNvSpPr txBox="1"/>
+          <p:nvPr/>
+        </p:nvSpPr>
+        <p:spPr>
+          <a:xfrm>
+            <a:off x="10154940" y="4194969"/>
             <a:ext cx="1516360" cy="154305"/>
           </a:xfrm>
           <a:prstGeom prst="rect">
@@ -15314,13 +15679,13 @@
       </p:sp>
       <p:sp>
         <p:nvSpPr>
-          <p:cNvPr id="103" name="Text 101"/>
-          <p:cNvSpPr txBox="1"/>
-          <p:nvPr/>
-        </p:nvSpPr>
-        <p:spPr>
-          <a:xfrm>
-            <a:off x="508000" y="4713982"/>
+          <p:cNvPr id="115" name="Text 113"/>
+          <p:cNvSpPr txBox="1"/>
+          <p:nvPr/>
+        </p:nvSpPr>
+        <p:spPr>
+          <a:xfrm>
+            <a:off x="508000" y="4457204"/>
             <a:ext cx="4128623" cy="154285"/>
           </a:xfrm>
           <a:prstGeom prst="rect">
@@ -15356,13 +15721,13 @@
       </p:sp>
       <p:sp>
         <p:nvSpPr>
-          <p:cNvPr id="104" name="Text 102"/>
-          <p:cNvSpPr txBox="1"/>
-          <p:nvPr/>
-        </p:nvSpPr>
-        <p:spPr>
-          <a:xfrm>
-            <a:off x="8702080" y="4713982"/>
+          <p:cNvPr id="116" name="Text 114"/>
+          <p:cNvSpPr txBox="1"/>
+          <p:nvPr/>
+        </p:nvSpPr>
+        <p:spPr>
+          <a:xfrm>
+            <a:off x="8702080" y="4457204"/>
             <a:ext cx="1516360" cy="154305"/>
           </a:xfrm>
           <a:prstGeom prst="rect">
@@ -15398,13 +15763,265 @@
       </p:sp>
       <p:sp>
         <p:nvSpPr>
-          <p:cNvPr id="105" name="Text 103"/>
-          <p:cNvSpPr txBox="1"/>
-          <p:nvPr/>
-        </p:nvSpPr>
-        <p:spPr>
-          <a:xfrm>
-            <a:off x="508000" y="5258792"/>
+          <p:cNvPr id="117" name="Text 115"/>
+          <p:cNvSpPr txBox="1"/>
+          <p:nvPr/>
+        </p:nvSpPr>
+        <p:spPr>
+          <a:xfrm>
+            <a:off x="508000" y="4725789"/>
+            <a:ext cx="4128623" cy="216495"/>
+          </a:xfrm>
+          <a:prstGeom prst="rect">
+            <a:avLst/>
+          </a:prstGeom>
+          <a:noFill/>
+          <a:ln/>
+        </p:spPr>
+        <p:txBody>
+          <a:bodyPr wrap="square" lIns="0" tIns="0" rIns="0" bIns="0" rtlCol="0" anchor="t"/>
+          <a:lstStyle/>
+          <a:p>
+            <a:pPr algn="l" indent="0" marL="0">
+              <a:lnSpc>
+                <a:spcPts val="810"/>
+              </a:lnSpc>
+              <a:buNone/>
+            </a:pPr>
+            <a:r>
+              <a:rPr lang="en-US" sz="600" spc="84" kern="0" dirty="0">
+                <a:solidFill>
+                  <a:srgbClr val="0053E2"/>
+                </a:solidFill>
+                <a:latin typeface="Everyday Sans Mono" pitchFamily="34" charset="0"/>
+                <a:ea typeface="Everyday Sans Mono" pitchFamily="34" charset="-122"/>
+                <a:cs typeface="Everyday Sans Mono" pitchFamily="34" charset="-120"/>
+              </a:rPr>
+              <a:t>INITIATIVES ADDRESSING EACH PROBLEM</a:t>
+            </a:r>
+            <a:endParaRPr lang="en-US" sz="600" dirty="0"/>
+          </a:p>
+        </p:txBody>
+      </p:sp>
+      <p:sp>
+        <p:nvSpPr>
+          <p:cNvPr id="118" name="Text 116"/>
+          <p:cNvSpPr txBox="1"/>
+          <p:nvPr/>
+        </p:nvSpPr>
+        <p:spPr>
+          <a:xfrm>
+            <a:off x="4343499" y="4725789"/>
+            <a:ext cx="1516360" cy="222885"/>
+          </a:xfrm>
+          <a:prstGeom prst="rect">
+            <a:avLst/>
+          </a:prstGeom>
+          <a:noFill/>
+          <a:ln/>
+        </p:spPr>
+        <p:txBody>
+          <a:bodyPr wrap="square" lIns="0" tIns="0" rIns="0" bIns="0" rtlCol="0" anchor="t"/>
+          <a:lstStyle/>
+          <a:p>
+            <a:pPr algn="ctr" indent="0" marL="0">
+              <a:lnSpc>
+                <a:spcPts val="1755"/>
+              </a:lnSpc>
+              <a:buNone/>
+            </a:pPr>
+            <a:r>
+              <a:rPr lang="en-US" sz="1300" spc="-26" kern="0" dirty="0">
+                <a:solidFill>
+                  <a:srgbClr val="0053E2"/>
+                </a:solidFill>
+                <a:latin typeface="Everyday Sans Headline Light" pitchFamily="34" charset="0"/>
+                <a:ea typeface="Everyday Sans Headline Light" pitchFamily="34" charset="-122"/>
+                <a:cs typeface="Everyday Sans Headline Light" pitchFamily="34" charset="-120"/>
+              </a:rPr>
+              <a:t>7</a:t>
+            </a:r>
+            <a:endParaRPr lang="en-US" sz="1300" dirty="0"/>
+          </a:p>
+        </p:txBody>
+      </p:sp>
+      <p:sp>
+        <p:nvSpPr>
+          <p:cNvPr id="119" name="Text 117"/>
+          <p:cNvSpPr txBox="1"/>
+          <p:nvPr/>
+        </p:nvSpPr>
+        <p:spPr>
+          <a:xfrm>
+            <a:off x="5796359" y="4725789"/>
+            <a:ext cx="1516360" cy="222885"/>
+          </a:xfrm>
+          <a:prstGeom prst="rect">
+            <a:avLst/>
+          </a:prstGeom>
+          <a:noFill/>
+          <a:ln/>
+        </p:spPr>
+        <p:txBody>
+          <a:bodyPr wrap="square" lIns="0" tIns="0" rIns="0" bIns="0" rtlCol="0" anchor="t"/>
+          <a:lstStyle/>
+          <a:p>
+            <a:pPr algn="ctr" indent="0" marL="0">
+              <a:lnSpc>
+                <a:spcPts val="1755"/>
+              </a:lnSpc>
+              <a:buNone/>
+            </a:pPr>
+            <a:r>
+              <a:rPr lang="en-US" sz="1300" spc="-26" kern="0" dirty="0">
+                <a:solidFill>
+                  <a:srgbClr val="0053E2"/>
+                </a:solidFill>
+                <a:latin typeface="Everyday Sans Headline Light" pitchFamily="34" charset="0"/>
+                <a:ea typeface="Everyday Sans Headline Light" pitchFamily="34" charset="-122"/>
+                <a:cs typeface="Everyday Sans Headline Light" pitchFamily="34" charset="-120"/>
+              </a:rPr>
+              <a:t>3</a:t>
+            </a:r>
+            <a:endParaRPr lang="en-US" sz="1300" dirty="0"/>
+          </a:p>
+        </p:txBody>
+      </p:sp>
+      <p:sp>
+        <p:nvSpPr>
+          <p:cNvPr id="120" name="Text 118"/>
+          <p:cNvSpPr txBox="1"/>
+          <p:nvPr/>
+        </p:nvSpPr>
+        <p:spPr>
+          <a:xfrm>
+            <a:off x="7249220" y="4725789"/>
+            <a:ext cx="1516360" cy="222885"/>
+          </a:xfrm>
+          <a:prstGeom prst="rect">
+            <a:avLst/>
+          </a:prstGeom>
+          <a:noFill/>
+          <a:ln/>
+        </p:spPr>
+        <p:txBody>
+          <a:bodyPr wrap="square" lIns="0" tIns="0" rIns="0" bIns="0" rtlCol="0" anchor="t"/>
+          <a:lstStyle/>
+          <a:p>
+            <a:pPr algn="ctr" indent="0" marL="0">
+              <a:lnSpc>
+                <a:spcPts val="1755"/>
+              </a:lnSpc>
+              <a:buNone/>
+            </a:pPr>
+            <a:r>
+              <a:rPr lang="en-US" sz="1300" spc="-26" kern="0" dirty="0">
+                <a:solidFill>
+                  <a:srgbClr val="0053E2"/>
+                </a:solidFill>
+                <a:latin typeface="Everyday Sans Headline Light" pitchFamily="34" charset="0"/>
+                <a:ea typeface="Everyday Sans Headline Light" pitchFamily="34" charset="-122"/>
+                <a:cs typeface="Everyday Sans Headline Light" pitchFamily="34" charset="-120"/>
+              </a:rPr>
+              <a:t>5</a:t>
+            </a:r>
+            <a:endParaRPr lang="en-US" sz="1300" dirty="0"/>
+          </a:p>
+        </p:txBody>
+      </p:sp>
+      <p:sp>
+        <p:nvSpPr>
+          <p:cNvPr id="121" name="Text 119"/>
+          <p:cNvSpPr txBox="1"/>
+          <p:nvPr/>
+        </p:nvSpPr>
+        <p:spPr>
+          <a:xfrm>
+            <a:off x="8702080" y="4725789"/>
+            <a:ext cx="1516360" cy="222885"/>
+          </a:xfrm>
+          <a:prstGeom prst="rect">
+            <a:avLst/>
+          </a:prstGeom>
+          <a:noFill/>
+          <a:ln/>
+        </p:spPr>
+        <p:txBody>
+          <a:bodyPr wrap="square" lIns="0" tIns="0" rIns="0" bIns="0" rtlCol="0" anchor="t"/>
+          <a:lstStyle/>
+          <a:p>
+            <a:pPr algn="ctr" indent="0" marL="0">
+              <a:lnSpc>
+                <a:spcPts val="1755"/>
+              </a:lnSpc>
+              <a:buNone/>
+            </a:pPr>
+            <a:r>
+              <a:rPr lang="en-US" sz="1300" spc="-26" kern="0" dirty="0">
+                <a:solidFill>
+                  <a:srgbClr val="0053E2"/>
+                </a:solidFill>
+                <a:latin typeface="Everyday Sans Headline Light" pitchFamily="34" charset="0"/>
+                <a:ea typeface="Everyday Sans Headline Light" pitchFamily="34" charset="-122"/>
+                <a:cs typeface="Everyday Sans Headline Light" pitchFamily="34" charset="-120"/>
+              </a:rPr>
+              <a:t>8</a:t>
+            </a:r>
+            <a:endParaRPr lang="en-US" sz="1300" dirty="0"/>
+          </a:p>
+        </p:txBody>
+      </p:sp>
+      <p:sp>
+        <p:nvSpPr>
+          <p:cNvPr id="122" name="Text 120"/>
+          <p:cNvSpPr txBox="1"/>
+          <p:nvPr/>
+        </p:nvSpPr>
+        <p:spPr>
+          <a:xfrm>
+            <a:off x="10154940" y="4725789"/>
+            <a:ext cx="1516360" cy="222885"/>
+          </a:xfrm>
+          <a:prstGeom prst="rect">
+            <a:avLst/>
+          </a:prstGeom>
+          <a:noFill/>
+          <a:ln/>
+        </p:spPr>
+        <p:txBody>
+          <a:bodyPr wrap="square" lIns="0" tIns="0" rIns="0" bIns="0" rtlCol="0" anchor="t"/>
+          <a:lstStyle/>
+          <a:p>
+            <a:pPr algn="ctr" indent="0" marL="0">
+              <a:lnSpc>
+                <a:spcPts val="1755"/>
+              </a:lnSpc>
+              <a:buNone/>
+            </a:pPr>
+            <a:r>
+              <a:rPr lang="en-US" sz="1300" spc="-26" kern="0" dirty="0">
+                <a:solidFill>
+                  <a:srgbClr val="0053E2"/>
+                </a:solidFill>
+                <a:latin typeface="Everyday Sans Headline Light" pitchFamily="34" charset="0"/>
+                <a:ea typeface="Everyday Sans Headline Light" pitchFamily="34" charset="-122"/>
+                <a:cs typeface="Everyday Sans Headline Light" pitchFamily="34" charset="-120"/>
+              </a:rPr>
+              <a:t>7</a:t>
+            </a:r>
+            <a:endParaRPr lang="en-US" sz="1300" dirty="0"/>
+          </a:p>
+        </p:txBody>
+      </p:sp>
+      <p:sp>
+        <p:nvSpPr>
+          <p:cNvPr id="123" name="Text 121"/>
+          <p:cNvSpPr txBox="1"/>
+          <p:nvPr/>
+        </p:nvSpPr>
+        <p:spPr>
+          <a:xfrm>
+            <a:off x="508000" y="5320109"/>
             <a:ext cx="12070080" cy="133350"/>
           </a:xfrm>
           <a:prstGeom prst="rect">
@@ -15440,13 +16057,13 @@
       </p:sp>
       <p:sp>
         <p:nvSpPr>
-          <p:cNvPr id="106" name="Text 104"/>
-          <p:cNvSpPr txBox="1"/>
-          <p:nvPr/>
-        </p:nvSpPr>
-        <p:spPr>
-          <a:xfrm>
-            <a:off x="508000" y="5842992"/>
+          <p:cNvPr id="124" name="Text 122"/>
+          <p:cNvSpPr txBox="1"/>
+          <p:nvPr/>
+        </p:nvSpPr>
+        <p:spPr>
+          <a:xfrm>
+            <a:off x="508000" y="5904309"/>
             <a:ext cx="1549400" cy="87313"/>
           </a:xfrm>
           <a:prstGeom prst="rect">
@@ -15482,13 +16099,13 @@
       </p:sp>
       <p:sp>
         <p:nvSpPr>
-          <p:cNvPr id="107" name="Text 105"/>
-          <p:cNvSpPr txBox="1"/>
-          <p:nvPr/>
-        </p:nvSpPr>
-        <p:spPr>
-          <a:xfrm>
-            <a:off x="2108200" y="5728692"/>
+          <p:cNvPr id="125" name="Text 123"/>
+          <p:cNvSpPr txBox="1"/>
+          <p:nvPr/>
+        </p:nvSpPr>
+        <p:spPr>
+          <a:xfrm>
+            <a:off x="2108200" y="5790009"/>
             <a:ext cx="10341864" cy="222250"/>
           </a:xfrm>
           <a:prstGeom prst="rect">
@@ -15524,7 +16141,7 @@
       </p:sp>
       <p:pic>
         <p:nvPicPr>
-          <p:cNvPr id="108" name="Image 0" descr="Walmart Spark">    </p:cNvPr>
+          <p:cNvPr id="126" name="Image 0" descr="Walmart Spark">    </p:cNvPr>
           <p:cNvPicPr>
             <a:picLocks noChangeAspect="1"/>
           </p:cNvPicPr>
@@ -15548,7 +16165,7 @@
       </p:pic>
       <p:sp>
         <p:nvSpPr>
-          <p:cNvPr id="109" name="Text 106"/>
+          <p:cNvPr id="127" name="Text 124"/>
           <p:cNvSpPr txBox="1"/>
           <p:nvPr/>
         </p:nvSpPr>
@@ -15587,7 +16204,7 @@
       </p:sp>
       <p:sp>
         <p:nvSpPr>
-          <p:cNvPr id="110" name="Text 107"/>
+          <p:cNvPr id="128" name="Text 125"/>
           <p:cNvSpPr txBox="1"/>
           <p:nvPr/>
         </p:nvSpPr>
@@ -15618,7 +16235,7 @@
                 <a:ea typeface="Everyday Sans Mono" pitchFamily="34" charset="-122"/>
                 <a:cs typeface="Everyday Sans Mono" pitchFamily="34" charset="-120"/>
               </a:rPr>
-              <a:t>16 / 17</a:t>
+              <a:t>16 / 18</a:t>
             </a:r>
             <a:endParaRPr lang="en-US" sz="650" dirty="0"/>
           </a:p>
@@ -15686,7 +16303,7 @@
         </p:nvSpPr>
         <p:spPr>
           <a:xfrm>
-            <a:off x="508000" y="3021409"/>
+            <a:off x="508000" y="3100586"/>
             <a:ext cx="11176000" cy="6350"/>
           </a:xfrm>
           <a:prstGeom prst="rect">
@@ -15706,7 +16323,7 @@
         </p:nvSpPr>
         <p:spPr>
           <a:xfrm>
-            <a:off x="508000" y="2983309"/>
+            <a:off x="508000" y="3062486"/>
             <a:ext cx="82550" cy="82550"/>
           </a:xfrm>
           <a:prstGeom prst="ellipse">
@@ -15731,7 +16348,7 @@
         </p:nvSpPr>
         <p:spPr>
           <a:xfrm>
-            <a:off x="2400300" y="2983309"/>
+            <a:off x="2783780" y="3062486"/>
             <a:ext cx="82550" cy="82550"/>
           </a:xfrm>
           <a:prstGeom prst="ellipse">
@@ -15756,7 +16373,7 @@
         </p:nvSpPr>
         <p:spPr>
           <a:xfrm>
-            <a:off x="4292600" y="2983309"/>
+            <a:off x="5059660" y="3062486"/>
             <a:ext cx="82550" cy="82550"/>
           </a:xfrm>
           <a:prstGeom prst="ellipse">
@@ -15781,7 +16398,7 @@
         </p:nvSpPr>
         <p:spPr>
           <a:xfrm>
-            <a:off x="6184900" y="2983309"/>
+            <a:off x="7335441" y="3062486"/>
             <a:ext cx="82550" cy="82550"/>
           </a:xfrm>
           <a:prstGeom prst="ellipse">
@@ -15806,7 +16423,7 @@
         </p:nvSpPr>
         <p:spPr>
           <a:xfrm>
-            <a:off x="8077200" y="2983309"/>
+            <a:off x="9611320" y="3062486"/>
             <a:ext cx="82550" cy="82550"/>
           </a:xfrm>
           <a:prstGeom prst="ellipse">
@@ -15831,15 +16448,13 @@
         </p:nvSpPr>
         <p:spPr>
           <a:xfrm>
-            <a:off x="9969500" y="2983309"/>
-            <a:ext cx="82550" cy="82550"/>
-          </a:xfrm>
-          <a:prstGeom prst="ellipse">
-            <a:avLst/>
-          </a:prstGeom>
-          <a:solidFill>
-            <a:srgbClr val="F5F6F8"/>
-          </a:solidFill>
+            <a:off x="508000" y="4282480"/>
+            <a:ext cx="8890000" cy="0"/>
+          </a:xfrm>
+          <a:prstGeom prst="line">
+            <a:avLst/>
+          </a:prstGeom>
+          <a:noFill/>
           <a:ln w="6350">
             <a:solidFill>
               <a:srgbClr val="0053E2"/>
@@ -15850,30 +16465,7 @@
       </p:sp>
       <p:sp>
         <p:nvSpPr>
-          <p:cNvPr id="10" name="Shape 8"/>
-          <p:cNvSpPr/>
-          <p:nvPr/>
-        </p:nvSpPr>
-        <p:spPr>
-          <a:xfrm>
-            <a:off x="508000" y="4401344"/>
-            <a:ext cx="8890000" cy="0"/>
-          </a:xfrm>
-          <a:prstGeom prst="line">
-            <a:avLst/>
-          </a:prstGeom>
-          <a:noFill/>
-          <a:ln w="6350">
-            <a:solidFill>
-              <a:srgbClr val="0053E2"/>
-            </a:solidFill>
-            <a:prstDash val="solid"/>
-          </a:ln>
-        </p:spPr>
-      </p:sp>
-      <p:sp>
-        <p:nvSpPr>
-          <p:cNvPr id="11" name="Text 9"/>
+          <p:cNvPr id="10" name="Text 8"/>
           <p:cNvSpPr txBox="1"/>
           <p:nvPr/>
         </p:nvSpPr>
@@ -15915,7 +16507,7 @@
       </p:sp>
       <p:sp>
         <p:nvSpPr>
-          <p:cNvPr id="12" name="Text 10"/>
+          <p:cNvPr id="11" name="Text 9"/>
           <p:cNvSpPr txBox="1"/>
           <p:nvPr/>
         </p:nvSpPr>
@@ -15991,7 +16583,7 @@
       </p:sp>
       <p:sp>
         <p:nvSpPr>
-          <p:cNvPr id="13" name="Text 11"/>
+          <p:cNvPr id="12" name="Text 10"/>
           <p:cNvSpPr txBox="1"/>
           <p:nvPr/>
         </p:nvSpPr>
@@ -16033,14 +16625,14 @@
       </p:sp>
       <p:sp>
         <p:nvSpPr>
-          <p:cNvPr id="14" name="Text 12"/>
-          <p:cNvSpPr txBox="1"/>
-          <p:nvPr/>
-        </p:nvSpPr>
-        <p:spPr>
-          <a:xfrm>
-            <a:off x="508000" y="3161109"/>
-            <a:ext cx="1866900" cy="95250"/>
+          <p:cNvPr id="13" name="Text 11"/>
+          <p:cNvSpPr txBox="1"/>
+          <p:nvPr/>
+        </p:nvSpPr>
+        <p:spPr>
+          <a:xfrm>
+            <a:off x="508000" y="3240286"/>
+            <a:ext cx="2238387" cy="95250"/>
           </a:xfrm>
           <a:prstGeom prst="rect">
             <a:avLst/>
@@ -16075,14 +16667,14 @@
       </p:sp>
       <p:sp>
         <p:nvSpPr>
-          <p:cNvPr id="15" name="Text 13"/>
-          <p:cNvSpPr txBox="1"/>
-          <p:nvPr/>
-        </p:nvSpPr>
-        <p:spPr>
-          <a:xfrm>
-            <a:off x="508000" y="3307159"/>
-            <a:ext cx="1866900" cy="396081"/>
+          <p:cNvPr id="14" name="Text 12"/>
+          <p:cNvSpPr txBox="1"/>
+          <p:nvPr/>
+        </p:nvSpPr>
+        <p:spPr>
+          <a:xfrm>
+            <a:off x="508000" y="3386336"/>
+            <a:ext cx="2238387" cy="396081"/>
           </a:xfrm>
           <a:prstGeom prst="rect">
             <a:avLst/>
@@ -16109,7 +16701,7 @@
                 <a:ea typeface="Everyday Sans Headline Light" pitchFamily="34" charset="-122"/>
                 <a:cs typeface="Everyday Sans Headline Light" pitchFamily="34" charset="-120"/>
               </a:rPr>
-              <a:t>UXR, VOC, Sales,</a:t>
+              <a:t>UXR, VOC, Sales, Support,</a:t>
             </a:r>
             <a:endParaRPr lang="en-US" sz="1300" dirty="0"/>
           </a:p>
@@ -16129,7 +16721,7 @@
                 <a:ea typeface="Everyday Sans Headline Light" pitchFamily="34" charset="-122"/>
                 <a:cs typeface="Everyday Sans Headline Light" pitchFamily="34" charset="-120"/>
               </a:rPr>
-              <a:t>Support, Pendo</a:t>
+              <a:t>Pendo</a:t>
             </a:r>
             <a:endParaRPr lang="en-US" sz="1300" dirty="0"/>
           </a:p>
@@ -16137,14 +16729,14 @@
       </p:sp>
       <p:sp>
         <p:nvSpPr>
-          <p:cNvPr id="16" name="Text 14"/>
-          <p:cNvSpPr txBox="1"/>
-          <p:nvPr/>
-        </p:nvSpPr>
-        <p:spPr>
-          <a:xfrm>
-            <a:off x="2400300" y="3161109"/>
-            <a:ext cx="1866900" cy="95250"/>
+          <p:cNvPr id="15" name="Text 13"/>
+          <p:cNvSpPr txBox="1"/>
+          <p:nvPr/>
+        </p:nvSpPr>
+        <p:spPr>
+          <a:xfrm>
+            <a:off x="2783780" y="3240286"/>
+            <a:ext cx="2238494" cy="95250"/>
           </a:xfrm>
           <a:prstGeom prst="rect">
             <a:avLst/>
@@ -16179,14 +16771,14 @@
       </p:sp>
       <p:sp>
         <p:nvSpPr>
-          <p:cNvPr id="17" name="Text 15"/>
-          <p:cNvSpPr txBox="1"/>
-          <p:nvPr/>
-        </p:nvSpPr>
-        <p:spPr>
-          <a:xfrm>
-            <a:off x="2400300" y="3307159"/>
-            <a:ext cx="1866900" cy="396081"/>
+          <p:cNvPr id="16" name="Text 14"/>
+          <p:cNvSpPr txBox="1"/>
+          <p:nvPr/>
+        </p:nvSpPr>
+        <p:spPr>
+          <a:xfrm>
+            <a:off x="2783780" y="3386336"/>
+            <a:ext cx="2238494" cy="396081"/>
           </a:xfrm>
           <a:prstGeom prst="rect">
             <a:avLst/>
@@ -16241,14 +16833,14 @@
       </p:sp>
       <p:sp>
         <p:nvSpPr>
-          <p:cNvPr id="18" name="Text 16"/>
-          <p:cNvSpPr txBox="1"/>
-          <p:nvPr/>
-        </p:nvSpPr>
-        <p:spPr>
-          <a:xfrm>
-            <a:off x="4292600" y="3161109"/>
-            <a:ext cx="1866900" cy="95250"/>
+          <p:cNvPr id="17" name="Text 15"/>
+          <p:cNvSpPr txBox="1"/>
+          <p:nvPr/>
+        </p:nvSpPr>
+        <p:spPr>
+          <a:xfrm>
+            <a:off x="5059660" y="3240286"/>
+            <a:ext cx="2238387" cy="95250"/>
           </a:xfrm>
           <a:prstGeom prst="rect">
             <a:avLst/>
@@ -16283,14 +16875,14 @@
       </p:sp>
       <p:sp>
         <p:nvSpPr>
-          <p:cNvPr id="19" name="Text 17"/>
-          <p:cNvSpPr txBox="1"/>
-          <p:nvPr/>
-        </p:nvSpPr>
-        <p:spPr>
-          <a:xfrm>
-            <a:off x="4292600" y="3307159"/>
-            <a:ext cx="1866900" cy="594122"/>
+          <p:cNvPr id="18" name="Text 16"/>
+          <p:cNvSpPr txBox="1"/>
+          <p:nvPr/>
+        </p:nvSpPr>
+        <p:spPr>
+          <a:xfrm>
+            <a:off x="5059660" y="3386336"/>
+            <a:ext cx="2238387" cy="594122"/>
           </a:xfrm>
           <a:prstGeom prst="rect">
             <a:avLst/>
@@ -16317,7 +16909,7 @@
                 <a:ea typeface="Everyday Sans Headline Light" pitchFamily="34" charset="-122"/>
                 <a:cs typeface="Everyday Sans Headline Light" pitchFamily="34" charset="-120"/>
               </a:rPr>
-              <a:t>Remove friction and</a:t>
+              <a:t>Remove friction with shared</a:t>
             </a:r>
             <a:endParaRPr lang="en-US" sz="1300" dirty="0"/>
           </a:p>
@@ -16337,7 +16929,7 @@
                 <a:ea typeface="Everyday Sans Headline Light" pitchFamily="34" charset="-122"/>
                 <a:cs typeface="Everyday Sans Headline Light" pitchFamily="34" charset="-120"/>
               </a:rPr>
-              <a:t>unnecessary</a:t>
+              <a:t>capabilities and better</a:t>
             </a:r>
             <a:endParaRPr lang="en-US" sz="1300" dirty="0"/>
           </a:p>
@@ -16357,7 +16949,7 @@
                 <a:ea typeface="Everyday Sans Headline Light" pitchFamily="34" charset="-122"/>
                 <a:cs typeface="Everyday Sans Headline Light" pitchFamily="34" charset="-120"/>
               </a:rPr>
-              <a:t>complexity</a:t>
+              <a:t>guidance</a:t>
             </a:r>
             <a:endParaRPr lang="en-US" sz="1300" dirty="0"/>
           </a:p>
@@ -16365,14 +16957,14 @@
       </p:sp>
       <p:sp>
         <p:nvSpPr>
-          <p:cNvPr id="20" name="Text 18"/>
-          <p:cNvSpPr txBox="1"/>
-          <p:nvPr/>
-        </p:nvSpPr>
-        <p:spPr>
-          <a:xfrm>
-            <a:off x="6184900" y="3161109"/>
-            <a:ext cx="1866900" cy="95250"/>
+          <p:cNvPr id="19" name="Text 17"/>
+          <p:cNvSpPr txBox="1"/>
+          <p:nvPr/>
+        </p:nvSpPr>
+        <p:spPr>
+          <a:xfrm>
+            <a:off x="7335441" y="3240286"/>
+            <a:ext cx="2238494" cy="95250"/>
           </a:xfrm>
           <a:prstGeom prst="rect">
             <a:avLst/>
@@ -16399,7 +16991,7 @@
                 <a:ea typeface="Everyday Sans Mono" pitchFamily="34" charset="-122"/>
                 <a:cs typeface="Everyday Sans Mono" pitchFamily="34" charset="-120"/>
               </a:rPr>
-              <a:t>ENABLE</a:t>
+              <a:t>MEASURE</a:t>
             </a:r>
             <a:endParaRPr lang="en-US" sz="600" dirty="0"/>
           </a:p>
@@ -16407,14 +16999,14 @@
       </p:sp>
       <p:sp>
         <p:nvSpPr>
-          <p:cNvPr id="21" name="Text 19"/>
-          <p:cNvSpPr txBox="1"/>
-          <p:nvPr/>
-        </p:nvSpPr>
-        <p:spPr>
-          <a:xfrm>
-            <a:off x="6184900" y="3307159"/>
-            <a:ext cx="1866900" cy="396081"/>
+          <p:cNvPr id="20" name="Text 18"/>
+          <p:cNvSpPr txBox="1"/>
+          <p:nvPr/>
+        </p:nvSpPr>
+        <p:spPr>
+          <a:xfrm>
+            <a:off x="7335441" y="3386336"/>
+            <a:ext cx="2238494" cy="396081"/>
           </a:xfrm>
           <a:prstGeom prst="rect">
             <a:avLst/>
@@ -16441,7 +17033,7 @@
                 <a:ea typeface="Everyday Sans Headline Light" pitchFamily="34" charset="-122"/>
                 <a:cs typeface="Everyday Sans Headline Light" pitchFamily="34" charset="-120"/>
               </a:rPr>
-              <a:t>Shared capabilities and</a:t>
+              <a:t>Behavior, adoption, media</a:t>
             </a:r>
             <a:endParaRPr lang="en-US" sz="1300" dirty="0"/>
           </a:p>
@@ -16461,7 +17053,7 @@
                 <a:ea typeface="Everyday Sans Headline Light" pitchFamily="34" charset="-122"/>
                 <a:cs typeface="Everyday Sans Headline Light" pitchFamily="34" charset="-120"/>
               </a:rPr>
-              <a:t>better guidance</a:t>
+              <a:t>outcomes</a:t>
             </a:r>
             <a:endParaRPr lang="en-US" sz="1300" dirty="0"/>
           </a:p>
@@ -16469,14 +17061,14 @@
       </p:sp>
       <p:sp>
         <p:nvSpPr>
-          <p:cNvPr id="22" name="Text 20"/>
-          <p:cNvSpPr txBox="1"/>
-          <p:nvPr/>
-        </p:nvSpPr>
-        <p:spPr>
-          <a:xfrm>
-            <a:off x="8077200" y="3161109"/>
-            <a:ext cx="1866900" cy="95250"/>
+          <p:cNvPr id="21" name="Text 19"/>
+          <p:cNvSpPr txBox="1"/>
+          <p:nvPr/>
+        </p:nvSpPr>
+        <p:spPr>
+          <a:xfrm>
+            <a:off x="9611320" y="3240286"/>
+            <a:ext cx="2238387" cy="95250"/>
           </a:xfrm>
           <a:prstGeom prst="rect">
             <a:avLst/>
@@ -16503,7 +17095,7 @@
                 <a:ea typeface="Everyday Sans Mono" pitchFamily="34" charset="-122"/>
                 <a:cs typeface="Everyday Sans Mono" pitchFamily="34" charset="-120"/>
               </a:rPr>
-              <a:t>MEASURE</a:t>
+              <a:t>LEARN</a:t>
             </a:r>
             <a:endParaRPr lang="en-US" sz="600" dirty="0"/>
           </a:p>
@@ -16511,14 +17103,14 @@
       </p:sp>
       <p:sp>
         <p:nvSpPr>
-          <p:cNvPr id="23" name="Text 21"/>
-          <p:cNvSpPr txBox="1"/>
-          <p:nvPr/>
-        </p:nvSpPr>
-        <p:spPr>
-          <a:xfrm>
-            <a:off x="8077200" y="3307159"/>
-            <a:ext cx="1866900" cy="396081"/>
+          <p:cNvPr id="22" name="Text 20"/>
+          <p:cNvSpPr txBox="1"/>
+          <p:nvPr/>
+        </p:nvSpPr>
+        <p:spPr>
+          <a:xfrm>
+            <a:off x="9611320" y="3386336"/>
+            <a:ext cx="2238387" cy="396081"/>
           </a:xfrm>
           <a:prstGeom prst="rect">
             <a:avLst/>
@@ -16545,7 +17137,7 @@
                 <a:ea typeface="Everyday Sans Headline Light" pitchFamily="34" charset="-122"/>
                 <a:cs typeface="Everyday Sans Headline Light" pitchFamily="34" charset="-120"/>
               </a:rPr>
-              <a:t>Behavior, adoption,</a:t>
+              <a:t>Decide what to improve,</a:t>
             </a:r>
             <a:endParaRPr lang="en-US" sz="1300" dirty="0"/>
           </a:p>
@@ -16565,7 +17157,7 @@
                 <a:ea typeface="Everyday Sans Headline Light" pitchFamily="34" charset="-122"/>
                 <a:cs typeface="Everyday Sans Headline Light" pitchFamily="34" charset="-120"/>
               </a:rPr>
-              <a:t>media outcomes</a:t>
+              <a:t>refine or scale next</a:t>
             </a:r>
             <a:endParaRPr lang="en-US" sz="1300" dirty="0"/>
           </a:p>
@@ -16573,75 +17165,75 @@
       </p:sp>
       <p:sp>
         <p:nvSpPr>
-          <p:cNvPr id="24" name="Text 22"/>
-          <p:cNvSpPr txBox="1"/>
-          <p:nvPr/>
-        </p:nvSpPr>
-        <p:spPr>
-          <a:xfrm>
-            <a:off x="9969500" y="3161109"/>
-            <a:ext cx="1866900" cy="95250"/>
-          </a:xfrm>
-          <a:prstGeom prst="rect">
-            <a:avLst/>
-          </a:prstGeom>
-          <a:noFill/>
-          <a:ln/>
-        </p:spPr>
-        <p:txBody>
-          <a:bodyPr wrap="square" lIns="0" tIns="0" rIns="0" bIns="0" rtlCol="0" anchor="t"/>
-          <a:lstStyle/>
-          <a:p>
-            <a:pPr algn="l" indent="0" marL="0">
-              <a:lnSpc>
-                <a:spcPts val="720"/>
-              </a:lnSpc>
-              <a:buNone/>
-            </a:pPr>
-            <a:r>
-              <a:rPr lang="en-US" sz="600" spc="84" kern="0" dirty="0">
-                <a:solidFill>
-                  <a:srgbClr val="0053E2"/>
+          <p:cNvPr id="23" name="Text 21"/>
+          <p:cNvSpPr txBox="1"/>
+          <p:nvPr/>
+        </p:nvSpPr>
+        <p:spPr>
+          <a:xfrm>
+            <a:off x="9611320" y="3922117"/>
+            <a:ext cx="2238387" cy="128588"/>
+          </a:xfrm>
+          <a:prstGeom prst="rect">
+            <a:avLst/>
+          </a:prstGeom>
+          <a:noFill/>
+          <a:ln/>
+        </p:spPr>
+        <p:txBody>
+          <a:bodyPr wrap="square" lIns="0" tIns="0" rIns="0" bIns="0" rtlCol="0" anchor="t"/>
+          <a:lstStyle/>
+          <a:p>
+            <a:pPr algn="l" indent="0" marL="0">
+              <a:lnSpc>
+                <a:spcPts val="1013"/>
+              </a:lnSpc>
+              <a:buNone/>
+            </a:pPr>
+            <a:r>
+              <a:rPr lang="en-US" sz="750" spc="105" kern="0" dirty="0">
+                <a:solidFill>
+                  <a:srgbClr val="3D4A63"/>
                 </a:solidFill>
                 <a:latin typeface="Everyday Sans Mono" pitchFamily="34" charset="0"/>
                 <a:ea typeface="Everyday Sans Mono" pitchFamily="34" charset="-122"/>
                 <a:cs typeface="Everyday Sans Mono" pitchFamily="34" charset="-120"/>
               </a:rPr>
-              <a:t>LEARN</a:t>
-            </a:r>
-            <a:endParaRPr lang="en-US" sz="600" dirty="0"/>
-          </a:p>
-        </p:txBody>
-      </p:sp>
-      <p:sp>
-        <p:nvSpPr>
-          <p:cNvPr id="25" name="Text 23"/>
-          <p:cNvSpPr txBox="1"/>
-          <p:nvPr/>
-        </p:nvSpPr>
-        <p:spPr>
-          <a:xfrm>
-            <a:off x="9969500" y="3307159"/>
-            <a:ext cx="1866900" cy="594122"/>
-          </a:xfrm>
-          <a:prstGeom prst="rect">
-            <a:avLst/>
-          </a:prstGeom>
-          <a:noFill/>
-          <a:ln/>
-        </p:spPr>
-        <p:txBody>
-          <a:bodyPr wrap="square" lIns="0" tIns="0" rIns="0" bIns="0" rtlCol="0" anchor="t"/>
-          <a:lstStyle/>
-          <a:p>
-            <a:pPr algn="l" indent="0" marL="0">
-              <a:lnSpc>
-                <a:spcPts val="1560"/>
-              </a:lnSpc>
-              <a:buNone/>
-            </a:pPr>
-            <a:r>
-              <a:rPr lang="en-US" sz="1300" spc="-39" kern="0" dirty="0">
+              <a:t>↺ REPEAT</a:t>
+            </a:r>
+            <a:endParaRPr lang="en-US" sz="750" dirty="0"/>
+          </a:p>
+        </p:txBody>
+      </p:sp>
+      <p:sp>
+        <p:nvSpPr>
+          <p:cNvPr id="24" name="Text 22"/>
+          <p:cNvSpPr txBox="1"/>
+          <p:nvPr/>
+        </p:nvSpPr>
+        <p:spPr>
+          <a:xfrm>
+            <a:off x="508000" y="4412655"/>
+            <a:ext cx="9601200" cy="609600"/>
+          </a:xfrm>
+          <a:prstGeom prst="rect">
+            <a:avLst/>
+          </a:prstGeom>
+          <a:noFill/>
+          <a:ln/>
+        </p:spPr>
+        <p:txBody>
+          <a:bodyPr wrap="square" lIns="0" tIns="0" rIns="0" bIns="0" rtlCol="0" anchor="t"/>
+          <a:lstStyle/>
+          <a:p>
+            <a:pPr algn="l" indent="0" marL="0">
+              <a:lnSpc>
+                <a:spcPts val="2400"/>
+              </a:lnSpc>
+              <a:buNone/>
+            </a:pPr>
+            <a:r>
+              <a:rPr lang="en-US" sz="2000" spc="-60" kern="0" dirty="0">
                 <a:solidFill>
                   <a:srgbClr val="001E60"/>
                 </a:solidFill>
@@ -16649,19 +17241,19 @@
                 <a:ea typeface="Everyday Sans Headline Light" pitchFamily="34" charset="-122"/>
                 <a:cs typeface="Everyday Sans Headline Light" pitchFamily="34" charset="-120"/>
               </a:rPr>
-              <a:t>Decide what to</a:t>
-            </a:r>
-            <a:endParaRPr lang="en-US" sz="1300" dirty="0"/>
-          </a:p>
-          <a:p>
-            <a:pPr algn="l" indent="0" marL="0">
-              <a:lnSpc>
-                <a:spcPts val="1560"/>
-              </a:lnSpc>
-              <a:buNone/>
-            </a:pPr>
-            <a:r>
-              <a:rPr lang="en-US" sz="1300" spc="-39" kern="0" dirty="0">
+              <a:t>We don’t need advertisers to trust that Walmart Ads is getting better. We need to</a:t>
+            </a:r>
+            <a:endParaRPr lang="en-US" sz="2000" dirty="0"/>
+          </a:p>
+          <a:p>
+            <a:pPr algn="l" indent="0" marL="0">
+              <a:lnSpc>
+                <a:spcPts val="2400"/>
+              </a:lnSpc>
+              <a:buNone/>
+            </a:pPr>
+            <a:r>
+              <a:rPr lang="en-US" sz="2000" spc="-60" kern="0" dirty="0">
                 <a:solidFill>
                   <a:srgbClr val="001E60"/>
                 </a:solidFill>
@@ -16669,130 +17261,6 @@
                 <a:ea typeface="Everyday Sans Headline Light" pitchFamily="34" charset="-122"/>
                 <a:cs typeface="Everyday Sans Headline Light" pitchFamily="34" charset="-120"/>
               </a:rPr>
-              <a:t>improve, refine or scale</a:t>
-            </a:r>
-            <a:endParaRPr lang="en-US" sz="1300" dirty="0"/>
-          </a:p>
-          <a:p>
-            <a:pPr algn="l" indent="0" marL="0">
-              <a:lnSpc>
-                <a:spcPts val="1560"/>
-              </a:lnSpc>
-              <a:buNone/>
-            </a:pPr>
-            <a:r>
-              <a:rPr lang="en-US" sz="1300" spc="-39" kern="0" dirty="0">
-                <a:solidFill>
-                  <a:srgbClr val="001E60"/>
-                </a:solidFill>
-                <a:latin typeface="Everyday Sans Headline Light" pitchFamily="34" charset="0"/>
-                <a:ea typeface="Everyday Sans Headline Light" pitchFamily="34" charset="-122"/>
-                <a:cs typeface="Everyday Sans Headline Light" pitchFamily="34" charset="-120"/>
-              </a:rPr>
-              <a:t>next</a:t>
-            </a:r>
-            <a:endParaRPr lang="en-US" sz="1300" dirty="0"/>
-          </a:p>
-        </p:txBody>
-      </p:sp>
-      <p:sp>
-        <p:nvSpPr>
-          <p:cNvPr id="26" name="Text 24"/>
-          <p:cNvSpPr txBox="1"/>
-          <p:nvPr/>
-        </p:nvSpPr>
-        <p:spPr>
-          <a:xfrm>
-            <a:off x="9969500" y="4040981"/>
-            <a:ext cx="1866900" cy="128588"/>
-          </a:xfrm>
-          <a:prstGeom prst="rect">
-            <a:avLst/>
-          </a:prstGeom>
-          <a:noFill/>
-          <a:ln/>
-        </p:spPr>
-        <p:txBody>
-          <a:bodyPr wrap="square" lIns="0" tIns="0" rIns="0" bIns="0" rtlCol="0" anchor="t"/>
-          <a:lstStyle/>
-          <a:p>
-            <a:pPr algn="l" indent="0" marL="0">
-              <a:lnSpc>
-                <a:spcPts val="1013"/>
-              </a:lnSpc>
-              <a:buNone/>
-            </a:pPr>
-            <a:r>
-              <a:rPr lang="en-US" sz="750" spc="105" kern="0" dirty="0">
-                <a:solidFill>
-                  <a:srgbClr val="3D4A63"/>
-                </a:solidFill>
-                <a:latin typeface="Everyday Sans Mono" pitchFamily="34" charset="0"/>
-                <a:ea typeface="Everyday Sans Mono" pitchFamily="34" charset="-122"/>
-                <a:cs typeface="Everyday Sans Mono" pitchFamily="34" charset="-120"/>
-              </a:rPr>
-              <a:t>↺ REPEAT</a:t>
-            </a:r>
-            <a:endParaRPr lang="en-US" sz="750" dirty="0"/>
-          </a:p>
-        </p:txBody>
-      </p:sp>
-      <p:sp>
-        <p:nvSpPr>
-          <p:cNvPr id="27" name="Text 25"/>
-          <p:cNvSpPr txBox="1"/>
-          <p:nvPr/>
-        </p:nvSpPr>
-        <p:spPr>
-          <a:xfrm>
-            <a:off x="508000" y="4531519"/>
-            <a:ext cx="9601200" cy="609600"/>
-          </a:xfrm>
-          <a:prstGeom prst="rect">
-            <a:avLst/>
-          </a:prstGeom>
-          <a:noFill/>
-          <a:ln/>
-        </p:spPr>
-        <p:txBody>
-          <a:bodyPr wrap="square" lIns="0" tIns="0" rIns="0" bIns="0" rtlCol="0" anchor="t"/>
-          <a:lstStyle/>
-          <a:p>
-            <a:pPr algn="l" indent="0" marL="0">
-              <a:lnSpc>
-                <a:spcPts val="2400"/>
-              </a:lnSpc>
-              <a:buNone/>
-            </a:pPr>
-            <a:r>
-              <a:rPr lang="en-US" sz="2000" spc="-60" kern="0" dirty="0">
-                <a:solidFill>
-                  <a:srgbClr val="001E60"/>
-                </a:solidFill>
-                <a:latin typeface="Everyday Sans Headline Light" pitchFamily="34" charset="0"/>
-                <a:ea typeface="Everyday Sans Headline Light" pitchFamily="34" charset="-122"/>
-                <a:cs typeface="Everyday Sans Headline Light" pitchFamily="34" charset="-120"/>
-              </a:rPr>
-              <a:t>We don’t need advertisers to trust that Walmart Ads is getting better. We need to</a:t>
-            </a:r>
-            <a:endParaRPr lang="en-US" sz="2000" dirty="0"/>
-          </a:p>
-          <a:p>
-            <a:pPr algn="l" indent="0" marL="0">
-              <a:lnSpc>
-                <a:spcPts val="2400"/>
-              </a:lnSpc>
-              <a:buNone/>
-            </a:pPr>
-            <a:r>
-              <a:rPr lang="en-US" sz="2000" spc="-60" kern="0" dirty="0">
-                <a:solidFill>
-                  <a:srgbClr val="001E60"/>
-                </a:solidFill>
-                <a:latin typeface="Everyday Sans Headline Light" pitchFamily="34" charset="0"/>
-                <a:ea typeface="Everyday Sans Headline Light" pitchFamily="34" charset="-122"/>
-                <a:cs typeface="Everyday Sans Headline Light" pitchFamily="34" charset="-120"/>
-              </a:rPr>
               <a:t>give them an experience, evidence and outcomes that prove it.</a:t>
             </a:r>
             <a:endParaRPr lang="en-US" sz="2000" dirty="0"/>
@@ -16801,7 +17269,7 @@
       </p:sp>
       <p:pic>
         <p:nvPicPr>
-          <p:cNvPr id="28" name="Image 0" descr="Walmart Spark">    </p:cNvPr>
+          <p:cNvPr id="25" name="Image 0" descr="Walmart Spark">    </p:cNvPr>
           <p:cNvPicPr>
             <a:picLocks noChangeAspect="1"/>
           </p:cNvPicPr>
@@ -16825,7 +17293,7 @@
       </p:pic>
       <p:sp>
         <p:nvSpPr>
-          <p:cNvPr id="29" name="Text 26"/>
+          <p:cNvPr id="26" name="Text 23"/>
           <p:cNvSpPr txBox="1"/>
           <p:nvPr/>
         </p:nvSpPr>
@@ -16864,7 +17332,7 @@
       </p:sp>
       <p:sp>
         <p:nvSpPr>
-          <p:cNvPr id="30" name="Text 27"/>
+          <p:cNvPr id="27" name="Text 24"/>
           <p:cNvSpPr txBox="1"/>
           <p:nvPr/>
         </p:nvSpPr>
@@ -16895,7 +17363,724 @@
                 <a:ea typeface="Everyday Sans Mono" pitchFamily="34" charset="-122"/>
                 <a:cs typeface="Everyday Sans Mono" pitchFamily="34" charset="-120"/>
               </a:rPr>
-              <a:t>17 / 17</a:t>
+              <a:t>17 / 18</a:t>
+            </a:r>
+            <a:endParaRPr lang="en-US" sz="650" dirty="0"/>
+          </a:p>
+        </p:txBody>
+      </p:sp>
+    </p:spTree>
+  </p:cSld>
+  <p:clrMapOvr>
+    <a:masterClrMapping/>
+  </p:clrMapOvr>
+</p:sld>
+</file>
+
+<file path=ppt/slides/slide18.xml><?xml version="1.0" encoding="utf-8"?>
+<p:sld xmlns:a="http://schemas.openxmlformats.org/drawingml/2006/main" xmlns:r="http://schemas.openxmlformats.org/officeDocument/2006/relationships" xmlns:p="http://schemas.openxmlformats.org/presentationml/2006/main">
+  <p:cSld name="Slide 18">
+    <p:bg>
+      <p:bgPr>
+        <a:solidFill>
+          <a:srgbClr val="001E60"/>
+        </a:solidFill>
+      </p:bgPr>
+    </p:bg>
+    <p:spTree>
+      <p:nvGrpSpPr>
+        <p:cNvPr id="1" name=""/>
+        <p:cNvGrpSpPr/>
+        <p:nvPr/>
+      </p:nvGrpSpPr>
+      <p:grpSpPr>
+        <a:xfrm>
+          <a:off x="0" y="0"/>
+          <a:ext cx="0" cy="0"/>
+          <a:chOff x="0" y="0"/>
+          <a:chExt cx="0" cy="0"/>
+        </a:xfrm>
+      </p:grpSpPr>
+      <p:sp>
+        <p:nvSpPr>
+          <p:cNvPr id="2" name="Shape 0"/>
+          <p:cNvSpPr/>
+          <p:nvPr/>
+        </p:nvSpPr>
+        <p:spPr>
+          <a:xfrm>
+            <a:off x="508000" y="939800"/>
+            <a:ext cx="734120" cy="127000"/>
+          </a:xfrm>
+          <a:prstGeom prst="roundRect">
+            <a:avLst>
+              <a:gd name="adj" fmla="val 360000"/>
+            </a:avLst>
+          </a:prstGeom>
+          <a:solidFill>
+            <a:srgbClr val="D7EEF9"/>
+          </a:solidFill>
+          <a:ln/>
+        </p:spPr>
+      </p:sp>
+      <p:sp>
+        <p:nvSpPr>
+          <p:cNvPr id="3" name="Shape 1"/>
+          <p:cNvSpPr/>
+          <p:nvPr/>
+        </p:nvSpPr>
+        <p:spPr>
+          <a:xfrm>
+            <a:off x="508000" y="2506464"/>
+            <a:ext cx="3048000" cy="0"/>
+          </a:xfrm>
+          <a:prstGeom prst="line">
+            <a:avLst/>
+          </a:prstGeom>
+          <a:noFill/>
+          <a:ln w="6350">
+            <a:solidFill>
+              <a:srgbClr val="4DBDF5"/>
+            </a:solidFill>
+            <a:prstDash val="solid"/>
+          </a:ln>
+        </p:spPr>
+      </p:sp>
+      <p:sp>
+        <p:nvSpPr>
+          <p:cNvPr id="4" name="Shape 2"/>
+          <p:cNvSpPr/>
+          <p:nvPr/>
+        </p:nvSpPr>
+        <p:spPr>
+          <a:xfrm>
+            <a:off x="3810000" y="2506464"/>
+            <a:ext cx="3048000" cy="0"/>
+          </a:xfrm>
+          <a:prstGeom prst="line">
+            <a:avLst/>
+          </a:prstGeom>
+          <a:noFill/>
+          <a:ln w="6350">
+            <a:solidFill>
+              <a:srgbClr val="4DBDF5"/>
+            </a:solidFill>
+            <a:prstDash val="solid"/>
+          </a:ln>
+        </p:spPr>
+      </p:sp>
+      <p:sp>
+        <p:nvSpPr>
+          <p:cNvPr id="5" name="Shape 3"/>
+          <p:cNvSpPr/>
+          <p:nvPr/>
+        </p:nvSpPr>
+        <p:spPr>
+          <a:xfrm>
+            <a:off x="7112000" y="2506464"/>
+            <a:ext cx="3048000" cy="0"/>
+          </a:xfrm>
+          <a:prstGeom prst="line">
+            <a:avLst/>
+          </a:prstGeom>
+          <a:noFill/>
+          <a:ln w="6350">
+            <a:solidFill>
+              <a:srgbClr val="4DBDF5"/>
+            </a:solidFill>
+            <a:prstDash val="solid"/>
+          </a:ln>
+        </p:spPr>
+      </p:sp>
+      <p:sp>
+        <p:nvSpPr>
+          <p:cNvPr id="6" name="Text 4"/>
+          <p:cNvSpPr txBox="1"/>
+          <p:nvPr/>
+        </p:nvSpPr>
+        <p:spPr>
+          <a:xfrm>
+            <a:off x="501650" y="971550"/>
+            <a:ext cx="746820" cy="63500"/>
+          </a:xfrm>
+          <a:prstGeom prst="rect">
+            <a:avLst/>
+          </a:prstGeom>
+          <a:noFill/>
+          <a:ln/>
+        </p:spPr>
+        <p:txBody>
+          <a:bodyPr wrap="square" lIns="0" tIns="0" rIns="0" bIns="0" rtlCol="0" anchor="ctr"/>
+          <a:lstStyle/>
+          <a:p>
+            <a:pPr algn="ctr" indent="0" marL="0">
+              <a:lnSpc>
+                <a:spcPts val="500"/>
+              </a:lnSpc>
+              <a:buNone/>
+            </a:pPr>
+            <a:r>
+              <a:rPr lang="en-US" sz="500" spc="90" kern="0" dirty="0">
+                <a:solidFill>
+                  <a:srgbClr val="0053E2"/>
+                </a:solidFill>
+                <a:latin typeface="Everyday Sans Mono" pitchFamily="34" charset="0"/>
+                <a:ea typeface="Everyday Sans Mono" pitchFamily="34" charset="-122"/>
+                <a:cs typeface="Everyday Sans Mono" pitchFamily="34" charset="-120"/>
+              </a:rPr>
+              <a:t>WHAT WE NEED</a:t>
+            </a:r>
+            <a:endParaRPr lang="en-US" sz="500" dirty="0"/>
+          </a:p>
+        </p:txBody>
+      </p:sp>
+      <p:sp>
+        <p:nvSpPr>
+          <p:cNvPr id="7" name="Text 5"/>
+          <p:cNvSpPr txBox="1"/>
+          <p:nvPr/>
+        </p:nvSpPr>
+        <p:spPr>
+          <a:xfrm>
+            <a:off x="508000" y="1212850"/>
+            <a:ext cx="7848767" cy="576072"/>
+          </a:xfrm>
+          <a:prstGeom prst="rect">
+            <a:avLst/>
+          </a:prstGeom>
+          <a:noFill/>
+          <a:ln/>
+        </p:spPr>
+        <p:txBody>
+          <a:bodyPr wrap="square" lIns="0" tIns="0" rIns="0" bIns="0" rtlCol="0" anchor="t"/>
+          <a:lstStyle/>
+          <a:p>
+            <a:pPr algn="l" indent="0" marL="0">
+              <a:lnSpc>
+                <a:spcPts val="4536"/>
+              </a:lnSpc>
+              <a:buNone/>
+            </a:pPr>
+            <a:r>
+              <a:rPr lang="en-US" sz="3600" spc="-108" kern="0" dirty="0">
+                <a:solidFill>
+                  <a:srgbClr val="FFFFFF"/>
+                </a:solidFill>
+                <a:latin typeface="Everyday Sans Headline Light" pitchFamily="34" charset="0"/>
+                <a:ea typeface="Everyday Sans Headline Light" pitchFamily="34" charset="-122"/>
+                <a:cs typeface="Everyday Sans Headline Light" pitchFamily="34" charset="-120"/>
+              </a:rPr>
+              <a:t>Three commitments make this </a:t>
+            </a:r>
+            <a:pPr algn="l" indent="0" marL="0">
+              <a:lnSpc>
+                <a:spcPts val="4536"/>
+              </a:lnSpc>
+              <a:buNone/>
+            </a:pPr>
+            <a:r>
+              <a:rPr lang="en-US" sz="3600" i="1" spc="-108" kern="0" dirty="0">
+                <a:solidFill>
+                  <a:srgbClr val="4DBDF5"/>
+                </a:solidFill>
+                <a:latin typeface="Everyday Sans Light" pitchFamily="34" charset="0"/>
+                <a:ea typeface="Everyday Sans Light" pitchFamily="34" charset="-122"/>
+                <a:cs typeface="Everyday Sans Light" pitchFamily="34" charset="-120"/>
+              </a:rPr>
+              <a:t>work</a:t>
+            </a:r>
+            <a:pPr algn="l" indent="0" marL="0">
+              <a:lnSpc>
+                <a:spcPts val="4536"/>
+              </a:lnSpc>
+              <a:buNone/>
+            </a:pPr>
+            <a:r>
+              <a:rPr lang="en-US" sz="3600" spc="-108" kern="0" dirty="0">
+                <a:solidFill>
+                  <a:srgbClr val="FFFFFF"/>
+                </a:solidFill>
+                <a:latin typeface="Everyday Sans Headline Light" pitchFamily="34" charset="0"/>
+                <a:ea typeface="Everyday Sans Headline Light" pitchFamily="34" charset="-122"/>
+                <a:cs typeface="Everyday Sans Headline Light" pitchFamily="34" charset="-120"/>
+              </a:rPr>
+              <a:t>.</a:t>
+            </a:r>
+            <a:endParaRPr lang="en-US" sz="3600" dirty="0"/>
+          </a:p>
+        </p:txBody>
+      </p:sp>
+      <p:sp>
+        <p:nvSpPr>
+          <p:cNvPr id="8" name="Text 6"/>
+          <p:cNvSpPr txBox="1"/>
+          <p:nvPr/>
+        </p:nvSpPr>
+        <p:spPr>
+          <a:xfrm>
+            <a:off x="508000" y="1890514"/>
+            <a:ext cx="6720840" cy="460375"/>
+          </a:xfrm>
+          <a:prstGeom prst="rect">
+            <a:avLst/>
+          </a:prstGeom>
+          <a:noFill/>
+          <a:ln/>
+        </p:spPr>
+        <p:txBody>
+          <a:bodyPr wrap="square" lIns="0" tIns="0" rIns="0" bIns="0" rtlCol="0" anchor="t"/>
+          <a:lstStyle/>
+          <a:p>
+            <a:pPr algn="l" indent="0" marL="0">
+              <a:lnSpc>
+                <a:spcPts val="1813"/>
+              </a:lnSpc>
+              <a:buNone/>
+            </a:pPr>
+            <a:r>
+              <a:rPr lang="en-US" sz="1250" i="1" dirty="0">
+                <a:solidFill>
+                  <a:srgbClr val="FFFFFF"/>
+                </a:solidFill>
+                <a:latin typeface="Everyday Sans UI" pitchFamily="34" charset="0"/>
+                <a:ea typeface="Everyday Sans UI" pitchFamily="34" charset="-122"/>
+                <a:cs typeface="Everyday Sans UI" pitchFamily="34" charset="-120"/>
+              </a:rPr>
+              <a:t>The strategy only holds if diagnosis, ownership and measurement are agreed before</a:t>
+            </a:r>
+            <a:endParaRPr lang="en-US" sz="1250" dirty="0"/>
+          </a:p>
+          <a:p>
+            <a:pPr algn="l" indent="0" marL="0">
+              <a:lnSpc>
+                <a:spcPts val="1813"/>
+              </a:lnSpc>
+              <a:buNone/>
+            </a:pPr>
+            <a:r>
+              <a:rPr lang="en-US" sz="1250" i="1" dirty="0">
+                <a:solidFill>
+                  <a:srgbClr val="FFFFFF"/>
+                </a:solidFill>
+                <a:latin typeface="Everyday Sans UI" pitchFamily="34" charset="0"/>
+                <a:ea typeface="Everyday Sans UI" pitchFamily="34" charset="-122"/>
+                <a:cs typeface="Everyday Sans UI" pitchFamily="34" charset="-120"/>
+              </a:rPr>
+              <a:t>solutions scale.</a:t>
+            </a:r>
+            <a:endParaRPr lang="en-US" sz="1250" dirty="0"/>
+          </a:p>
+        </p:txBody>
+      </p:sp>
+      <p:sp>
+        <p:nvSpPr>
+          <p:cNvPr id="9" name="Text 7"/>
+          <p:cNvSpPr txBox="1"/>
+          <p:nvPr/>
+        </p:nvSpPr>
+        <p:spPr>
+          <a:xfrm>
+            <a:off x="508000" y="2598539"/>
+            <a:ext cx="3291840" cy="95250"/>
+          </a:xfrm>
+          <a:prstGeom prst="rect">
+            <a:avLst/>
+          </a:prstGeom>
+          <a:noFill/>
+          <a:ln/>
+        </p:spPr>
+        <p:txBody>
+          <a:bodyPr wrap="square" lIns="0" tIns="0" rIns="0" bIns="0" rtlCol="0" anchor="t"/>
+          <a:lstStyle/>
+          <a:p>
+            <a:pPr algn="l" indent="0" marL="0">
+              <a:lnSpc>
+                <a:spcPts val="720"/>
+              </a:lnSpc>
+              <a:buNone/>
+            </a:pPr>
+            <a:r>
+              <a:rPr lang="en-US" sz="600" spc="60" kern="0" dirty="0">
+                <a:solidFill>
+                  <a:srgbClr val="4DBDF5"/>
+                </a:solidFill>
+                <a:latin typeface="Everyday Sans UI Medium" pitchFamily="34" charset="0"/>
+                <a:ea typeface="Everyday Sans UI Medium" pitchFamily="34" charset="-122"/>
+                <a:cs typeface="Everyday Sans UI Medium" pitchFamily="34" charset="-120"/>
+              </a:rPr>
+              <a:t>ALIGN</a:t>
+            </a:r>
+            <a:endParaRPr lang="en-US" sz="600" dirty="0"/>
+          </a:p>
+        </p:txBody>
+      </p:sp>
+      <p:sp>
+        <p:nvSpPr>
+          <p:cNvPr id="10" name="Text 8"/>
+          <p:cNvSpPr txBox="1"/>
+          <p:nvPr/>
+        </p:nvSpPr>
+        <p:spPr>
+          <a:xfrm>
+            <a:off x="508000" y="2744589"/>
+            <a:ext cx="3291840" cy="268089"/>
+          </a:xfrm>
+          <a:prstGeom prst="rect">
+            <a:avLst/>
+          </a:prstGeom>
+          <a:noFill/>
+          <a:ln/>
+        </p:spPr>
+        <p:txBody>
+          <a:bodyPr wrap="square" lIns="0" tIns="0" rIns="0" bIns="0" rtlCol="0" anchor="t"/>
+          <a:lstStyle/>
+          <a:p>
+            <a:pPr algn="l" indent="0" marL="0">
+              <a:lnSpc>
+                <a:spcPts val="1056"/>
+              </a:lnSpc>
+              <a:buNone/>
+            </a:pPr>
+            <a:r>
+              <a:rPr lang="en-US" sz="800" dirty="0">
+                <a:solidFill>
+                  <a:srgbClr val="FFFFFF"/>
+                </a:solidFill>
+                <a:latin typeface="Everyday Sans UI" pitchFamily="34" charset="0"/>
+                <a:ea typeface="Everyday Sans UI" pitchFamily="34" charset="-122"/>
+                <a:cs typeface="Everyday Sans UI" pitchFamily="34" charset="-120"/>
+              </a:rPr>
+              <a:t>Diagnose Display across all three contributors before prescribing a</a:t>
+            </a:r>
+            <a:endParaRPr lang="en-US" sz="800" dirty="0"/>
+          </a:p>
+          <a:p>
+            <a:pPr algn="l" indent="0" marL="0">
+              <a:lnSpc>
+                <a:spcPts val="1056"/>
+              </a:lnSpc>
+              <a:buNone/>
+            </a:pPr>
+            <a:r>
+              <a:rPr lang="en-US" sz="800" dirty="0">
+                <a:solidFill>
+                  <a:srgbClr val="FFFFFF"/>
+                </a:solidFill>
+                <a:latin typeface="Everyday Sans UI" pitchFamily="34" charset="0"/>
+                <a:ea typeface="Everyday Sans UI" pitchFamily="34" charset="-122"/>
+                <a:cs typeface="Everyday Sans UI" pitchFamily="34" charset="-120"/>
+              </a:rPr>
+              <a:t>solution, and use it as the first proof point for this approach.</a:t>
+            </a:r>
+            <a:endParaRPr lang="en-US" sz="800" dirty="0"/>
+          </a:p>
+        </p:txBody>
+      </p:sp>
+      <p:sp>
+        <p:nvSpPr>
+          <p:cNvPr id="11" name="Text 9"/>
+          <p:cNvSpPr txBox="1"/>
+          <p:nvPr/>
+        </p:nvSpPr>
+        <p:spPr>
+          <a:xfrm>
+            <a:off x="3810000" y="2598539"/>
+            <a:ext cx="3291840" cy="95250"/>
+          </a:xfrm>
+          <a:prstGeom prst="rect">
+            <a:avLst/>
+          </a:prstGeom>
+          <a:noFill/>
+          <a:ln/>
+        </p:spPr>
+        <p:txBody>
+          <a:bodyPr wrap="square" lIns="0" tIns="0" rIns="0" bIns="0" rtlCol="0" anchor="t"/>
+          <a:lstStyle/>
+          <a:p>
+            <a:pPr algn="l" indent="0" marL="0">
+              <a:lnSpc>
+                <a:spcPts val="720"/>
+              </a:lnSpc>
+              <a:buNone/>
+            </a:pPr>
+            <a:r>
+              <a:rPr lang="en-US" sz="600" spc="60" kern="0" dirty="0">
+                <a:solidFill>
+                  <a:srgbClr val="4DBDF5"/>
+                </a:solidFill>
+                <a:latin typeface="Everyday Sans UI Medium" pitchFamily="34" charset="0"/>
+                <a:ea typeface="Everyday Sans UI Medium" pitchFamily="34" charset="-122"/>
+                <a:cs typeface="Everyday Sans UI Medium" pitchFamily="34" charset="-120"/>
+              </a:rPr>
+              <a:t>STAFF</a:t>
+            </a:r>
+            <a:endParaRPr lang="en-US" sz="600" dirty="0"/>
+          </a:p>
+        </p:txBody>
+      </p:sp>
+      <p:sp>
+        <p:nvSpPr>
+          <p:cNvPr id="12" name="Text 10"/>
+          <p:cNvSpPr txBox="1"/>
+          <p:nvPr/>
+        </p:nvSpPr>
+        <p:spPr>
+          <a:xfrm>
+            <a:off x="3810000" y="2744589"/>
+            <a:ext cx="3291840" cy="268089"/>
+          </a:xfrm>
+          <a:prstGeom prst="rect">
+            <a:avLst/>
+          </a:prstGeom>
+          <a:noFill/>
+          <a:ln/>
+        </p:spPr>
+        <p:txBody>
+          <a:bodyPr wrap="square" lIns="0" tIns="0" rIns="0" bIns="0" rtlCol="0" anchor="t"/>
+          <a:lstStyle/>
+          <a:p>
+            <a:pPr algn="l" indent="0" marL="0">
+              <a:lnSpc>
+                <a:spcPts val="1056"/>
+              </a:lnSpc>
+              <a:buNone/>
+            </a:pPr>
+            <a:r>
+              <a:rPr lang="en-US" sz="800" dirty="0">
+                <a:solidFill>
+                  <a:srgbClr val="FFFFFF"/>
+                </a:solidFill>
+                <a:latin typeface="Everyday Sans UI" pitchFamily="34" charset="0"/>
+                <a:ea typeface="Everyday Sans UI" pitchFamily="34" charset="-122"/>
+                <a:cs typeface="Everyday Sans UI" pitchFamily="34" charset="-120"/>
+              </a:rPr>
+              <a:t>Stand up a joint diagnosis with Display Product, Sales and Media Insights,</a:t>
+            </a:r>
+            <a:endParaRPr lang="en-US" sz="800" dirty="0"/>
+          </a:p>
+          <a:p>
+            <a:pPr algn="l" indent="0" marL="0">
+              <a:lnSpc>
+                <a:spcPts val="1056"/>
+              </a:lnSpc>
+              <a:buNone/>
+            </a:pPr>
+            <a:r>
+              <a:rPr lang="en-US" sz="800" dirty="0">
+                <a:solidFill>
+                  <a:srgbClr val="FFFFFF"/>
+                </a:solidFill>
+                <a:latin typeface="Everyday Sans UI" pitchFamily="34" charset="0"/>
+                <a:ea typeface="Everyday Sans UI" pitchFamily="34" charset="-122"/>
+                <a:cs typeface="Everyday Sans UI" pitchFamily="34" charset="-120"/>
+              </a:rPr>
+              <a:t>with shared access to behavioral, setup and delivery data.</a:t>
+            </a:r>
+            <a:endParaRPr lang="en-US" sz="800" dirty="0"/>
+          </a:p>
+        </p:txBody>
+      </p:sp>
+      <p:sp>
+        <p:nvSpPr>
+          <p:cNvPr id="13" name="Text 11"/>
+          <p:cNvSpPr txBox="1"/>
+          <p:nvPr/>
+        </p:nvSpPr>
+        <p:spPr>
+          <a:xfrm>
+            <a:off x="7112000" y="2598539"/>
+            <a:ext cx="3291840" cy="95250"/>
+          </a:xfrm>
+          <a:prstGeom prst="rect">
+            <a:avLst/>
+          </a:prstGeom>
+          <a:noFill/>
+          <a:ln/>
+        </p:spPr>
+        <p:txBody>
+          <a:bodyPr wrap="square" lIns="0" tIns="0" rIns="0" bIns="0" rtlCol="0" anchor="t"/>
+          <a:lstStyle/>
+          <a:p>
+            <a:pPr algn="l" indent="0" marL="0">
+              <a:lnSpc>
+                <a:spcPts val="720"/>
+              </a:lnSpc>
+              <a:buNone/>
+            </a:pPr>
+            <a:r>
+              <a:rPr lang="en-US" sz="600" spc="60" kern="0" dirty="0">
+                <a:solidFill>
+                  <a:srgbClr val="4DBDF5"/>
+                </a:solidFill>
+                <a:latin typeface="Everyday Sans UI Medium" pitchFamily="34" charset="0"/>
+                <a:ea typeface="Everyday Sans UI Medium" pitchFamily="34" charset="-122"/>
+                <a:cs typeface="Everyday Sans UI Medium" pitchFamily="34" charset="-120"/>
+              </a:rPr>
+              <a:t>MEASURE</a:t>
+            </a:r>
+            <a:endParaRPr lang="en-US" sz="600" dirty="0"/>
+          </a:p>
+        </p:txBody>
+      </p:sp>
+      <p:sp>
+        <p:nvSpPr>
+          <p:cNvPr id="14" name="Text 12"/>
+          <p:cNvSpPr txBox="1"/>
+          <p:nvPr/>
+        </p:nvSpPr>
+        <p:spPr>
+          <a:xfrm>
+            <a:off x="7112000" y="2744589"/>
+            <a:ext cx="3291840" cy="268089"/>
+          </a:xfrm>
+          <a:prstGeom prst="rect">
+            <a:avLst/>
+          </a:prstGeom>
+          <a:noFill/>
+          <a:ln/>
+        </p:spPr>
+        <p:txBody>
+          <a:bodyPr wrap="square" lIns="0" tIns="0" rIns="0" bIns="0" rtlCol="0" anchor="t"/>
+          <a:lstStyle/>
+          <a:p>
+            <a:pPr algn="l" indent="0" marL="0">
+              <a:lnSpc>
+                <a:spcPts val="1056"/>
+              </a:lnSpc>
+              <a:buNone/>
+            </a:pPr>
+            <a:r>
+              <a:rPr lang="en-US" sz="800" dirty="0">
+                <a:solidFill>
+                  <a:srgbClr val="FFFFFF"/>
+                </a:solidFill>
+                <a:latin typeface="Everyday Sans UI" pitchFamily="34" charset="0"/>
+                <a:ea typeface="Everyday Sans UI" pitchFamily="34" charset="-122"/>
+                <a:cs typeface="Everyday Sans UI" pitchFamily="34" charset="-120"/>
+              </a:rPr>
+              <a:t>Agree the outcome measures for Goal-Based Buying, recommendations</a:t>
+            </a:r>
+            <a:endParaRPr lang="en-US" sz="800" dirty="0"/>
+          </a:p>
+          <a:p>
+            <a:pPr algn="l" indent="0" marL="0">
+              <a:lnSpc>
+                <a:spcPts val="1056"/>
+              </a:lnSpc>
+              <a:buNone/>
+            </a:pPr>
+            <a:r>
+              <a:rPr lang="en-US" sz="800" dirty="0">
+                <a:solidFill>
+                  <a:srgbClr val="FFFFFF"/>
+                </a:solidFill>
+                <a:latin typeface="Everyday Sans UI" pitchFamily="34" charset="0"/>
+                <a:ea typeface="Everyday Sans UI" pitchFamily="34" charset="-122"/>
+                <a:cs typeface="Everyday Sans UI" pitchFamily="34" charset="-120"/>
+              </a:rPr>
+              <a:t>and shared capabilities before any of them scale.</a:t>
+            </a:r>
+            <a:endParaRPr lang="en-US" sz="800" dirty="0"/>
+          </a:p>
+        </p:txBody>
+      </p:sp>
+      <p:pic>
+        <p:nvPicPr>
+          <p:cNvPr id="15" name="Image 0" descr="Walmart Spark">    </p:cNvPr>
+          <p:cNvPicPr>
+            <a:picLocks noChangeAspect="1"/>
+          </p:cNvPicPr>
+          <p:nvPr/>
+        </p:nvPicPr>
+        <p:blipFill>
+          <a:blip r:embed="rId1"/>
+          <a:stretch>
+            <a:fillRect/>
+          </a:stretch>
+        </p:blipFill>
+        <p:spPr>
+          <a:xfrm>
+            <a:off x="508000" y="6362700"/>
+            <a:ext cx="127000" cy="127000"/>
+          </a:xfrm>
+          <a:prstGeom prst="rect">
+            <a:avLst/>
+          </a:prstGeom>
+        </p:spPr>
+      </p:pic>
+      <p:sp>
+        <p:nvSpPr>
+          <p:cNvPr id="16" name="Text 13"/>
+          <p:cNvSpPr txBox="1"/>
+          <p:nvPr/>
+        </p:nvSpPr>
+        <p:spPr>
+          <a:xfrm>
+            <a:off x="711200" y="6362700"/>
+            <a:ext cx="1439366" cy="127000"/>
+          </a:xfrm>
+          <a:prstGeom prst="rect">
+            <a:avLst/>
+          </a:prstGeom>
+          <a:noFill/>
+          <a:ln/>
+        </p:spPr>
+        <p:txBody>
+          <a:bodyPr wrap="square" lIns="0" tIns="0" rIns="0" bIns="0" rtlCol="0" anchor="ctr"/>
+          <a:lstStyle/>
+          <a:p>
+            <a:pPr indent="0" marL="0">
+              <a:buNone/>
+            </a:pPr>
+            <a:r>
+              <a:rPr lang="en-US" sz="550" dirty="0">
+                <a:solidFill>
+                  <a:srgbClr val="FFFFFF"/>
+                </a:solidFill>
+                <a:latin typeface="Everyday Sans UI" pitchFamily="34" charset="0"/>
+                <a:ea typeface="Everyday Sans UI" pitchFamily="34" charset="-122"/>
+                <a:cs typeface="Everyday Sans UI" pitchFamily="34" charset="-120"/>
+              </a:rPr>
+              <a:t>Advertiser Experience Strategy · draft</a:t>
+            </a:r>
+            <a:endParaRPr lang="en-US" sz="550" dirty="0"/>
+          </a:p>
+        </p:txBody>
+      </p:sp>
+      <p:sp>
+        <p:nvSpPr>
+          <p:cNvPr id="17" name="Text 14"/>
+          <p:cNvSpPr txBox="1"/>
+          <p:nvPr/>
+        </p:nvSpPr>
+        <p:spPr>
+          <a:xfrm>
+            <a:off x="10414000" y="6362700"/>
+            <a:ext cx="1270000" cy="127000"/>
+          </a:xfrm>
+          <a:prstGeom prst="rect">
+            <a:avLst/>
+          </a:prstGeom>
+          <a:noFill/>
+          <a:ln/>
+        </p:spPr>
+        <p:txBody>
+          <a:bodyPr wrap="square" lIns="0" tIns="0" rIns="0" bIns="0" rtlCol="0" anchor="ctr"/>
+          <a:lstStyle/>
+          <a:p>
+            <a:pPr algn="r" indent="0" marL="0">
+              <a:buNone/>
+            </a:pPr>
+            <a:r>
+              <a:rPr lang="en-US" sz="650" spc="78" kern="0" dirty="0">
+                <a:solidFill>
+                  <a:srgbClr val="D0D5DE"/>
+                </a:solidFill>
+                <a:latin typeface="Everyday Sans Mono" pitchFamily="34" charset="0"/>
+                <a:ea typeface="Everyday Sans Mono" pitchFamily="34" charset="-122"/>
+                <a:cs typeface="Everyday Sans Mono" pitchFamily="34" charset="-120"/>
+              </a:rPr>
+              <a:t>18 / 18</a:t>
             </a:r>
             <a:endParaRPr lang="en-US" sz="650" dirty="0"/>
           </a:p>
@@ -18272,7 +19457,7 @@
                 <a:ea typeface="Everyday Sans Mono" pitchFamily="34" charset="-122"/>
                 <a:cs typeface="Everyday Sans Mono" pitchFamily="34" charset="-120"/>
               </a:rPr>
-              <a:t>02 / 17</a:t>
+              <a:t>02 / 18</a:t>
             </a:r>
             <a:endParaRPr lang="en-US" sz="650" dirty="0"/>
           </a:p>
@@ -19747,7 +20932,7 @@
                 <a:ea typeface="Everyday Sans Mono" pitchFamily="34" charset="-122"/>
                 <a:cs typeface="Everyday Sans Mono" pitchFamily="34" charset="-120"/>
               </a:rPr>
-              <a:t>03 / 17</a:t>
+              <a:t>03 / 18</a:t>
             </a:r>
             <a:endParaRPr lang="en-US" sz="650" dirty="0"/>
           </a:p>
@@ -20875,7 +22060,7 @@
                 <a:ea typeface="Everyday Sans Mono" pitchFamily="34" charset="-122"/>
                 <a:cs typeface="Everyday Sans Mono" pitchFamily="34" charset="-120"/>
               </a:rPr>
-              <a:t>04 / 17</a:t>
+              <a:t>04 / 18</a:t>
             </a:r>
             <a:endParaRPr lang="en-US" sz="650" dirty="0"/>
           </a:p>
@@ -22285,7 +23470,7 @@
                 <a:ea typeface="Everyday Sans Mono" pitchFamily="34" charset="-122"/>
                 <a:cs typeface="Everyday Sans Mono" pitchFamily="34" charset="-120"/>
               </a:rPr>
-              <a:t>05 / 17</a:t>
+              <a:t>05 / 18</a:t>
             </a:r>
             <a:endParaRPr lang="en-US" sz="650" dirty="0"/>
           </a:p>
@@ -23676,7 +24861,7 @@
                 <a:ea typeface="Everyday Sans Mono" pitchFamily="34" charset="-122"/>
                 <a:cs typeface="Everyday Sans Mono" pitchFamily="34" charset="-120"/>
               </a:rPr>
-              <a:t>06 / 17</a:t>
+              <a:t>06 / 18</a:t>
             </a:r>
             <a:endParaRPr lang="en-US" sz="650" dirty="0"/>
           </a:p>
@@ -24908,7 +26093,7 @@
                 <a:ea typeface="Everyday Sans Mono" pitchFamily="34" charset="-122"/>
                 <a:cs typeface="Everyday Sans Mono" pitchFamily="34" charset="-120"/>
               </a:rPr>
-              <a:t>07 / 17</a:t>
+              <a:t>07 / 18</a:t>
             </a:r>
             <a:endParaRPr lang="en-US" sz="650" dirty="0"/>
           </a:p>
@@ -24977,7 +26162,7 @@
         <p:spPr>
           <a:xfrm>
             <a:off x="2108200" y="3024088"/>
-            <a:ext cx="1324471" cy="0"/>
+            <a:ext cx="1553666" cy="0"/>
           </a:xfrm>
           <a:prstGeom prst="line">
             <a:avLst/>
@@ -24999,8 +26184,8 @@
         </p:nvSpPr>
         <p:spPr>
           <a:xfrm>
-            <a:off x="3483471" y="3024088"/>
-            <a:ext cx="1324471" cy="0"/>
+            <a:off x="3712666" y="3024088"/>
+            <a:ext cx="1553666" cy="0"/>
           </a:xfrm>
           <a:prstGeom prst="line">
             <a:avLst/>
@@ -25022,8 +26207,8 @@
         </p:nvSpPr>
         <p:spPr>
           <a:xfrm>
-            <a:off x="4858742" y="3024088"/>
-            <a:ext cx="1324471" cy="0"/>
+            <a:off x="5317133" y="3024088"/>
+            <a:ext cx="1553666" cy="0"/>
           </a:xfrm>
           <a:prstGeom prst="line">
             <a:avLst/>
@@ -25045,8 +26230,8 @@
         </p:nvSpPr>
         <p:spPr>
           <a:xfrm>
-            <a:off x="6234013" y="3024088"/>
-            <a:ext cx="1324471" cy="0"/>
+            <a:off x="6921599" y="3024088"/>
+            <a:ext cx="1553666" cy="0"/>
           </a:xfrm>
           <a:prstGeom prst="line">
             <a:avLst/>
@@ -25068,8 +26253,8 @@
         </p:nvSpPr>
         <p:spPr>
           <a:xfrm>
-            <a:off x="7609284" y="3024088"/>
-            <a:ext cx="1324471" cy="0"/>
+            <a:off x="8526066" y="3024088"/>
+            <a:ext cx="1553666" cy="0"/>
           </a:xfrm>
           <a:prstGeom prst="line">
             <a:avLst/>
@@ -25091,8 +26276,8 @@
         </p:nvSpPr>
         <p:spPr>
           <a:xfrm>
-            <a:off x="8984555" y="3024088"/>
-            <a:ext cx="1324471" cy="0"/>
+            <a:off x="10130532" y="3024088"/>
+            <a:ext cx="1553666" cy="0"/>
           </a:xfrm>
           <a:prstGeom prst="line">
             <a:avLst/>
@@ -25114,29 +26299,6 @@
         </p:nvSpPr>
         <p:spPr>
           <a:xfrm>
-            <a:off x="10359827" y="3024088"/>
-            <a:ext cx="1324471" cy="0"/>
-          </a:xfrm>
-          <a:prstGeom prst="line">
-            <a:avLst/>
-          </a:prstGeom>
-          <a:noFill/>
-          <a:ln w="6350">
-            <a:solidFill>
-              <a:srgbClr val="0053E2"/>
-            </a:solidFill>
-            <a:prstDash val="solid"/>
-          </a:ln>
-        </p:spPr>
-      </p:sp>
-      <p:sp>
-        <p:nvSpPr>
-          <p:cNvPr id="10" name="Shape 8"/>
-          <p:cNvSpPr/>
-          <p:nvPr/>
-        </p:nvSpPr>
-        <p:spPr>
-          <a:xfrm>
             <a:off x="2108200" y="3440013"/>
             <a:ext cx="9575800" cy="482600"/>
           </a:xfrm>
@@ -25153,7 +26315,7 @@
       </p:sp>
       <p:sp>
         <p:nvSpPr>
-          <p:cNvPr id="11" name="Shape 9"/>
+          <p:cNvPr id="10" name="Shape 8"/>
           <p:cNvSpPr/>
           <p:nvPr/>
         </p:nvSpPr>
@@ -25176,7 +26338,7 @@
       </p:sp>
       <p:sp>
         <p:nvSpPr>
-          <p:cNvPr id="12" name="Shape 10"/>
+          <p:cNvPr id="11" name="Shape 9"/>
           <p:cNvSpPr/>
           <p:nvPr/>
         </p:nvSpPr>
@@ -25203,7 +26365,7 @@
       </p:sp>
       <p:sp>
         <p:nvSpPr>
-          <p:cNvPr id="13" name="Shape 11"/>
+          <p:cNvPr id="12" name="Shape 10"/>
           <p:cNvSpPr/>
           <p:nvPr/>
         </p:nvSpPr>
@@ -25230,7 +26392,7 @@
       </p:sp>
       <p:sp>
         <p:nvSpPr>
-          <p:cNvPr id="14" name="Shape 12"/>
+          <p:cNvPr id="13" name="Shape 11"/>
           <p:cNvSpPr/>
           <p:nvPr/>
         </p:nvSpPr>
@@ -25257,7 +26419,7 @@
       </p:sp>
       <p:sp>
         <p:nvSpPr>
-          <p:cNvPr id="15" name="Shape 13"/>
+          <p:cNvPr id="14" name="Shape 12"/>
           <p:cNvSpPr/>
           <p:nvPr/>
         </p:nvSpPr>
@@ -25284,7 +26446,7 @@
       </p:sp>
       <p:sp>
         <p:nvSpPr>
-          <p:cNvPr id="16" name="Shape 14"/>
+          <p:cNvPr id="15" name="Shape 13"/>
           <p:cNvSpPr/>
           <p:nvPr/>
         </p:nvSpPr>
@@ -25311,7 +26473,7 @@
       </p:sp>
       <p:sp>
         <p:nvSpPr>
-          <p:cNvPr id="17" name="Shape 15"/>
+          <p:cNvPr id="16" name="Shape 14"/>
           <p:cNvSpPr/>
           <p:nvPr/>
         </p:nvSpPr>
@@ -25338,7 +26500,7 @@
       </p:sp>
       <p:sp>
         <p:nvSpPr>
-          <p:cNvPr id="18" name="Shape 16"/>
+          <p:cNvPr id="17" name="Shape 15"/>
           <p:cNvSpPr/>
           <p:nvPr/>
         </p:nvSpPr>
@@ -25365,7 +26527,7 @@
       </p:sp>
       <p:sp>
         <p:nvSpPr>
-          <p:cNvPr id="19" name="Shape 17"/>
+          <p:cNvPr id="18" name="Shape 16"/>
           <p:cNvSpPr/>
           <p:nvPr/>
         </p:nvSpPr>
@@ -25392,7 +26554,7 @@
       </p:sp>
       <p:sp>
         <p:nvSpPr>
-          <p:cNvPr id="20" name="Shape 18"/>
+          <p:cNvPr id="19" name="Shape 17"/>
           <p:cNvSpPr/>
           <p:nvPr/>
         </p:nvSpPr>
@@ -25415,7 +26577,7 @@
       </p:sp>
       <p:sp>
         <p:nvSpPr>
-          <p:cNvPr id="21" name="Shape 19"/>
+          <p:cNvPr id="20" name="Shape 18"/>
           <p:cNvSpPr/>
           <p:nvPr/>
         </p:nvSpPr>
@@ -25438,7 +26600,7 @@
       </p:sp>
       <p:sp>
         <p:nvSpPr>
-          <p:cNvPr id="22" name="Shape 20"/>
+          <p:cNvPr id="21" name="Shape 19"/>
           <p:cNvSpPr/>
           <p:nvPr/>
         </p:nvSpPr>
@@ -25461,7 +26623,7 @@
       </p:sp>
       <p:sp>
         <p:nvSpPr>
-          <p:cNvPr id="23" name="Shape 21"/>
+          <p:cNvPr id="22" name="Shape 20"/>
           <p:cNvSpPr/>
           <p:nvPr/>
         </p:nvSpPr>
@@ -25484,7 +26646,7 @@
       </p:sp>
       <p:sp>
         <p:nvSpPr>
-          <p:cNvPr id="24" name="Shape 22"/>
+          <p:cNvPr id="23" name="Shape 21"/>
           <p:cNvSpPr/>
           <p:nvPr/>
         </p:nvSpPr>
@@ -25507,7 +26669,7 @@
       </p:sp>
       <p:sp>
         <p:nvSpPr>
-          <p:cNvPr id="25" name="Text 23"/>
+          <p:cNvPr id="24" name="Text 22"/>
           <p:cNvSpPr txBox="1"/>
           <p:nvPr/>
         </p:nvSpPr>
@@ -25549,7 +26711,7 @@
       </p:sp>
       <p:sp>
         <p:nvSpPr>
-          <p:cNvPr id="26" name="Text 24"/>
+          <p:cNvPr id="25" name="Text 23"/>
           <p:cNvSpPr txBox="1"/>
           <p:nvPr/>
         </p:nvSpPr>
@@ -25625,7 +26787,7 @@
       </p:sp>
       <p:sp>
         <p:nvSpPr>
-          <p:cNvPr id="27" name="Text 25"/>
+          <p:cNvPr id="26" name="Text 24"/>
           <p:cNvSpPr txBox="1"/>
           <p:nvPr/>
         </p:nvSpPr>
@@ -25667,7 +26829,7 @@
       </p:sp>
       <p:sp>
         <p:nvSpPr>
-          <p:cNvPr id="28" name="Text 26"/>
+          <p:cNvPr id="27" name="Text 25"/>
           <p:cNvSpPr txBox="1"/>
           <p:nvPr/>
         </p:nvSpPr>
@@ -25709,14 +26871,14 @@
       </p:sp>
       <p:sp>
         <p:nvSpPr>
-          <p:cNvPr id="29" name="Text 27"/>
+          <p:cNvPr id="28" name="Text 26"/>
           <p:cNvSpPr txBox="1"/>
           <p:nvPr/>
         </p:nvSpPr>
         <p:spPr>
           <a:xfrm>
             <a:off x="2108200" y="3103463"/>
-            <a:ext cx="1476871" cy="209550"/>
+            <a:ext cx="1706066" cy="209550"/>
           </a:xfrm>
           <a:prstGeom prst="rect">
             <a:avLst/>
@@ -25751,14 +26913,14 @@
       </p:sp>
       <p:sp>
         <p:nvSpPr>
-          <p:cNvPr id="30" name="Text 28"/>
-          <p:cNvSpPr txBox="1"/>
-          <p:nvPr/>
-        </p:nvSpPr>
-        <p:spPr>
-          <a:xfrm>
-            <a:off x="3483471" y="3103463"/>
-            <a:ext cx="1476871" cy="209550"/>
+          <p:cNvPr id="29" name="Text 27"/>
+          <p:cNvSpPr txBox="1"/>
+          <p:nvPr/>
+        </p:nvSpPr>
+        <p:spPr>
+          <a:xfrm>
+            <a:off x="3712666" y="3103463"/>
+            <a:ext cx="1706066" cy="209550"/>
           </a:xfrm>
           <a:prstGeom prst="rect">
             <a:avLst/>
@@ -25793,14 +26955,14 @@
       </p:sp>
       <p:sp>
         <p:nvSpPr>
-          <p:cNvPr id="31" name="Text 29"/>
-          <p:cNvSpPr txBox="1"/>
-          <p:nvPr/>
-        </p:nvSpPr>
-        <p:spPr>
-          <a:xfrm>
-            <a:off x="4858742" y="3103463"/>
-            <a:ext cx="1476871" cy="209550"/>
+          <p:cNvPr id="30" name="Text 28"/>
+          <p:cNvSpPr txBox="1"/>
+          <p:nvPr/>
+        </p:nvSpPr>
+        <p:spPr>
+          <a:xfrm>
+            <a:off x="5317133" y="3103463"/>
+            <a:ext cx="1706066" cy="209550"/>
           </a:xfrm>
           <a:prstGeom prst="rect">
             <a:avLst/>
@@ -25827,7 +26989,7 @@
                 <a:ea typeface="Everyday Sans Headline Light" pitchFamily="34" charset="-122"/>
                 <a:cs typeface="Everyday Sans Headline Light" pitchFamily="34" charset="-120"/>
               </a:rPr>
-              <a:t>Target</a:t>
+              <a:t>Launch</a:t>
             </a:r>
             <a:endParaRPr lang="en-US" sz="1300" dirty="0"/>
           </a:p>
@@ -25835,14 +26997,14 @@
       </p:sp>
       <p:sp>
         <p:nvSpPr>
-          <p:cNvPr id="32" name="Text 30"/>
-          <p:cNvSpPr txBox="1"/>
-          <p:nvPr/>
-        </p:nvSpPr>
-        <p:spPr>
-          <a:xfrm>
-            <a:off x="6234013" y="3103463"/>
-            <a:ext cx="1476871" cy="209550"/>
+          <p:cNvPr id="31" name="Text 29"/>
+          <p:cNvSpPr txBox="1"/>
+          <p:nvPr/>
+        </p:nvSpPr>
+        <p:spPr>
+          <a:xfrm>
+            <a:off x="6921599" y="3103463"/>
+            <a:ext cx="1706066" cy="209550"/>
           </a:xfrm>
           <a:prstGeom prst="rect">
             <a:avLst/>
@@ -25869,7 +27031,7 @@
                 <a:ea typeface="Everyday Sans Headline Light" pitchFamily="34" charset="-122"/>
                 <a:cs typeface="Everyday Sans Headline Light" pitchFamily="34" charset="-120"/>
               </a:rPr>
-              <a:t>Launch</a:t>
+              <a:t>Understand</a:t>
             </a:r>
             <a:endParaRPr lang="en-US" sz="1300" dirty="0"/>
           </a:p>
@@ -25877,14 +27039,14 @@
       </p:sp>
       <p:sp>
         <p:nvSpPr>
-          <p:cNvPr id="33" name="Text 31"/>
-          <p:cNvSpPr txBox="1"/>
-          <p:nvPr/>
-        </p:nvSpPr>
-        <p:spPr>
-          <a:xfrm>
-            <a:off x="7609284" y="3103463"/>
-            <a:ext cx="1476871" cy="209550"/>
+          <p:cNvPr id="32" name="Text 30"/>
+          <p:cNvSpPr txBox="1"/>
+          <p:nvPr/>
+        </p:nvSpPr>
+        <p:spPr>
+          <a:xfrm>
+            <a:off x="8526066" y="3103463"/>
+            <a:ext cx="1706066" cy="209550"/>
           </a:xfrm>
           <a:prstGeom prst="rect">
             <a:avLst/>
@@ -25911,7 +27073,7 @@
                 <a:ea typeface="Everyday Sans Headline Light" pitchFamily="34" charset="-122"/>
                 <a:cs typeface="Everyday Sans Headline Light" pitchFamily="34" charset="-120"/>
               </a:rPr>
-              <a:t>Measure</a:t>
+              <a:t>Optimize</a:t>
             </a:r>
             <a:endParaRPr lang="en-US" sz="1300" dirty="0"/>
           </a:p>
@@ -25919,14 +27081,14 @@
       </p:sp>
       <p:sp>
         <p:nvSpPr>
-          <p:cNvPr id="34" name="Text 32"/>
-          <p:cNvSpPr txBox="1"/>
-          <p:nvPr/>
-        </p:nvSpPr>
-        <p:spPr>
-          <a:xfrm>
-            <a:off x="8984555" y="3103463"/>
-            <a:ext cx="1476871" cy="209550"/>
+          <p:cNvPr id="33" name="Text 31"/>
+          <p:cNvSpPr txBox="1"/>
+          <p:nvPr/>
+        </p:nvSpPr>
+        <p:spPr>
+          <a:xfrm>
+            <a:off x="10130532" y="3103463"/>
+            <a:ext cx="1706066" cy="209550"/>
           </a:xfrm>
           <a:prstGeom prst="rect">
             <a:avLst/>
@@ -25953,7 +27115,7 @@
                 <a:ea typeface="Everyday Sans Headline Light" pitchFamily="34" charset="-122"/>
                 <a:cs typeface="Everyday Sans Headline Light" pitchFamily="34" charset="-120"/>
               </a:rPr>
-              <a:t>Diagnose</a:t>
+              <a:t>Grow</a:t>
             </a:r>
             <a:endParaRPr lang="en-US" sz="1300" dirty="0"/>
           </a:p>
@@ -25961,33 +27123,683 @@
       </p:sp>
       <p:sp>
         <p:nvSpPr>
+          <p:cNvPr id="34" name="Text 32"/>
+          <p:cNvSpPr txBox="1"/>
+          <p:nvPr/>
+        </p:nvSpPr>
+        <p:spPr>
+          <a:xfrm>
+            <a:off x="508000" y="3528913"/>
+            <a:ext cx="1549400" cy="177800"/>
+          </a:xfrm>
+          <a:prstGeom prst="rect">
+            <a:avLst/>
+          </a:prstGeom>
+          <a:noFill/>
+          <a:ln/>
+        </p:spPr>
+        <p:txBody>
+          <a:bodyPr wrap="square" lIns="0" tIns="0" rIns="0" bIns="0" rtlCol="0" anchor="t"/>
+          <a:lstStyle/>
+          <a:p>
+            <a:pPr algn="l" indent="0" marL="0">
+              <a:lnSpc>
+                <a:spcPts val="660"/>
+              </a:lnSpc>
+              <a:buNone/>
+            </a:pPr>
+            <a:r>
+              <a:rPr lang="en-US" sz="550" spc="77" kern="0" dirty="0">
+                <a:solidFill>
+                  <a:srgbClr val="0053E2"/>
+                </a:solidFill>
+                <a:latin typeface="Everyday Sans Mono" pitchFamily="34" charset="0"/>
+                <a:ea typeface="Everyday Sans Mono" pitchFamily="34" charset="-122"/>
+                <a:cs typeface="Everyday Sans Mono" pitchFamily="34" charset="-120"/>
+              </a:rPr>
+              <a:t>SHARED EXPERIENCE</a:t>
+            </a:r>
+            <a:endParaRPr lang="en-US" sz="550" dirty="0"/>
+          </a:p>
+          <a:p>
+            <a:pPr algn="l" indent="0" marL="0">
+              <a:lnSpc>
+                <a:spcPts val="660"/>
+              </a:lnSpc>
+              <a:buNone/>
+            </a:pPr>
+            <a:r>
+              <a:rPr lang="en-US" sz="550" spc="77" kern="0" dirty="0">
+                <a:solidFill>
+                  <a:srgbClr val="0053E2"/>
+                </a:solidFill>
+                <a:latin typeface="Everyday Sans Mono" pitchFamily="34" charset="0"/>
+                <a:ea typeface="Everyday Sans Mono" pitchFamily="34" charset="-122"/>
+                <a:cs typeface="Everyday Sans Mono" pitchFamily="34" charset="-120"/>
+              </a:rPr>
+              <a:t>CAPABILITIES</a:t>
+            </a:r>
+            <a:endParaRPr lang="en-US" sz="550" dirty="0"/>
+          </a:p>
+        </p:txBody>
+      </p:sp>
+      <p:sp>
+        <p:nvSpPr>
           <p:cNvPr id="35" name="Text 33"/>
           <p:cNvSpPr txBox="1"/>
           <p:nvPr/>
         </p:nvSpPr>
         <p:spPr>
           <a:xfrm>
-            <a:off x="10359827" y="3103463"/>
-            <a:ext cx="1476871" cy="209550"/>
-          </a:xfrm>
-          <a:prstGeom prst="rect">
-            <a:avLst/>
-          </a:prstGeom>
-          <a:noFill/>
-          <a:ln/>
-        </p:spPr>
-        <p:txBody>
-          <a:bodyPr wrap="square" lIns="0" tIns="0" rIns="0" bIns="0" rtlCol="0" anchor="t"/>
-          <a:lstStyle/>
-          <a:p>
-            <a:pPr algn="l" indent="0" marL="0">
-              <a:lnSpc>
-                <a:spcPts val="1560"/>
-              </a:lnSpc>
-              <a:buNone/>
-            </a:pPr>
-            <a:r>
-              <a:rPr lang="en-US" sz="1300" spc="-26" kern="0" dirty="0">
+            <a:off x="2305050" y="3624163"/>
+            <a:ext cx="1161058" cy="127000"/>
+          </a:xfrm>
+          <a:prstGeom prst="rect">
+            <a:avLst/>
+          </a:prstGeom>
+          <a:noFill/>
+          <a:ln/>
+        </p:spPr>
+        <p:txBody>
+          <a:bodyPr wrap="square" lIns="0" tIns="0" rIns="0" bIns="0" rtlCol="0" anchor="t"/>
+          <a:lstStyle/>
+          <a:p>
+            <a:pPr algn="l" indent="0" marL="0">
+              <a:lnSpc>
+                <a:spcPts val="960"/>
+              </a:lnSpc>
+              <a:buNone/>
+            </a:pPr>
+            <a:r>
+              <a:rPr lang="en-US" sz="800" dirty="0">
+                <a:solidFill>
+                  <a:srgbClr val="0053E2"/>
+                </a:solidFill>
+                <a:latin typeface="Everyday Sans UI Medium" pitchFamily="34" charset="0"/>
+                <a:ea typeface="Everyday Sans UI Medium" pitchFamily="34" charset="-122"/>
+                <a:cs typeface="Everyday Sans UI Medium" pitchFamily="34" charset="-120"/>
+              </a:rPr>
+              <a:t>Campaign management</a:t>
+            </a:r>
+            <a:endParaRPr lang="en-US" sz="800" dirty="0"/>
+          </a:p>
+        </p:txBody>
+      </p:sp>
+      <p:sp>
+        <p:nvSpPr>
+          <p:cNvPr id="36" name="Text 34"/>
+          <p:cNvSpPr txBox="1"/>
+          <p:nvPr/>
+        </p:nvSpPr>
+        <p:spPr>
+          <a:xfrm>
+            <a:off x="3529608" y="3624163"/>
+            <a:ext cx="868759" cy="127000"/>
+          </a:xfrm>
+          <a:prstGeom prst="rect">
+            <a:avLst/>
+          </a:prstGeom>
+          <a:noFill/>
+          <a:ln/>
+        </p:spPr>
+        <p:txBody>
+          <a:bodyPr wrap="square" lIns="0" tIns="0" rIns="0" bIns="0" rtlCol="0" anchor="t"/>
+          <a:lstStyle/>
+          <a:p>
+            <a:pPr algn="l" indent="0" marL="0">
+              <a:lnSpc>
+                <a:spcPts val="960"/>
+              </a:lnSpc>
+              <a:buNone/>
+            </a:pPr>
+            <a:r>
+              <a:rPr lang="en-US" sz="800" dirty="0">
+                <a:solidFill>
+                  <a:srgbClr val="0053E2"/>
+                </a:solidFill>
+                <a:latin typeface="Everyday Sans UI Medium" pitchFamily="34" charset="0"/>
+                <a:ea typeface="Everyday Sans UI Medium" pitchFamily="34" charset="-122"/>
+                <a:cs typeface="Everyday Sans UI Medium" pitchFamily="34" charset="-120"/>
+              </a:rPr>
+              <a:t>Audience Library</a:t>
+            </a:r>
+            <a:endParaRPr lang="en-US" sz="800" dirty="0"/>
+          </a:p>
+        </p:txBody>
+      </p:sp>
+      <p:sp>
+        <p:nvSpPr>
+          <p:cNvPr id="37" name="Text 35"/>
+          <p:cNvSpPr txBox="1"/>
+          <p:nvPr/>
+        </p:nvSpPr>
+        <p:spPr>
+          <a:xfrm>
+            <a:off x="4461867" y="3624163"/>
+            <a:ext cx="1232694" cy="127000"/>
+          </a:xfrm>
+          <a:prstGeom prst="rect">
+            <a:avLst/>
+          </a:prstGeom>
+          <a:noFill/>
+          <a:ln/>
+        </p:spPr>
+        <p:txBody>
+          <a:bodyPr wrap="square" lIns="0" tIns="0" rIns="0" bIns="0" rtlCol="0" anchor="t"/>
+          <a:lstStyle/>
+          <a:p>
+            <a:pPr algn="l" indent="0" marL="0">
+              <a:lnSpc>
+                <a:spcPts val="960"/>
+              </a:lnSpc>
+              <a:buNone/>
+            </a:pPr>
+            <a:r>
+              <a:rPr lang="en-US" sz="800" dirty="0">
+                <a:solidFill>
+                  <a:srgbClr val="0053E2"/>
+                </a:solidFill>
+                <a:latin typeface="Everyday Sans UI Medium" pitchFamily="34" charset="0"/>
+                <a:ea typeface="Everyday Sans UI Medium" pitchFamily="34" charset="-122"/>
+                <a:cs typeface="Everyday Sans UI Medium" pitchFamily="34" charset="-120"/>
+              </a:rPr>
+              <a:t>Measurement + reporting</a:t>
+            </a:r>
+            <a:endParaRPr lang="en-US" sz="800" dirty="0"/>
+          </a:p>
+        </p:txBody>
+      </p:sp>
+      <p:sp>
+        <p:nvSpPr>
+          <p:cNvPr id="38" name="Text 36"/>
+          <p:cNvSpPr txBox="1"/>
+          <p:nvPr/>
+        </p:nvSpPr>
+        <p:spPr>
+          <a:xfrm>
+            <a:off x="5758061" y="3624163"/>
+            <a:ext cx="857250" cy="127000"/>
+          </a:xfrm>
+          <a:prstGeom prst="rect">
+            <a:avLst/>
+          </a:prstGeom>
+          <a:noFill/>
+          <a:ln/>
+        </p:spPr>
+        <p:txBody>
+          <a:bodyPr wrap="square" lIns="0" tIns="0" rIns="0" bIns="0" rtlCol="0" anchor="t"/>
+          <a:lstStyle/>
+          <a:p>
+            <a:pPr algn="l" indent="0" marL="0">
+              <a:lnSpc>
+                <a:spcPts val="960"/>
+              </a:lnSpc>
+              <a:buNone/>
+            </a:pPr>
+            <a:r>
+              <a:rPr lang="en-US" sz="800" dirty="0">
+                <a:solidFill>
+                  <a:srgbClr val="0053E2"/>
+                </a:solidFill>
+                <a:latin typeface="Everyday Sans UI Medium" pitchFamily="34" charset="0"/>
+                <a:ea typeface="Everyday Sans UI Medium" pitchFamily="34" charset="-122"/>
+                <a:cs typeface="Everyday Sans UI Medium" pitchFamily="34" charset="-120"/>
+              </a:rPr>
+              <a:t>Creative + assets</a:t>
+            </a:r>
+            <a:endParaRPr lang="en-US" sz="800" dirty="0"/>
+          </a:p>
+        </p:txBody>
+      </p:sp>
+      <p:sp>
+        <p:nvSpPr>
+          <p:cNvPr id="39" name="Text 37"/>
+          <p:cNvSpPr txBox="1"/>
+          <p:nvPr/>
+        </p:nvSpPr>
+        <p:spPr>
+          <a:xfrm>
+            <a:off x="6678811" y="3624163"/>
+            <a:ext cx="946249" cy="127000"/>
+          </a:xfrm>
+          <a:prstGeom prst="rect">
+            <a:avLst/>
+          </a:prstGeom>
+          <a:noFill/>
+          <a:ln/>
+        </p:spPr>
+        <p:txBody>
+          <a:bodyPr wrap="square" lIns="0" tIns="0" rIns="0" bIns="0" rtlCol="0" anchor="t"/>
+          <a:lstStyle/>
+          <a:p>
+            <a:pPr algn="l" indent="0" marL="0">
+              <a:lnSpc>
+                <a:spcPts val="960"/>
+              </a:lnSpc>
+              <a:buNone/>
+            </a:pPr>
+            <a:r>
+              <a:rPr lang="en-US" sz="800" dirty="0">
+                <a:solidFill>
+                  <a:srgbClr val="0053E2"/>
+                </a:solidFill>
+                <a:latin typeface="Everyday Sans UI Medium" pitchFamily="34" charset="0"/>
+                <a:ea typeface="Everyday Sans UI Medium" pitchFamily="34" charset="-122"/>
+                <a:cs typeface="Everyday Sans UI Medium" pitchFamily="34" charset="-120"/>
+              </a:rPr>
+              <a:t>Recommendations</a:t>
+            </a:r>
+            <a:endParaRPr lang="en-US" sz="800" dirty="0"/>
+          </a:p>
+        </p:txBody>
+      </p:sp>
+      <p:sp>
+        <p:nvSpPr>
+          <p:cNvPr id="40" name="Text 38"/>
+          <p:cNvSpPr txBox="1"/>
+          <p:nvPr/>
+        </p:nvSpPr>
+        <p:spPr>
+          <a:xfrm>
+            <a:off x="7688560" y="3624163"/>
+            <a:ext cx="861616" cy="127000"/>
+          </a:xfrm>
+          <a:prstGeom prst="rect">
+            <a:avLst/>
+          </a:prstGeom>
+          <a:noFill/>
+          <a:ln/>
+        </p:spPr>
+        <p:txBody>
+          <a:bodyPr wrap="square" lIns="0" tIns="0" rIns="0" bIns="0" rtlCol="0" anchor="t"/>
+          <a:lstStyle/>
+          <a:p>
+            <a:pPr algn="l" indent="0" marL="0">
+              <a:lnSpc>
+                <a:spcPts val="960"/>
+              </a:lnSpc>
+              <a:buNone/>
+            </a:pPr>
+            <a:r>
+              <a:rPr lang="en-US" sz="800" dirty="0">
+                <a:solidFill>
+                  <a:srgbClr val="0053E2"/>
+                </a:solidFill>
+                <a:latin typeface="Everyday Sans UI Medium" pitchFamily="34" charset="0"/>
+                <a:ea typeface="Everyday Sans UI Medium" pitchFamily="34" charset="-122"/>
+                <a:cs typeface="Everyday Sans UI Medium" pitchFamily="34" charset="-120"/>
+              </a:rPr>
+              <a:t>Experimentation</a:t>
+            </a:r>
+            <a:endParaRPr lang="en-US" sz="800" dirty="0"/>
+          </a:p>
+        </p:txBody>
+      </p:sp>
+      <p:sp>
+        <p:nvSpPr>
+          <p:cNvPr id="41" name="Text 39"/>
+          <p:cNvSpPr txBox="1"/>
+          <p:nvPr/>
+        </p:nvSpPr>
+        <p:spPr>
+          <a:xfrm>
+            <a:off x="8613676" y="3624163"/>
+            <a:ext cx="652959" cy="127000"/>
+          </a:xfrm>
+          <a:prstGeom prst="rect">
+            <a:avLst/>
+          </a:prstGeom>
+          <a:noFill/>
+          <a:ln/>
+        </p:spPr>
+        <p:txBody>
+          <a:bodyPr wrap="square" lIns="0" tIns="0" rIns="0" bIns="0" rtlCol="0" anchor="t"/>
+          <a:lstStyle/>
+          <a:p>
+            <a:pPr algn="l" indent="0" marL="0">
+              <a:lnSpc>
+                <a:spcPts val="960"/>
+              </a:lnSpc>
+              <a:buNone/>
+            </a:pPr>
+            <a:r>
+              <a:rPr lang="en-US" sz="800" dirty="0">
+                <a:solidFill>
+                  <a:srgbClr val="0053E2"/>
+                </a:solidFill>
+                <a:latin typeface="Everyday Sans UI Medium" pitchFamily="34" charset="0"/>
+                <a:ea typeface="Everyday Sans UI Medium" pitchFamily="34" charset="-122"/>
+                <a:cs typeface="Everyday Sans UI Medium" pitchFamily="34" charset="-120"/>
+              </a:rPr>
+              <a:t>Forecasting</a:t>
+            </a:r>
+            <a:endParaRPr lang="en-US" sz="800" dirty="0"/>
+          </a:p>
+        </p:txBody>
+      </p:sp>
+      <p:sp>
+        <p:nvSpPr>
+          <p:cNvPr id="42" name="Text 40"/>
+          <p:cNvSpPr txBox="1"/>
+          <p:nvPr/>
+        </p:nvSpPr>
+        <p:spPr>
+          <a:xfrm>
+            <a:off x="9330134" y="3624163"/>
+            <a:ext cx="693241" cy="127000"/>
+          </a:xfrm>
+          <a:prstGeom prst="rect">
+            <a:avLst/>
+          </a:prstGeom>
+          <a:noFill/>
+          <a:ln/>
+        </p:spPr>
+        <p:txBody>
+          <a:bodyPr wrap="square" lIns="0" tIns="0" rIns="0" bIns="0" rtlCol="0" anchor="t"/>
+          <a:lstStyle/>
+          <a:p>
+            <a:pPr algn="l" indent="0" marL="0">
+              <a:lnSpc>
+                <a:spcPts val="960"/>
+              </a:lnSpc>
+              <a:buNone/>
+            </a:pPr>
+            <a:r>
+              <a:rPr lang="en-US" sz="800" dirty="0">
+                <a:solidFill>
+                  <a:srgbClr val="0053E2"/>
+                </a:solidFill>
+                <a:latin typeface="Everyday Sans UI Medium" pitchFamily="34" charset="0"/>
+                <a:ea typeface="Everyday Sans UI Medium" pitchFamily="34" charset="-122"/>
+                <a:cs typeface="Everyday Sans UI Medium" pitchFamily="34" charset="-120"/>
+              </a:rPr>
+              <a:t>Notifications</a:t>
+            </a:r>
+            <a:endParaRPr lang="en-US" sz="800" dirty="0"/>
+          </a:p>
+        </p:txBody>
+      </p:sp>
+      <p:sp>
+        <p:nvSpPr>
+          <p:cNvPr id="43" name="Text 41"/>
+          <p:cNvSpPr txBox="1"/>
+          <p:nvPr/>
+        </p:nvSpPr>
+        <p:spPr>
+          <a:xfrm>
+            <a:off x="508000" y="4138513"/>
+            <a:ext cx="1549400" cy="88900"/>
+          </a:xfrm>
+          <a:prstGeom prst="rect">
+            <a:avLst/>
+          </a:prstGeom>
+          <a:noFill/>
+          <a:ln/>
+        </p:spPr>
+        <p:txBody>
+          <a:bodyPr wrap="square" lIns="0" tIns="0" rIns="0" bIns="0" rtlCol="0" anchor="t"/>
+          <a:lstStyle/>
+          <a:p>
+            <a:pPr algn="l" indent="0" marL="0">
+              <a:lnSpc>
+                <a:spcPts val="660"/>
+              </a:lnSpc>
+              <a:buNone/>
+            </a:pPr>
+            <a:r>
+              <a:rPr lang="en-US" sz="550" spc="77" kern="0" dirty="0">
+                <a:solidFill>
+                  <a:srgbClr val="0053E2"/>
+                </a:solidFill>
+                <a:latin typeface="Everyday Sans Mono" pitchFamily="34" charset="0"/>
+                <a:ea typeface="Everyday Sans Mono" pitchFamily="34" charset="-122"/>
+                <a:cs typeface="Everyday Sans Mono" pitchFamily="34" charset="-120"/>
+              </a:rPr>
+              <a:t>ADVERTISING EXPERIENCES</a:t>
+            </a:r>
+            <a:endParaRPr lang="en-US" sz="550" dirty="0"/>
+          </a:p>
+        </p:txBody>
+      </p:sp>
+      <p:sp>
+        <p:nvSpPr>
+          <p:cNvPr id="44" name="Text 42"/>
+          <p:cNvSpPr txBox="1"/>
+          <p:nvPr/>
+        </p:nvSpPr>
+        <p:spPr>
+          <a:xfrm>
+            <a:off x="2108200" y="4132163"/>
+            <a:ext cx="2544318" cy="133350"/>
+          </a:xfrm>
+          <a:prstGeom prst="rect">
+            <a:avLst/>
+          </a:prstGeom>
+          <a:noFill/>
+          <a:ln/>
+        </p:spPr>
+        <p:txBody>
+          <a:bodyPr wrap="square" lIns="0" tIns="0" rIns="0" bIns="0" rtlCol="0" anchor="t"/>
+          <a:lstStyle/>
+          <a:p>
+            <a:pPr algn="l" indent="0" marL="0">
+              <a:lnSpc>
+                <a:spcPts val="1020"/>
+              </a:lnSpc>
+              <a:buNone/>
+            </a:pPr>
+            <a:r>
+              <a:rPr lang="en-US" sz="850" dirty="0">
+                <a:solidFill>
+                  <a:srgbClr val="001E60"/>
+                </a:solidFill>
+                <a:latin typeface="Everyday Sans UI Medium" pitchFamily="34" charset="0"/>
+                <a:ea typeface="Everyday Sans UI Medium" pitchFamily="34" charset="-122"/>
+                <a:cs typeface="Everyday Sans UI Medium" pitchFamily="34" charset="-120"/>
+              </a:rPr>
+              <a:t>Sponsored</a:t>
+            </a:r>
+            <a:endParaRPr lang="en-US" sz="850" dirty="0"/>
+          </a:p>
+        </p:txBody>
+      </p:sp>
+      <p:sp>
+        <p:nvSpPr>
+          <p:cNvPr id="45" name="Text 43"/>
+          <p:cNvSpPr txBox="1"/>
+          <p:nvPr/>
+        </p:nvSpPr>
+        <p:spPr>
+          <a:xfrm>
+            <a:off x="4514850" y="4132163"/>
+            <a:ext cx="2544318" cy="133350"/>
+          </a:xfrm>
+          <a:prstGeom prst="rect">
+            <a:avLst/>
+          </a:prstGeom>
+          <a:noFill/>
+          <a:ln/>
+        </p:spPr>
+        <p:txBody>
+          <a:bodyPr wrap="square" lIns="0" tIns="0" rIns="0" bIns="0" rtlCol="0" anchor="t"/>
+          <a:lstStyle/>
+          <a:p>
+            <a:pPr algn="l" indent="0" marL="0">
+              <a:lnSpc>
+                <a:spcPts val="1020"/>
+              </a:lnSpc>
+              <a:buNone/>
+            </a:pPr>
+            <a:r>
+              <a:rPr lang="en-US" sz="850" dirty="0">
+                <a:solidFill>
+                  <a:srgbClr val="001E60"/>
+                </a:solidFill>
+                <a:latin typeface="Everyday Sans UI Medium" pitchFamily="34" charset="0"/>
+                <a:ea typeface="Everyday Sans UI Medium" pitchFamily="34" charset="-122"/>
+                <a:cs typeface="Everyday Sans UI Medium" pitchFamily="34" charset="-120"/>
+              </a:rPr>
+              <a:t>Display</a:t>
+            </a:r>
+            <a:endParaRPr lang="en-US" sz="850" dirty="0"/>
+          </a:p>
+        </p:txBody>
+      </p:sp>
+      <p:sp>
+        <p:nvSpPr>
+          <p:cNvPr id="46" name="Text 44"/>
+          <p:cNvSpPr txBox="1"/>
+          <p:nvPr/>
+        </p:nvSpPr>
+        <p:spPr>
+          <a:xfrm>
+            <a:off x="6921500" y="4132163"/>
+            <a:ext cx="2544318" cy="133350"/>
+          </a:xfrm>
+          <a:prstGeom prst="rect">
+            <a:avLst/>
+          </a:prstGeom>
+          <a:noFill/>
+          <a:ln/>
+        </p:spPr>
+        <p:txBody>
+          <a:bodyPr wrap="square" lIns="0" tIns="0" rIns="0" bIns="0" rtlCol="0" anchor="t"/>
+          <a:lstStyle/>
+          <a:p>
+            <a:pPr algn="l" indent="0" marL="0">
+              <a:lnSpc>
+                <a:spcPts val="1020"/>
+              </a:lnSpc>
+              <a:buNone/>
+            </a:pPr>
+            <a:r>
+              <a:rPr lang="en-US" sz="850" dirty="0">
+                <a:solidFill>
+                  <a:srgbClr val="001E60"/>
+                </a:solidFill>
+                <a:latin typeface="Everyday Sans UI Medium" pitchFamily="34" charset="0"/>
+                <a:ea typeface="Everyday Sans UI Medium" pitchFamily="34" charset="-122"/>
+                <a:cs typeface="Everyday Sans UI Medium" pitchFamily="34" charset="-120"/>
+              </a:rPr>
+              <a:t>Offsite</a:t>
+            </a:r>
+            <a:endParaRPr lang="en-US" sz="850" dirty="0"/>
+          </a:p>
+        </p:txBody>
+      </p:sp>
+      <p:sp>
+        <p:nvSpPr>
+          <p:cNvPr id="47" name="Text 45"/>
+          <p:cNvSpPr txBox="1"/>
+          <p:nvPr/>
+        </p:nvSpPr>
+        <p:spPr>
+          <a:xfrm>
+            <a:off x="9328150" y="4132163"/>
+            <a:ext cx="2544318" cy="133350"/>
+          </a:xfrm>
+          <a:prstGeom prst="rect">
+            <a:avLst/>
+          </a:prstGeom>
+          <a:noFill/>
+          <a:ln/>
+        </p:spPr>
+        <p:txBody>
+          <a:bodyPr wrap="square" lIns="0" tIns="0" rIns="0" bIns="0" rtlCol="0" anchor="t"/>
+          <a:lstStyle/>
+          <a:p>
+            <a:pPr algn="l" indent="0" marL="0">
+              <a:lnSpc>
+                <a:spcPts val="1020"/>
+              </a:lnSpc>
+              <a:buNone/>
+            </a:pPr>
+            <a:r>
+              <a:rPr lang="en-US" sz="850" dirty="0">
+                <a:solidFill>
+                  <a:srgbClr val="001E60"/>
+                </a:solidFill>
+                <a:latin typeface="Everyday Sans UI Medium" pitchFamily="34" charset="0"/>
+                <a:ea typeface="Everyday Sans UI Medium" pitchFamily="34" charset="-122"/>
+                <a:cs typeface="Everyday Sans UI Medium" pitchFamily="34" charset="-120"/>
+              </a:rPr>
+              <a:t>Marketplace</a:t>
+            </a:r>
+            <a:endParaRPr lang="en-US" sz="850" dirty="0"/>
+          </a:p>
+        </p:txBody>
+      </p:sp>
+      <p:sp>
+        <p:nvSpPr>
+          <p:cNvPr id="48" name="Text 46"/>
+          <p:cNvSpPr txBox="1"/>
+          <p:nvPr/>
+        </p:nvSpPr>
+        <p:spPr>
+          <a:xfrm>
+            <a:off x="508000" y="4716363"/>
+            <a:ext cx="1549400" cy="87313"/>
+          </a:xfrm>
+          <a:prstGeom prst="rect">
+            <a:avLst/>
+          </a:prstGeom>
+          <a:noFill/>
+          <a:ln/>
+        </p:spPr>
+        <p:txBody>
+          <a:bodyPr wrap="square" lIns="0" tIns="0" rIns="0" bIns="0" rtlCol="0" anchor="t"/>
+          <a:lstStyle/>
+          <a:p>
+            <a:pPr algn="l" indent="0" marL="0">
+              <a:lnSpc>
+                <a:spcPts val="688"/>
+              </a:lnSpc>
+              <a:buNone/>
+            </a:pPr>
+            <a:r>
+              <a:rPr lang="en-US" sz="550" spc="77" kern="0" dirty="0">
+                <a:solidFill>
+                  <a:srgbClr val="0053E2"/>
+                </a:solidFill>
+                <a:latin typeface="Everyday Sans Mono" pitchFamily="34" charset="0"/>
+                <a:ea typeface="Everyday Sans Mono" pitchFamily="34" charset="-122"/>
+                <a:cs typeface="Everyday Sans Mono" pitchFamily="34" charset="-120"/>
+              </a:rPr>
+              <a:t>THE PRINCIPLE</a:t>
+            </a:r>
+            <a:endParaRPr lang="en-US" sz="550" dirty="0"/>
+          </a:p>
+        </p:txBody>
+      </p:sp>
+      <p:sp>
+        <p:nvSpPr>
+          <p:cNvPr id="49" name="Text 47"/>
+          <p:cNvSpPr txBox="1"/>
+          <p:nvPr/>
+        </p:nvSpPr>
+        <p:spPr>
+          <a:xfrm>
+            <a:off x="2108200" y="4602063"/>
+            <a:ext cx="10341864" cy="444500"/>
+          </a:xfrm>
+          <a:prstGeom prst="rect">
+            <a:avLst/>
+          </a:prstGeom>
+          <a:noFill/>
+          <a:ln/>
+        </p:spPr>
+        <p:txBody>
+          <a:bodyPr wrap="square" lIns="0" tIns="0" rIns="0" bIns="0" rtlCol="0" anchor="t"/>
+          <a:lstStyle/>
+          <a:p>
+            <a:pPr algn="l" indent="0" marL="0">
+              <a:lnSpc>
+                <a:spcPts val="1750"/>
+              </a:lnSpc>
+              <a:buNone/>
+            </a:pPr>
+            <a:r>
+              <a:rPr lang="en-US" sz="1400" spc="-28" kern="0" dirty="0">
                 <a:solidFill>
                   <a:srgbClr val="001E60"/>
                 </a:solidFill>
@@ -25995,682 +27807,10 @@
                 <a:ea typeface="Everyday Sans Headline Light" pitchFamily="34" charset="-122"/>
                 <a:cs typeface="Everyday Sans Headline Light" pitchFamily="34" charset="-120"/>
               </a:rPr>
-              <a:t>Optimize</a:t>
-            </a:r>
-            <a:endParaRPr lang="en-US" sz="1300" dirty="0"/>
-          </a:p>
-        </p:txBody>
-      </p:sp>
-      <p:sp>
-        <p:nvSpPr>
-          <p:cNvPr id="36" name="Text 34"/>
-          <p:cNvSpPr txBox="1"/>
-          <p:nvPr/>
-        </p:nvSpPr>
-        <p:spPr>
-          <a:xfrm>
-            <a:off x="508000" y="3528913"/>
-            <a:ext cx="1549400" cy="177800"/>
-          </a:xfrm>
-          <a:prstGeom prst="rect">
-            <a:avLst/>
-          </a:prstGeom>
-          <a:noFill/>
-          <a:ln/>
-        </p:spPr>
-        <p:txBody>
-          <a:bodyPr wrap="square" lIns="0" tIns="0" rIns="0" bIns="0" rtlCol="0" anchor="t"/>
-          <a:lstStyle/>
-          <a:p>
-            <a:pPr algn="l" indent="0" marL="0">
-              <a:lnSpc>
-                <a:spcPts val="660"/>
-              </a:lnSpc>
-              <a:buNone/>
-            </a:pPr>
-            <a:r>
-              <a:rPr lang="en-US" sz="550" spc="77" kern="0" dirty="0">
-                <a:solidFill>
-                  <a:srgbClr val="0053E2"/>
-                </a:solidFill>
-                <a:latin typeface="Everyday Sans Mono" pitchFamily="34" charset="0"/>
-                <a:ea typeface="Everyday Sans Mono" pitchFamily="34" charset="-122"/>
-                <a:cs typeface="Everyday Sans Mono" pitchFamily="34" charset="-120"/>
-              </a:rPr>
-              <a:t>SHARED EXPERIENCE</a:t>
-            </a:r>
-            <a:endParaRPr lang="en-US" sz="550" dirty="0"/>
-          </a:p>
-          <a:p>
-            <a:pPr algn="l" indent="0" marL="0">
-              <a:lnSpc>
-                <a:spcPts val="660"/>
-              </a:lnSpc>
-              <a:buNone/>
-            </a:pPr>
-            <a:r>
-              <a:rPr lang="en-US" sz="550" spc="77" kern="0" dirty="0">
-                <a:solidFill>
-                  <a:srgbClr val="0053E2"/>
-                </a:solidFill>
-                <a:latin typeface="Everyday Sans Mono" pitchFamily="34" charset="0"/>
-                <a:ea typeface="Everyday Sans Mono" pitchFamily="34" charset="-122"/>
-                <a:cs typeface="Everyday Sans Mono" pitchFamily="34" charset="-120"/>
-              </a:rPr>
-              <a:t>CAPABILITIES</a:t>
-            </a:r>
-            <a:endParaRPr lang="en-US" sz="550" dirty="0"/>
-          </a:p>
-        </p:txBody>
-      </p:sp>
-      <p:sp>
-        <p:nvSpPr>
-          <p:cNvPr id="37" name="Text 35"/>
-          <p:cNvSpPr txBox="1"/>
-          <p:nvPr/>
-        </p:nvSpPr>
-        <p:spPr>
-          <a:xfrm>
-            <a:off x="2305050" y="3624163"/>
-            <a:ext cx="1161058" cy="127000"/>
-          </a:xfrm>
-          <a:prstGeom prst="rect">
-            <a:avLst/>
-          </a:prstGeom>
-          <a:noFill/>
-          <a:ln/>
-        </p:spPr>
-        <p:txBody>
-          <a:bodyPr wrap="square" lIns="0" tIns="0" rIns="0" bIns="0" rtlCol="0" anchor="t"/>
-          <a:lstStyle/>
-          <a:p>
-            <a:pPr algn="l" indent="0" marL="0">
-              <a:lnSpc>
-                <a:spcPts val="960"/>
-              </a:lnSpc>
-              <a:buNone/>
-            </a:pPr>
-            <a:r>
-              <a:rPr lang="en-US" sz="800" dirty="0">
-                <a:solidFill>
-                  <a:srgbClr val="0053E2"/>
-                </a:solidFill>
-                <a:latin typeface="Everyday Sans UI Medium" pitchFamily="34" charset="0"/>
-                <a:ea typeface="Everyday Sans UI Medium" pitchFamily="34" charset="-122"/>
-                <a:cs typeface="Everyday Sans UI Medium" pitchFamily="34" charset="-120"/>
-              </a:rPr>
-              <a:t>Campaign management</a:t>
-            </a:r>
-            <a:endParaRPr lang="en-US" sz="800" dirty="0"/>
-          </a:p>
-        </p:txBody>
-      </p:sp>
-      <p:sp>
-        <p:nvSpPr>
-          <p:cNvPr id="38" name="Text 36"/>
-          <p:cNvSpPr txBox="1"/>
-          <p:nvPr/>
-        </p:nvSpPr>
-        <p:spPr>
-          <a:xfrm>
-            <a:off x="3529608" y="3624163"/>
-            <a:ext cx="868759" cy="127000"/>
-          </a:xfrm>
-          <a:prstGeom prst="rect">
-            <a:avLst/>
-          </a:prstGeom>
-          <a:noFill/>
-          <a:ln/>
-        </p:spPr>
-        <p:txBody>
-          <a:bodyPr wrap="square" lIns="0" tIns="0" rIns="0" bIns="0" rtlCol="0" anchor="t"/>
-          <a:lstStyle/>
-          <a:p>
-            <a:pPr algn="l" indent="0" marL="0">
-              <a:lnSpc>
-                <a:spcPts val="960"/>
-              </a:lnSpc>
-              <a:buNone/>
-            </a:pPr>
-            <a:r>
-              <a:rPr lang="en-US" sz="800" dirty="0">
-                <a:solidFill>
-                  <a:srgbClr val="0053E2"/>
-                </a:solidFill>
-                <a:latin typeface="Everyday Sans UI Medium" pitchFamily="34" charset="0"/>
-                <a:ea typeface="Everyday Sans UI Medium" pitchFamily="34" charset="-122"/>
-                <a:cs typeface="Everyday Sans UI Medium" pitchFamily="34" charset="-120"/>
-              </a:rPr>
-              <a:t>Audience Library</a:t>
-            </a:r>
-            <a:endParaRPr lang="en-US" sz="800" dirty="0"/>
-          </a:p>
-        </p:txBody>
-      </p:sp>
-      <p:sp>
-        <p:nvSpPr>
-          <p:cNvPr id="39" name="Text 37"/>
-          <p:cNvSpPr txBox="1"/>
-          <p:nvPr/>
-        </p:nvSpPr>
-        <p:spPr>
-          <a:xfrm>
-            <a:off x="4461867" y="3624163"/>
-            <a:ext cx="1232694" cy="127000"/>
-          </a:xfrm>
-          <a:prstGeom prst="rect">
-            <a:avLst/>
-          </a:prstGeom>
-          <a:noFill/>
-          <a:ln/>
-        </p:spPr>
-        <p:txBody>
-          <a:bodyPr wrap="square" lIns="0" tIns="0" rIns="0" bIns="0" rtlCol="0" anchor="t"/>
-          <a:lstStyle/>
-          <a:p>
-            <a:pPr algn="l" indent="0" marL="0">
-              <a:lnSpc>
-                <a:spcPts val="960"/>
-              </a:lnSpc>
-              <a:buNone/>
-            </a:pPr>
-            <a:r>
-              <a:rPr lang="en-US" sz="800" dirty="0">
-                <a:solidFill>
-                  <a:srgbClr val="0053E2"/>
-                </a:solidFill>
-                <a:latin typeface="Everyday Sans UI Medium" pitchFamily="34" charset="0"/>
-                <a:ea typeface="Everyday Sans UI Medium" pitchFamily="34" charset="-122"/>
-                <a:cs typeface="Everyday Sans UI Medium" pitchFamily="34" charset="-120"/>
-              </a:rPr>
-              <a:t>Measurement + reporting</a:t>
-            </a:r>
-            <a:endParaRPr lang="en-US" sz="800" dirty="0"/>
-          </a:p>
-        </p:txBody>
-      </p:sp>
-      <p:sp>
-        <p:nvSpPr>
-          <p:cNvPr id="40" name="Text 38"/>
-          <p:cNvSpPr txBox="1"/>
-          <p:nvPr/>
-        </p:nvSpPr>
-        <p:spPr>
-          <a:xfrm>
-            <a:off x="5758061" y="3624163"/>
-            <a:ext cx="857250" cy="127000"/>
-          </a:xfrm>
-          <a:prstGeom prst="rect">
-            <a:avLst/>
-          </a:prstGeom>
-          <a:noFill/>
-          <a:ln/>
-        </p:spPr>
-        <p:txBody>
-          <a:bodyPr wrap="square" lIns="0" tIns="0" rIns="0" bIns="0" rtlCol="0" anchor="t"/>
-          <a:lstStyle/>
-          <a:p>
-            <a:pPr algn="l" indent="0" marL="0">
-              <a:lnSpc>
-                <a:spcPts val="960"/>
-              </a:lnSpc>
-              <a:buNone/>
-            </a:pPr>
-            <a:r>
-              <a:rPr lang="en-US" sz="800" dirty="0">
-                <a:solidFill>
-                  <a:srgbClr val="0053E2"/>
-                </a:solidFill>
-                <a:latin typeface="Everyday Sans UI Medium" pitchFamily="34" charset="0"/>
-                <a:ea typeface="Everyday Sans UI Medium" pitchFamily="34" charset="-122"/>
-                <a:cs typeface="Everyday Sans UI Medium" pitchFamily="34" charset="-120"/>
-              </a:rPr>
-              <a:t>Creative + assets</a:t>
-            </a:r>
-            <a:endParaRPr lang="en-US" sz="800" dirty="0"/>
-          </a:p>
-        </p:txBody>
-      </p:sp>
-      <p:sp>
-        <p:nvSpPr>
-          <p:cNvPr id="41" name="Text 39"/>
-          <p:cNvSpPr txBox="1"/>
-          <p:nvPr/>
-        </p:nvSpPr>
-        <p:spPr>
-          <a:xfrm>
-            <a:off x="6678811" y="3624163"/>
-            <a:ext cx="946249" cy="127000"/>
-          </a:xfrm>
-          <a:prstGeom prst="rect">
-            <a:avLst/>
-          </a:prstGeom>
-          <a:noFill/>
-          <a:ln/>
-        </p:spPr>
-        <p:txBody>
-          <a:bodyPr wrap="square" lIns="0" tIns="0" rIns="0" bIns="0" rtlCol="0" anchor="t"/>
-          <a:lstStyle/>
-          <a:p>
-            <a:pPr algn="l" indent="0" marL="0">
-              <a:lnSpc>
-                <a:spcPts val="960"/>
-              </a:lnSpc>
-              <a:buNone/>
-            </a:pPr>
-            <a:r>
-              <a:rPr lang="en-US" sz="800" dirty="0">
-                <a:solidFill>
-                  <a:srgbClr val="0053E2"/>
-                </a:solidFill>
-                <a:latin typeface="Everyday Sans UI Medium" pitchFamily="34" charset="0"/>
-                <a:ea typeface="Everyday Sans UI Medium" pitchFamily="34" charset="-122"/>
-                <a:cs typeface="Everyday Sans UI Medium" pitchFamily="34" charset="-120"/>
-              </a:rPr>
-              <a:t>Recommendations</a:t>
-            </a:r>
-            <a:endParaRPr lang="en-US" sz="800" dirty="0"/>
-          </a:p>
-        </p:txBody>
-      </p:sp>
-      <p:sp>
-        <p:nvSpPr>
-          <p:cNvPr id="42" name="Text 40"/>
-          <p:cNvSpPr txBox="1"/>
-          <p:nvPr/>
-        </p:nvSpPr>
-        <p:spPr>
-          <a:xfrm>
-            <a:off x="7688560" y="3624163"/>
-            <a:ext cx="861616" cy="127000"/>
-          </a:xfrm>
-          <a:prstGeom prst="rect">
-            <a:avLst/>
-          </a:prstGeom>
-          <a:noFill/>
-          <a:ln/>
-        </p:spPr>
-        <p:txBody>
-          <a:bodyPr wrap="square" lIns="0" tIns="0" rIns="0" bIns="0" rtlCol="0" anchor="t"/>
-          <a:lstStyle/>
-          <a:p>
-            <a:pPr algn="l" indent="0" marL="0">
-              <a:lnSpc>
-                <a:spcPts val="960"/>
-              </a:lnSpc>
-              <a:buNone/>
-            </a:pPr>
-            <a:r>
-              <a:rPr lang="en-US" sz="800" dirty="0">
-                <a:solidFill>
-                  <a:srgbClr val="0053E2"/>
-                </a:solidFill>
-                <a:latin typeface="Everyday Sans UI Medium" pitchFamily="34" charset="0"/>
-                <a:ea typeface="Everyday Sans UI Medium" pitchFamily="34" charset="-122"/>
-                <a:cs typeface="Everyday Sans UI Medium" pitchFamily="34" charset="-120"/>
-              </a:rPr>
-              <a:t>Experimentation</a:t>
-            </a:r>
-            <a:endParaRPr lang="en-US" sz="800" dirty="0"/>
-          </a:p>
-        </p:txBody>
-      </p:sp>
-      <p:sp>
-        <p:nvSpPr>
-          <p:cNvPr id="43" name="Text 41"/>
-          <p:cNvSpPr txBox="1"/>
-          <p:nvPr/>
-        </p:nvSpPr>
-        <p:spPr>
-          <a:xfrm>
-            <a:off x="8613676" y="3624163"/>
-            <a:ext cx="652959" cy="127000"/>
-          </a:xfrm>
-          <a:prstGeom prst="rect">
-            <a:avLst/>
-          </a:prstGeom>
-          <a:noFill/>
-          <a:ln/>
-        </p:spPr>
-        <p:txBody>
-          <a:bodyPr wrap="square" lIns="0" tIns="0" rIns="0" bIns="0" rtlCol="0" anchor="t"/>
-          <a:lstStyle/>
-          <a:p>
-            <a:pPr algn="l" indent="0" marL="0">
-              <a:lnSpc>
-                <a:spcPts val="960"/>
-              </a:lnSpc>
-              <a:buNone/>
-            </a:pPr>
-            <a:r>
-              <a:rPr lang="en-US" sz="800" dirty="0">
-                <a:solidFill>
-                  <a:srgbClr val="0053E2"/>
-                </a:solidFill>
-                <a:latin typeface="Everyday Sans UI Medium" pitchFamily="34" charset="0"/>
-                <a:ea typeface="Everyday Sans UI Medium" pitchFamily="34" charset="-122"/>
-                <a:cs typeface="Everyday Sans UI Medium" pitchFamily="34" charset="-120"/>
-              </a:rPr>
-              <a:t>Forecasting</a:t>
-            </a:r>
-            <a:endParaRPr lang="en-US" sz="800" dirty="0"/>
-          </a:p>
-        </p:txBody>
-      </p:sp>
-      <p:sp>
-        <p:nvSpPr>
-          <p:cNvPr id="44" name="Text 42"/>
-          <p:cNvSpPr txBox="1"/>
-          <p:nvPr/>
-        </p:nvSpPr>
-        <p:spPr>
-          <a:xfrm>
-            <a:off x="9330134" y="3624163"/>
-            <a:ext cx="693241" cy="127000"/>
-          </a:xfrm>
-          <a:prstGeom prst="rect">
-            <a:avLst/>
-          </a:prstGeom>
-          <a:noFill/>
-          <a:ln/>
-        </p:spPr>
-        <p:txBody>
-          <a:bodyPr wrap="square" lIns="0" tIns="0" rIns="0" bIns="0" rtlCol="0" anchor="t"/>
-          <a:lstStyle/>
-          <a:p>
-            <a:pPr algn="l" indent="0" marL="0">
-              <a:lnSpc>
-                <a:spcPts val="960"/>
-              </a:lnSpc>
-              <a:buNone/>
-            </a:pPr>
-            <a:r>
-              <a:rPr lang="en-US" sz="800" dirty="0">
-                <a:solidFill>
-                  <a:srgbClr val="0053E2"/>
-                </a:solidFill>
-                <a:latin typeface="Everyday Sans UI Medium" pitchFamily="34" charset="0"/>
-                <a:ea typeface="Everyday Sans UI Medium" pitchFamily="34" charset="-122"/>
-                <a:cs typeface="Everyday Sans UI Medium" pitchFamily="34" charset="-120"/>
-              </a:rPr>
-              <a:t>Notifications</a:t>
-            </a:r>
-            <a:endParaRPr lang="en-US" sz="800" dirty="0"/>
-          </a:p>
-        </p:txBody>
-      </p:sp>
-      <p:sp>
-        <p:nvSpPr>
-          <p:cNvPr id="45" name="Text 43"/>
-          <p:cNvSpPr txBox="1"/>
-          <p:nvPr/>
-        </p:nvSpPr>
-        <p:spPr>
-          <a:xfrm>
-            <a:off x="508000" y="4138513"/>
-            <a:ext cx="1549400" cy="88900"/>
-          </a:xfrm>
-          <a:prstGeom prst="rect">
-            <a:avLst/>
-          </a:prstGeom>
-          <a:noFill/>
-          <a:ln/>
-        </p:spPr>
-        <p:txBody>
-          <a:bodyPr wrap="square" lIns="0" tIns="0" rIns="0" bIns="0" rtlCol="0" anchor="t"/>
-          <a:lstStyle/>
-          <a:p>
-            <a:pPr algn="l" indent="0" marL="0">
-              <a:lnSpc>
-                <a:spcPts val="660"/>
-              </a:lnSpc>
-              <a:buNone/>
-            </a:pPr>
-            <a:r>
-              <a:rPr lang="en-US" sz="550" spc="77" kern="0" dirty="0">
-                <a:solidFill>
-                  <a:srgbClr val="0053E2"/>
-                </a:solidFill>
-                <a:latin typeface="Everyday Sans Mono" pitchFamily="34" charset="0"/>
-                <a:ea typeface="Everyday Sans Mono" pitchFamily="34" charset="-122"/>
-                <a:cs typeface="Everyday Sans Mono" pitchFamily="34" charset="-120"/>
-              </a:rPr>
-              <a:t>ADVERTISING EXPERIENCES</a:t>
-            </a:r>
-            <a:endParaRPr lang="en-US" sz="550" dirty="0"/>
-          </a:p>
-        </p:txBody>
-      </p:sp>
-      <p:sp>
-        <p:nvSpPr>
-          <p:cNvPr id="46" name="Text 44"/>
-          <p:cNvSpPr txBox="1"/>
-          <p:nvPr/>
-        </p:nvSpPr>
-        <p:spPr>
-          <a:xfrm>
-            <a:off x="2108200" y="4132163"/>
-            <a:ext cx="2544318" cy="133350"/>
-          </a:xfrm>
-          <a:prstGeom prst="rect">
-            <a:avLst/>
-          </a:prstGeom>
-          <a:noFill/>
-          <a:ln/>
-        </p:spPr>
-        <p:txBody>
-          <a:bodyPr wrap="square" lIns="0" tIns="0" rIns="0" bIns="0" rtlCol="0" anchor="t"/>
-          <a:lstStyle/>
-          <a:p>
-            <a:pPr algn="l" indent="0" marL="0">
-              <a:lnSpc>
-                <a:spcPts val="1020"/>
-              </a:lnSpc>
-              <a:buNone/>
-            </a:pPr>
-            <a:r>
-              <a:rPr lang="en-US" sz="850" dirty="0">
-                <a:solidFill>
-                  <a:srgbClr val="001E60"/>
-                </a:solidFill>
-                <a:latin typeface="Everyday Sans UI Medium" pitchFamily="34" charset="0"/>
-                <a:ea typeface="Everyday Sans UI Medium" pitchFamily="34" charset="-122"/>
-                <a:cs typeface="Everyday Sans UI Medium" pitchFamily="34" charset="-120"/>
-              </a:rPr>
-              <a:t>Sponsored</a:t>
-            </a:r>
-            <a:endParaRPr lang="en-US" sz="850" dirty="0"/>
-          </a:p>
-        </p:txBody>
-      </p:sp>
-      <p:sp>
-        <p:nvSpPr>
-          <p:cNvPr id="47" name="Text 45"/>
-          <p:cNvSpPr txBox="1"/>
-          <p:nvPr/>
-        </p:nvSpPr>
-        <p:spPr>
-          <a:xfrm>
-            <a:off x="4514850" y="4132163"/>
-            <a:ext cx="2544318" cy="133350"/>
-          </a:xfrm>
-          <a:prstGeom prst="rect">
-            <a:avLst/>
-          </a:prstGeom>
-          <a:noFill/>
-          <a:ln/>
-        </p:spPr>
-        <p:txBody>
-          <a:bodyPr wrap="square" lIns="0" tIns="0" rIns="0" bIns="0" rtlCol="0" anchor="t"/>
-          <a:lstStyle/>
-          <a:p>
-            <a:pPr algn="l" indent="0" marL="0">
-              <a:lnSpc>
-                <a:spcPts val="1020"/>
-              </a:lnSpc>
-              <a:buNone/>
-            </a:pPr>
-            <a:r>
-              <a:rPr lang="en-US" sz="850" dirty="0">
-                <a:solidFill>
-                  <a:srgbClr val="001E60"/>
-                </a:solidFill>
-                <a:latin typeface="Everyday Sans UI Medium" pitchFamily="34" charset="0"/>
-                <a:ea typeface="Everyday Sans UI Medium" pitchFamily="34" charset="-122"/>
-                <a:cs typeface="Everyday Sans UI Medium" pitchFamily="34" charset="-120"/>
-              </a:rPr>
-              <a:t>Display</a:t>
-            </a:r>
-            <a:endParaRPr lang="en-US" sz="850" dirty="0"/>
-          </a:p>
-        </p:txBody>
-      </p:sp>
-      <p:sp>
-        <p:nvSpPr>
-          <p:cNvPr id="48" name="Text 46"/>
-          <p:cNvSpPr txBox="1"/>
-          <p:nvPr/>
-        </p:nvSpPr>
-        <p:spPr>
-          <a:xfrm>
-            <a:off x="6921500" y="4132163"/>
-            <a:ext cx="2544318" cy="133350"/>
-          </a:xfrm>
-          <a:prstGeom prst="rect">
-            <a:avLst/>
-          </a:prstGeom>
-          <a:noFill/>
-          <a:ln/>
-        </p:spPr>
-        <p:txBody>
-          <a:bodyPr wrap="square" lIns="0" tIns="0" rIns="0" bIns="0" rtlCol="0" anchor="t"/>
-          <a:lstStyle/>
-          <a:p>
-            <a:pPr algn="l" indent="0" marL="0">
-              <a:lnSpc>
-                <a:spcPts val="1020"/>
-              </a:lnSpc>
-              <a:buNone/>
-            </a:pPr>
-            <a:r>
-              <a:rPr lang="en-US" sz="850" dirty="0">
-                <a:solidFill>
-                  <a:srgbClr val="001E60"/>
-                </a:solidFill>
-                <a:latin typeface="Everyday Sans UI Medium" pitchFamily="34" charset="0"/>
-                <a:ea typeface="Everyday Sans UI Medium" pitchFamily="34" charset="-122"/>
-                <a:cs typeface="Everyday Sans UI Medium" pitchFamily="34" charset="-120"/>
-              </a:rPr>
-              <a:t>Offsite</a:t>
-            </a:r>
-            <a:endParaRPr lang="en-US" sz="850" dirty="0"/>
-          </a:p>
-        </p:txBody>
-      </p:sp>
-      <p:sp>
-        <p:nvSpPr>
-          <p:cNvPr id="49" name="Text 47"/>
-          <p:cNvSpPr txBox="1"/>
-          <p:nvPr/>
-        </p:nvSpPr>
-        <p:spPr>
-          <a:xfrm>
-            <a:off x="9328150" y="4132163"/>
-            <a:ext cx="2544318" cy="133350"/>
-          </a:xfrm>
-          <a:prstGeom prst="rect">
-            <a:avLst/>
-          </a:prstGeom>
-          <a:noFill/>
-          <a:ln/>
-        </p:spPr>
-        <p:txBody>
-          <a:bodyPr wrap="square" lIns="0" tIns="0" rIns="0" bIns="0" rtlCol="0" anchor="t"/>
-          <a:lstStyle/>
-          <a:p>
-            <a:pPr algn="l" indent="0" marL="0">
-              <a:lnSpc>
-                <a:spcPts val="1020"/>
-              </a:lnSpc>
-              <a:buNone/>
-            </a:pPr>
-            <a:r>
-              <a:rPr lang="en-US" sz="850" dirty="0">
-                <a:solidFill>
-                  <a:srgbClr val="001E60"/>
-                </a:solidFill>
-                <a:latin typeface="Everyday Sans UI Medium" pitchFamily="34" charset="0"/>
-                <a:ea typeface="Everyday Sans UI Medium" pitchFamily="34" charset="-122"/>
-                <a:cs typeface="Everyday Sans UI Medium" pitchFamily="34" charset="-120"/>
-              </a:rPr>
-              <a:t>Marketplace</a:t>
-            </a:r>
-            <a:endParaRPr lang="en-US" sz="850" dirty="0"/>
-          </a:p>
-        </p:txBody>
-      </p:sp>
-      <p:sp>
-        <p:nvSpPr>
-          <p:cNvPr id="50" name="Text 48"/>
-          <p:cNvSpPr txBox="1"/>
-          <p:nvPr/>
-        </p:nvSpPr>
-        <p:spPr>
-          <a:xfrm>
-            <a:off x="508000" y="4716363"/>
-            <a:ext cx="1549400" cy="87313"/>
-          </a:xfrm>
-          <a:prstGeom prst="rect">
-            <a:avLst/>
-          </a:prstGeom>
-          <a:noFill/>
-          <a:ln/>
-        </p:spPr>
-        <p:txBody>
-          <a:bodyPr wrap="square" lIns="0" tIns="0" rIns="0" bIns="0" rtlCol="0" anchor="t"/>
-          <a:lstStyle/>
-          <a:p>
-            <a:pPr algn="l" indent="0" marL="0">
-              <a:lnSpc>
-                <a:spcPts val="688"/>
-              </a:lnSpc>
-              <a:buNone/>
-            </a:pPr>
-            <a:r>
-              <a:rPr lang="en-US" sz="550" spc="77" kern="0" dirty="0">
-                <a:solidFill>
-                  <a:srgbClr val="0053E2"/>
-                </a:solidFill>
-                <a:latin typeface="Everyday Sans Mono" pitchFamily="34" charset="0"/>
-                <a:ea typeface="Everyday Sans Mono" pitchFamily="34" charset="-122"/>
-                <a:cs typeface="Everyday Sans Mono" pitchFamily="34" charset="-120"/>
-              </a:rPr>
-              <a:t>THE PRINCIPLE</a:t>
-            </a:r>
-            <a:endParaRPr lang="en-US" sz="550" dirty="0"/>
-          </a:p>
-        </p:txBody>
-      </p:sp>
-      <p:sp>
-        <p:nvSpPr>
-          <p:cNvPr id="51" name="Text 49"/>
-          <p:cNvSpPr txBox="1"/>
-          <p:nvPr/>
-        </p:nvSpPr>
-        <p:spPr>
-          <a:xfrm>
-            <a:off x="2108200" y="4602063"/>
-            <a:ext cx="10341864" cy="444500"/>
-          </a:xfrm>
-          <a:prstGeom prst="rect">
-            <a:avLst/>
-          </a:prstGeom>
-          <a:noFill/>
-          <a:ln/>
-        </p:spPr>
-        <p:txBody>
-          <a:bodyPr wrap="square" lIns="0" tIns="0" rIns="0" bIns="0" rtlCol="0" anchor="t"/>
-          <a:lstStyle/>
+              <a:t>Where advertiser jobs are common, the experience should feel common. Where the media genuinely differs, the product</a:t>
+            </a:r>
+            <a:endParaRPr lang="en-US" sz="1400" dirty="0"/>
+          </a:p>
           <a:p>
             <a:pPr algn="l" indent="0" marL="0">
               <a:lnSpc>
@@ -26687,26 +27827,6 @@
                 <a:ea typeface="Everyday Sans Headline Light" pitchFamily="34" charset="-122"/>
                 <a:cs typeface="Everyday Sans Headline Light" pitchFamily="34" charset="-120"/>
               </a:rPr>
-              <a:t>Where advertiser jobs are common, the experience should feel common. Where the media genuinely differs, the product</a:t>
-            </a:r>
-            <a:endParaRPr lang="en-US" sz="1400" dirty="0"/>
-          </a:p>
-          <a:p>
-            <a:pPr algn="l" indent="0" marL="0">
-              <a:lnSpc>
-                <a:spcPts val="1750"/>
-              </a:lnSpc>
-              <a:buNone/>
-            </a:pPr>
-            <a:r>
-              <a:rPr lang="en-US" sz="1400" spc="-28" kern="0" dirty="0">
-                <a:solidFill>
-                  <a:srgbClr val="001E60"/>
-                </a:solidFill>
-                <a:latin typeface="Everyday Sans Headline Light" pitchFamily="34" charset="0"/>
-                <a:ea typeface="Everyday Sans Headline Light" pitchFamily="34" charset="-122"/>
-                <a:cs typeface="Everyday Sans Headline Light" pitchFamily="34" charset="-120"/>
-              </a:rPr>
               <a:t>should adapt.</a:t>
             </a:r>
             <a:endParaRPr lang="en-US" sz="1400" dirty="0"/>
@@ -26715,7 +27835,7 @@
       </p:sp>
       <p:pic>
         <p:nvPicPr>
-          <p:cNvPr id="52" name="Image 0" descr="Walmart Spark">    </p:cNvPr>
+          <p:cNvPr id="50" name="Image 0" descr="Walmart Spark">    </p:cNvPr>
           <p:cNvPicPr>
             <a:picLocks noChangeAspect="1"/>
           </p:cNvPicPr>
@@ -26739,7 +27859,7 @@
       </p:pic>
       <p:sp>
         <p:nvSpPr>
-          <p:cNvPr id="53" name="Text 50"/>
+          <p:cNvPr id="51" name="Text 48"/>
           <p:cNvSpPr txBox="1"/>
           <p:nvPr/>
         </p:nvSpPr>
@@ -26778,7 +27898,7 @@
       </p:sp>
       <p:sp>
         <p:nvSpPr>
-          <p:cNvPr id="54" name="Text 51"/>
+          <p:cNvPr id="52" name="Text 49"/>
           <p:cNvSpPr txBox="1"/>
           <p:nvPr/>
         </p:nvSpPr>
@@ -26809,7 +27929,7 @@
                 <a:ea typeface="Everyday Sans Mono" pitchFamily="34" charset="-122"/>
                 <a:cs typeface="Everyday Sans Mono" pitchFamily="34" charset="-120"/>
               </a:rPr>
-              <a:t>08 / 17</a:t>
+              <a:t>08 / 18</a:t>
             </a:r>
             <a:endParaRPr lang="en-US" sz="650" dirty="0"/>
           </a:p>
@@ -28555,7 +29675,7 @@
                 <a:ea typeface="Everyday Sans Mono" pitchFamily="34" charset="-122"/>
                 <a:cs typeface="Everyday Sans Mono" pitchFamily="34" charset="-120"/>
               </a:rPr>
-              <a:t>09 / 17</a:t>
+              <a:t>09 / 18</a:t>
             </a:r>
             <a:endParaRPr lang="en-US" sz="650" dirty="0"/>
           </a:p>
